--- a/pitch_deck/ClearBill_AI_Pitch_Deck.pptx
+++ b/pitch_deck/ClearBill_AI_Pitch_Deck.pptx
@@ -13,9 +13,10 @@
     <p:sldId id="261" r:id="rId7"/>
     <p:sldId id="262" r:id="rId8"/>
     <p:sldId id="263" r:id="rId9"/>
+    <p:sldId id="264" r:id="rId10"/>
   </p:sldIdLst>
   <p:notesMasterIdLst>
-    <p:notesMasterId r:id="rId10"/>
+    <p:notesMasterId r:id="rId11"/>
   </p:notesMasterIdLst>
   <p:sldSz cx="12192000" cy="6858000"/>
   <p:notesSz cx="6858000" cy="12192000"/>
@@ -509,7 +510,7 @@
           <a:p>
             <a:r>
               <a:rPr lang="en-US" dirty="0"/>
-              <a:t>[HOOK — 0:00-0:12] Between 49 and 80 percent of medical bills in America contain an error. On a $10,000 bill, that's an average $1,300 overcharge — and almost nobody catches it, because nobody has an hour to cross-reference their bill against their insurance paperwork by hand.</a:t>
+              <a:t>[0:00-0:10 HOOK] Between 49 and 80 percent of medical bills in America contain an error. Nobody catches it, because nobody has an hour to cross-reference their bill against their insurance paperwork by hand.</a:t>
             </a:r>
             <a:endParaRPr lang="en-US" dirty="0"/>
           </a:p>
@@ -597,7 +598,7 @@
           <a:p>
             <a:r>
               <a:rPr lang="en-US" dirty="0"/>
-              <a:t>[TEAM — 0:12-0:26] I'm [Name], [background]. This is [Name], [background]. We built ClearBill AI this weekend because we wanted something we'd actually trust our own families to use the next time a bill like this showed up.</a:t>
+              <a:t>(Visual support for the hook — no new spoken content here; keep talking through the hook while this is on screen.)</a:t>
             </a:r>
             <a:endParaRPr lang="en-US" dirty="0"/>
           </a:p>
@@ -685,7 +686,7 @@
           <a:p>
             <a:r>
               <a:rPr lang="en-US" dirty="0"/>
-              <a:t>[INSIGHT + PRODUCT — 0:26-0:55] Here's the insight: the strongest evidence a bill is wrong is already sitting in a document the patient already has — their insurance company's own Explanation of Benefits. Upload your bill and your EOB, and in under a minute Gemini reads both, catches exact duplicate charges with zero-false-positive plain logic, cross-references what your insurer already denied against what you're still being billed for, and drafts a dispute letter citing the exact code and reason.</a:t>
+              <a:t>[0:10-0:22 TEAM] I'm [Name], [background]. This is [Name], [background]. We built ClearBill AI this weekend because we wanted something we'd actually trust our own families to use the next time a bill like this showed up.</a:t>
             </a:r>
             <a:endParaRPr lang="en-US" dirty="0"/>
           </a:p>
@@ -773,7 +774,7 @@
           <a:p>
             <a:r>
               <a:rPr lang="en-US" dirty="0"/>
-              <a:t>(Continued product beat — see slide 3 notes; this slide is visual support for the same 0:26-0:55 segment.)</a:t>
+              <a:t>[0:22-0:48 INSIGHT + PRODUCT] Here's what nobody else does: the proof a bill is wrong is already in your hands. When your insurer denies a charge as a duplicate, that's their own ruling, not our opinion. Upload your bill and your EOB, and Gemini reads both, catches exact duplicates deterministically, cross-references what your insurer already denied, and drafts the dispute letter — citing the exact code and reason.</a:t>
             </a:r>
             <a:endParaRPr lang="en-US" dirty="0"/>
           </a:p>
@@ -861,7 +862,7 @@
           <a:p>
             <a:r>
               <a:rPr lang="en-US" dirty="0"/>
-              <a:t>[PROOF — 0:55-1:15] We didn't just prompt this and hope. We ran the full pipeline live against Gemini, wrote an automated test suite, and caught two real bugs before this pitch — including a cross-check that was silently never firing — and fixed both. Every price on our demo bill is real, pulled straight from Stanford Health Care's own federally mandated pricing data.</a:t>
+              <a:t>(Continued visual for the 0:22-0:48 beat — this is the actual product, not a mockup.)</a:t>
             </a:r>
             <a:endParaRPr lang="en-US" dirty="0"/>
           </a:p>
@@ -949,7 +950,7 @@
           <a:p>
             <a:r>
               <a:rPr lang="en-US" dirty="0"/>
-              <a:t>[MARKET — 1:15-1:35] A hundred million Americans carry medical debt. One and a half billion medical bills go out every year. Services that do this by hand already charge 25 to 35 percent contingency fees — people are already paying for this, just slowly. We made it instant.</a:t>
+              <a:t>[0:48-1:05 PROOF] We ran this live against Gemini, wrote 27 automated tests, and fixed two real bugs before this pitch. Every price is real — pulled from Stanford Health Care's own federal pricing data.</a:t>
             </a:r>
             <a:endParaRPr lang="en-US" dirty="0"/>
           </a:p>
@@ -1037,7 +1038,7 @@
           <a:p>
             <a:r>
               <a:rPr lang="en-US" dirty="0"/>
-              <a:t>[TRACTION — 1:35-1:50] And it's built to spread on its own: 'we found $X you don't owe' is the same content shape as every viral tax-refund and settlement-check post — we built a shareable result card for exactly that moment, distributed straight into the communities already talking about this problem.</a:t>
+              <a:t>[1:05-1:25 WHY WE WIN] This isn't a chatbot wrapper. Every flag is grounded in deterministic code or your insurer's own official denial code — never a guess. And we're not building a one-time scanner. We're building the full loop: detect, dispute, follow up, and confirm the refund actually lands — which is the only reason a success fee makes sense.</a:t>
             </a:r>
             <a:endParaRPr lang="en-US" dirty="0"/>
           </a:p>
@@ -1125,7 +1126,7 @@
           <a:p>
             <a:r>
               <a:rPr lang="en-US" dirty="0"/>
-              <a:t>[CLOSE — 1:50-2:00] We're ClearBill AI. Give us two minutes with your bill, and we'll show you what it caught.</a:t>
+              <a:t>[1:25-1:45 MARKET + GTM] A hundred million Americans carry medical debt. Services that do this by hand already charge 25 to 35 percent — proof people already pay for this, just slowly. And a confirmed refund is inherently shareable: same content shape as every viral tax-refund post, distributed straight into the communities already talking about this.</a:t>
             </a:r>
             <a:endParaRPr lang="en-US" dirty="0"/>
           </a:p>
@@ -1149,6 +1150,94 @@
             <a:fld id="{F7021451-1387-4CA6-816F-3879F97B5CBC}" type="slidenum">
               <a:rPr lang="en-US"/>
               <a:t>8</a:t>
+            </a:fld>
+            <a:endParaRPr lang="en-US"/>
+          </a:p>
+        </p:txBody>
+      </p:sp>
+    </p:spTree>
+    <p:extLst>
+      <p:ext uri="{BB962C8B-B14F-4D97-AF65-F5344CB8AC3E}">
+        <p14:creationId xmlns:p14="http://schemas.microsoft.com/office/powerpoint/2010/main" val="1024086991"/>
+      </p:ext>
+    </p:extLst>
+  </p:cSld>
+  <p:clrMapOvr>
+    <a:masterClrMapping/>
+  </p:clrMapOvr>
+</p:notes>
+</file>
+
+<file path=ppt/notesSlides/notesSlide9.xml><?xml version="1.0" encoding="utf-8"?>
+<p:notes xmlns:a="http://schemas.openxmlformats.org/drawingml/2006/main" xmlns:r="http://schemas.openxmlformats.org/officeDocument/2006/relationships" xmlns:p="http://schemas.openxmlformats.org/presentationml/2006/main">
+  <p:cSld>
+    <p:spTree>
+      <p:nvGrpSpPr>
+        <p:cNvPr id="1" name=""/>
+        <p:cNvGrpSpPr/>
+        <p:nvPr/>
+      </p:nvGrpSpPr>
+      <p:grpSpPr>
+        <a:xfrm>
+          <a:off x="0" y="0"/>
+          <a:ext cx="0" cy="0"/>
+          <a:chOff x="0" y="0"/>
+          <a:chExt cx="0" cy="0"/>
+        </a:xfrm>
+      </p:grpSpPr>
+      <p:sp>
+        <p:nvSpPr>
+          <p:cNvPr id="2" name="Slide Image Placeholder 1"/>
+          <p:cNvSpPr>
+            <a:spLocks noGrp="1" noRot="1" noChangeAspect="1"/>
+          </p:cNvSpPr>
+          <p:nvPr>
+            <p:ph type="sldImg"/>
+          </p:nvPr>
+        </p:nvSpPr>
+        <p:spPr/>
+      </p:sp>
+      <p:sp>
+        <p:nvSpPr>
+          <p:cNvPr id="3" name="Notes Placeholder 2"/>
+          <p:cNvSpPr>
+            <a:spLocks noGrp="1"/>
+          </p:cNvSpPr>
+          <p:nvPr>
+            <p:ph type="body" idx="1"/>
+          </p:nvPr>
+        </p:nvSpPr>
+        <p:spPr/>
+        <p:txBody>
+          <a:bodyPr/>
+          <a:lstStyle/>
+          <a:p>
+            <a:r>
+              <a:rPr lang="en-US" dirty="0"/>
+              <a:t>[1:45-2:00 CLOSE] We're ClearBill AI. Give us two minutes with your bill, and we'll show you what it caught.</a:t>
+            </a:r>
+            <a:endParaRPr lang="en-US" dirty="0"/>
+          </a:p>
+        </p:txBody>
+      </p:sp>
+      <p:sp>
+        <p:nvSpPr>
+          <p:cNvPr id="4" name="Slide Number Placeholder 3"/>
+          <p:cNvSpPr>
+            <a:spLocks noGrp="1"/>
+          </p:cNvSpPr>
+          <p:nvPr>
+            <p:ph type="sldNum" sz="quarter" idx="10"/>
+          </p:nvPr>
+        </p:nvSpPr>
+        <p:spPr/>
+        <p:txBody>
+          <a:bodyPr/>
+          <a:lstStyle/>
+          <a:p>
+            <a:fld id="{F7021451-1387-4CA6-816F-3879F97B5CBC}" type="slidenum">
+              <a:rPr lang="en-US"/>
+              <a:t>9</a:t>
             </a:fld>
             <a:endParaRPr lang="en-US"/>
           </a:p>
@@ -1567,8 +1656,8 @@
         </p:nvSpPr>
         <p:spPr>
           <a:xfrm>
-            <a:off x="548640" y="2377440"/>
-            <a:ext cx="10515600" cy="1188720"/>
+            <a:off x="548640" y="2148840"/>
+            <a:ext cx="10515600" cy="1097280"/>
           </a:xfrm>
           <a:prstGeom prst="rect">
             <a:avLst/>
@@ -1584,7 +1673,7 @@
               <a:buNone/>
             </a:pPr>
             <a:r>
-              <a:rPr lang="en-US" sz="6000" b="1" dirty="0">
+              <a:rPr lang="en-US" sz="5600" b="1" dirty="0">
                 <a:solidFill>
                   <a:srgbClr val="FFFFFF"/>
                 </a:solidFill>
@@ -1594,7 +1683,7 @@
               </a:rPr>
               <a:t>ClearBill AI</a:t>
             </a:r>
-            <a:endParaRPr lang="en-US" sz="6000" dirty="0"/>
+            <a:endParaRPr lang="en-US" sz="5600" dirty="0"/>
           </a:p>
         </p:txBody>
       </p:sp>
@@ -1606,8 +1695,8 @@
         </p:nvSpPr>
         <p:spPr>
           <a:xfrm>
-            <a:off x="548640" y="3520440"/>
-            <a:ext cx="10058400" cy="548640"/>
+            <a:off x="548640" y="3246120"/>
+            <a:ext cx="10058400" cy="502920"/>
           </a:xfrm>
           <a:prstGeom prst="rect">
             <a:avLst/>
@@ -1623,7 +1712,7 @@
               <a:buNone/>
             </a:pPr>
             <a:r>
-              <a:rPr lang="en-US" sz="2000" i="1" dirty="0">
+              <a:rPr lang="en-US" sz="1900" i="1" dirty="0">
                 <a:solidFill>
                   <a:srgbClr val="CFE3D8"/>
                 </a:solidFill>
@@ -1633,13 +1722,55 @@
               </a:rPr>
               <a:t>Find the money hospitals didn't mean to bill you.</a:t>
             </a:r>
-            <a:endParaRPr lang="en-US" sz="2000" dirty="0"/>
+            <a:endParaRPr lang="en-US" sz="1900" dirty="0"/>
           </a:p>
         </p:txBody>
       </p:sp>
       <p:sp>
         <p:nvSpPr>
           <p:cNvPr id="6" name="Text 4"/>
+          <p:cNvSpPr/>
+          <p:nvPr/>
+        </p:nvSpPr>
+        <p:spPr>
+          <a:xfrm>
+            <a:off x="548640" y="3977640"/>
+            <a:ext cx="8961120" cy="1005840"/>
+          </a:xfrm>
+          <a:prstGeom prst="rect">
+            <a:avLst/>
+          </a:prstGeom>
+          <a:noFill/>
+          <a:ln/>
+        </p:spPr>
+        <p:txBody>
+          <a:bodyPr wrap="square" lIns="0" tIns="0" rIns="0" bIns="0" rtlCol="0" anchor="ctr"/>
+          <a:lstStyle/>
+          <a:p>
+            <a:pPr indent="0" marL="0">
+              <a:lnSpc>
+                <a:spcPct val="130000"/>
+              </a:lnSpc>
+              <a:buNone/>
+            </a:pPr>
+            <a:r>
+              <a:rPr lang="en-US" sz="1500" dirty="0">
+                <a:solidFill>
+                  <a:srgbClr val="8FB6A3"/>
+                </a:solidFill>
+                <a:latin typeface="Calibri" pitchFamily="34" charset="0"/>
+                <a:ea typeface="Calibri" pitchFamily="34" charset="-122"/>
+                <a:cs typeface="Calibri" pitchFamily="34" charset="-120"/>
+              </a:rPr>
+              <a:t>49–80% of medical bills contain an error. Nobody catches it — because nobody has an hour to cross-reference their bill against their insurance paperwork by hand.</a:t>
+            </a:r>
+            <a:endParaRPr lang="en-US" sz="1500" dirty="0"/>
+          </a:p>
+        </p:txBody>
+      </p:sp>
+      <p:sp>
+        <p:nvSpPr>
+          <p:cNvPr id="7" name="Text 5"/>
           <p:cNvSpPr/>
           <p:nvPr/>
         </p:nvSpPr>
@@ -2233,7 +2364,7 @@
                 <a:ea typeface="Calibri" pitchFamily="34" charset="-122"/>
                 <a:cs typeface="Calibri" pitchFamily="34" charset="-120"/>
               </a:rPr>
-              <a:t>2 / 8</a:t>
+              <a:t>2 / 9</a:t>
             </a:r>
             <a:endParaRPr lang="en-US" sz="1000" dirty="0"/>
           </a:p>
@@ -2304,7 +2435,7 @@
                 <a:ea typeface="Calibri" pitchFamily="34" charset="-122"/>
                 <a:cs typeface="Calibri" pitchFamily="34" charset="-120"/>
               </a:rPr>
-              <a:t>THE INSIGHT</a:t>
+              <a:t>THE TEAM</a:t>
             </a:r>
             <a:endParaRPr lang="en-US" sz="1300" dirty="0"/>
           </a:p>
@@ -2343,7 +2474,7 @@
                 <a:ea typeface="Cambria" pitchFamily="34" charset="-122"/>
                 <a:cs typeface="Cambria" pitchFamily="34" charset="-120"/>
               </a:rPr>
-              <a:t>The proof a bill is wrong is already in your hands</a:t>
+              <a:t>Built by people who wanted to trust it themselves</a:t>
             </a:r>
             <a:endParaRPr lang="en-US" sz="3400" dirty="0"/>
           </a:p>
@@ -2351,14 +2482,34 @@
       </p:sp>
       <p:sp>
         <p:nvSpPr>
-          <p:cNvPr id="4" name="Text 2"/>
-          <p:cNvSpPr/>
-          <p:nvPr/>
-        </p:nvSpPr>
-        <p:spPr>
-          <a:xfrm>
-            <a:off x="548640" y="1920240"/>
-            <a:ext cx="6035040" cy="1371600"/>
+          <p:cNvPr id="4" name="Shape 2"/>
+          <p:cNvSpPr/>
+          <p:nvPr/>
+        </p:nvSpPr>
+        <p:spPr>
+          <a:xfrm>
+            <a:off x="548640" y="2103120"/>
+            <a:ext cx="1005840" cy="1005840"/>
+          </a:xfrm>
+          <a:prstGeom prst="ellipse">
+            <a:avLst/>
+          </a:prstGeom>
+          <a:solidFill>
+            <a:srgbClr val="E6F1EA"/>
+          </a:solidFill>
+          <a:ln/>
+        </p:spPr>
+      </p:sp>
+      <p:sp>
+        <p:nvSpPr>
+          <p:cNvPr id="5" name="Text 3"/>
+          <p:cNvSpPr/>
+          <p:nvPr/>
+        </p:nvSpPr>
+        <p:spPr>
+          <a:xfrm>
+            <a:off x="548640" y="2103120"/>
+            <a:ext cx="1005840" cy="1005840"/>
           </a:xfrm>
           <a:prstGeom prst="rect">
             <a:avLst/>
@@ -2370,57 +2521,73 @@
           <a:bodyPr wrap="square" lIns="0" tIns="0" rIns="0" bIns="0" rtlCol="0" anchor="ctr"/>
           <a:lstStyle/>
           <a:p>
+            <a:pPr algn="ctr" indent="0" marL="0">
+              <a:buNone/>
+            </a:pPr>
+            <a:r>
+              <a:rPr lang="en-US" sz="2400" b="1" dirty="0">
+                <a:solidFill>
+                  <a:srgbClr val="2E7D5B"/>
+                </a:solidFill>
+                <a:latin typeface="Cambria" pitchFamily="34" charset="0"/>
+                <a:ea typeface="Cambria" pitchFamily="34" charset="-122"/>
+                <a:cs typeface="Cambria" pitchFamily="34" charset="-120"/>
+              </a:rPr>
+              <a:t>N</a:t>
+            </a:r>
+            <a:endParaRPr lang="en-US" sz="2400" dirty="0"/>
+          </a:p>
+        </p:txBody>
+      </p:sp>
+      <p:sp>
+        <p:nvSpPr>
+          <p:cNvPr id="6" name="Text 4"/>
+          <p:cNvSpPr/>
+          <p:nvPr/>
+        </p:nvSpPr>
+        <p:spPr>
+          <a:xfrm>
+            <a:off x="1737360" y="2240280"/>
+            <a:ext cx="4023360" cy="411480"/>
+          </a:xfrm>
+          <a:prstGeom prst="rect">
+            <a:avLst/>
+          </a:prstGeom>
+          <a:noFill/>
+          <a:ln/>
+        </p:spPr>
+        <p:txBody>
+          <a:bodyPr wrap="square" lIns="0" tIns="0" rIns="0" bIns="0" rtlCol="0" anchor="ctr"/>
+          <a:lstStyle/>
+          <a:p>
             <a:pPr indent="0" marL="0">
-              <a:lnSpc>
-                <a:spcPct val="125000"/>
-              </a:lnSpc>
-              <a:buNone/>
-            </a:pPr>
-            <a:r>
-              <a:rPr lang="en-US" sz="1900" dirty="0">
+              <a:buNone/>
+            </a:pPr>
+            <a:r>
+              <a:rPr lang="en-US" sz="1900" b="1" dirty="0">
                 <a:solidFill>
                   <a:srgbClr val="211F1B"/>
                 </a:solidFill>
-                <a:latin typeface="Calibri" pitchFamily="34" charset="0"/>
-                <a:ea typeface="Calibri" pitchFamily="34" charset="-122"/>
-                <a:cs typeface="Calibri" pitchFamily="34" charset="-120"/>
-              </a:rPr>
-              <a:t>When an insurer marks a charge “denied — duplicate,” that's not our judgment.</a:t>
+                <a:latin typeface="Cambria" pitchFamily="34" charset="0"/>
+                <a:ea typeface="Cambria" pitchFamily="34" charset="-122"/>
+                <a:cs typeface="Cambria" pitchFamily="34" charset="-120"/>
+              </a:rPr>
+              <a:t>[Name]</a:t>
             </a:r>
             <a:endParaRPr lang="en-US" sz="1900" dirty="0"/>
           </a:p>
-          <a:p>
-            <a:pPr indent="0" marL="0">
-              <a:lnSpc>
-                <a:spcPct val="125000"/>
-              </a:lnSpc>
-              <a:buNone/>
-            </a:pPr>
-            <a:r>
-              <a:rPr lang="en-US" sz="1900" dirty="0">
-                <a:solidFill>
-                  <a:srgbClr val="211F1B"/>
-                </a:solidFill>
-                <a:latin typeface="Calibri" pitchFamily="34" charset="0"/>
-                <a:ea typeface="Calibri" pitchFamily="34" charset="-122"/>
-                <a:cs typeface="Calibri" pitchFamily="34" charset="-120"/>
-              </a:rPr>
-              <a:t>It's the payer's own ruling.</a:t>
-            </a:r>
-            <a:endParaRPr lang="en-US" sz="1900" dirty="0"/>
-          </a:p>
-        </p:txBody>
-      </p:sp>
-      <p:sp>
-        <p:nvSpPr>
-          <p:cNvPr id="5" name="Text 3"/>
-          <p:cNvSpPr/>
-          <p:nvPr/>
-        </p:nvSpPr>
-        <p:spPr>
-          <a:xfrm>
-            <a:off x="548640" y="3429000"/>
-            <a:ext cx="6035040" cy="2103120"/>
+        </p:txBody>
+      </p:sp>
+      <p:sp>
+        <p:nvSpPr>
+          <p:cNvPr id="7" name="Text 5"/>
+          <p:cNvSpPr/>
+          <p:nvPr/>
+        </p:nvSpPr>
+        <p:spPr>
+          <a:xfrm>
+            <a:off x="1737360" y="2651760"/>
+            <a:ext cx="4023360" cy="822960"/>
           </a:xfrm>
           <a:prstGeom prst="rect">
             <a:avLst/>
@@ -2439,7 +2606,7 @@
               <a:buNone/>
             </a:pPr>
             <a:r>
-              <a:rPr lang="en-US" sz="1450" dirty="0">
+              <a:rPr lang="en-US" sz="1300" dirty="0">
                 <a:solidFill>
                   <a:srgbClr val="68655A"/>
                 </a:solidFill>
@@ -2447,26 +2614,166 @@
                 <a:ea typeface="Calibri" pitchFamily="34" charset="-122"/>
                 <a:cs typeface="Calibri" pitchFamily="34" charset="-120"/>
               </a:rPr>
-              <a:t>Nobody today cross-references the bill against the EOB by hand — it means reading two dense forms and matching line items by code and date. That's a narrow, mechanical task: exactly what a deterministic pipeline does well, with Gemini doing the document understanding and plain code doing the parts that must never hallucinate.</a:t>
-            </a:r>
-            <a:endParaRPr lang="en-US" sz="1450" dirty="0"/>
-          </a:p>
-        </p:txBody>
-      </p:sp>
-      <p:sp>
-        <p:nvSpPr>
-          <p:cNvPr id="6" name="Shape 4"/>
-          <p:cNvSpPr/>
-          <p:nvPr/>
-        </p:nvSpPr>
-        <p:spPr>
-          <a:xfrm>
-            <a:off x="7086600" y="1965960"/>
-            <a:ext cx="2103120" cy="1371600"/>
+              <a:t>[Role — one line of relevant background]</a:t>
+            </a:r>
+            <a:endParaRPr lang="en-US" sz="1300" dirty="0"/>
+          </a:p>
+        </p:txBody>
+      </p:sp>
+      <p:sp>
+        <p:nvSpPr>
+          <p:cNvPr id="8" name="Shape 6"/>
+          <p:cNvSpPr/>
+          <p:nvPr/>
+        </p:nvSpPr>
+        <p:spPr>
+          <a:xfrm>
+            <a:off x="6035040" y="2103120"/>
+            <a:ext cx="1005840" cy="1005840"/>
+          </a:xfrm>
+          <a:prstGeom prst="ellipse">
+            <a:avLst/>
+          </a:prstGeom>
+          <a:solidFill>
+            <a:srgbClr val="E6F1EA"/>
+          </a:solidFill>
+          <a:ln/>
+        </p:spPr>
+      </p:sp>
+      <p:sp>
+        <p:nvSpPr>
+          <p:cNvPr id="9" name="Text 7"/>
+          <p:cNvSpPr/>
+          <p:nvPr/>
+        </p:nvSpPr>
+        <p:spPr>
+          <a:xfrm>
+            <a:off x="6035040" y="2103120"/>
+            <a:ext cx="1005840" cy="1005840"/>
+          </a:xfrm>
+          <a:prstGeom prst="rect">
+            <a:avLst/>
+          </a:prstGeom>
+          <a:noFill/>
+          <a:ln/>
+        </p:spPr>
+        <p:txBody>
+          <a:bodyPr wrap="square" lIns="0" tIns="0" rIns="0" bIns="0" rtlCol="0" anchor="ctr"/>
+          <a:lstStyle/>
+          <a:p>
+            <a:pPr algn="ctr" indent="0" marL="0">
+              <a:buNone/>
+            </a:pPr>
+            <a:r>
+              <a:rPr lang="en-US" sz="2400" b="1" dirty="0">
+                <a:solidFill>
+                  <a:srgbClr val="2E7D5B"/>
+                </a:solidFill>
+                <a:latin typeface="Cambria" pitchFamily="34" charset="0"/>
+                <a:ea typeface="Cambria" pitchFamily="34" charset="-122"/>
+                <a:cs typeface="Cambria" pitchFamily="34" charset="-120"/>
+              </a:rPr>
+              <a:t>N</a:t>
+            </a:r>
+            <a:endParaRPr lang="en-US" sz="2400" dirty="0"/>
+          </a:p>
+        </p:txBody>
+      </p:sp>
+      <p:sp>
+        <p:nvSpPr>
+          <p:cNvPr id="10" name="Text 8"/>
+          <p:cNvSpPr/>
+          <p:nvPr/>
+        </p:nvSpPr>
+        <p:spPr>
+          <a:xfrm>
+            <a:off x="7223760" y="2240280"/>
+            <a:ext cx="4023360" cy="411480"/>
+          </a:xfrm>
+          <a:prstGeom prst="rect">
+            <a:avLst/>
+          </a:prstGeom>
+          <a:noFill/>
+          <a:ln/>
+        </p:spPr>
+        <p:txBody>
+          <a:bodyPr wrap="square" lIns="0" tIns="0" rIns="0" bIns="0" rtlCol="0" anchor="ctr"/>
+          <a:lstStyle/>
+          <a:p>
+            <a:pPr indent="0" marL="0">
+              <a:buNone/>
+            </a:pPr>
+            <a:r>
+              <a:rPr lang="en-US" sz="1900" b="1" dirty="0">
+                <a:solidFill>
+                  <a:srgbClr val="211F1B"/>
+                </a:solidFill>
+                <a:latin typeface="Cambria" pitchFamily="34" charset="0"/>
+                <a:ea typeface="Cambria" pitchFamily="34" charset="-122"/>
+                <a:cs typeface="Cambria" pitchFamily="34" charset="-120"/>
+              </a:rPr>
+              <a:t>[Name]</a:t>
+            </a:r>
+            <a:endParaRPr lang="en-US" sz="1900" dirty="0"/>
+          </a:p>
+        </p:txBody>
+      </p:sp>
+      <p:sp>
+        <p:nvSpPr>
+          <p:cNvPr id="11" name="Text 9"/>
+          <p:cNvSpPr/>
+          <p:nvPr/>
+        </p:nvSpPr>
+        <p:spPr>
+          <a:xfrm>
+            <a:off x="7223760" y="2651760"/>
+            <a:ext cx="4023360" cy="822960"/>
+          </a:xfrm>
+          <a:prstGeom prst="rect">
+            <a:avLst/>
+          </a:prstGeom>
+          <a:noFill/>
+          <a:ln/>
+        </p:spPr>
+        <p:txBody>
+          <a:bodyPr wrap="square" lIns="0" tIns="0" rIns="0" bIns="0" rtlCol="0" anchor="ctr"/>
+          <a:lstStyle/>
+          <a:p>
+            <a:pPr indent="0" marL="0">
+              <a:lnSpc>
+                <a:spcPct val="130000"/>
+              </a:lnSpc>
+              <a:buNone/>
+            </a:pPr>
+            <a:r>
+              <a:rPr lang="en-US" sz="1300" dirty="0">
+                <a:solidFill>
+                  <a:srgbClr val="68655A"/>
+                </a:solidFill>
+                <a:latin typeface="Calibri" pitchFamily="34" charset="0"/>
+                <a:ea typeface="Calibri" pitchFamily="34" charset="-122"/>
+                <a:cs typeface="Calibri" pitchFamily="34" charset="-120"/>
+              </a:rPr>
+              <a:t>[Role — one line of relevant background]</a:t>
+            </a:r>
+            <a:endParaRPr lang="en-US" sz="1300" dirty="0"/>
+          </a:p>
+        </p:txBody>
+      </p:sp>
+      <p:sp>
+        <p:nvSpPr>
+          <p:cNvPr id="12" name="Shape 10"/>
+          <p:cNvSpPr/>
+          <p:nvPr/>
+        </p:nvSpPr>
+        <p:spPr>
+          <a:xfrm>
+            <a:off x="548640" y="4114800"/>
+            <a:ext cx="10698480" cy="1645920"/>
           </a:xfrm>
           <a:prstGeom prst="roundRect">
             <a:avLst>
-              <a:gd name="adj" fmla="val 6667"/>
+              <a:gd name="adj" fmla="val 7778"/>
             </a:avLst>
           </a:prstGeom>
           <a:solidFill>
@@ -2482,14 +2789,14 @@
       </p:sp>
       <p:sp>
         <p:nvSpPr>
-          <p:cNvPr id="7" name="Text 5"/>
-          <p:cNvSpPr/>
-          <p:nvPr/>
-        </p:nvSpPr>
-        <p:spPr>
-          <a:xfrm>
-            <a:off x="7086600" y="2148840"/>
-            <a:ext cx="2103120" cy="365760"/>
+          <p:cNvPr id="13" name="Text 11"/>
+          <p:cNvSpPr/>
+          <p:nvPr/>
+        </p:nvSpPr>
+        <p:spPr>
+          <a:xfrm>
+            <a:off x="914400" y="4114800"/>
+            <a:ext cx="9966960" cy="1645920"/>
           </a:xfrm>
           <a:prstGeom prst="rect">
             <a:avLst/>
@@ -2501,11 +2808,14 @@
           <a:bodyPr wrap="square" lIns="0" tIns="0" rIns="0" bIns="0" rtlCol="0" anchor="ctr"/>
           <a:lstStyle/>
           <a:p>
-            <a:pPr algn="ctr" indent="0" marL="0">
-              <a:buNone/>
-            </a:pPr>
-            <a:r>
-              <a:rPr lang="en-US" sz="1200" b="1" dirty="0">
+            <a:pPr indent="0" marL="0">
+              <a:lnSpc>
+                <a:spcPct val="130000"/>
+              </a:lnSpc>
+              <a:buNone/>
+            </a:pPr>
+            <a:r>
+              <a:rPr lang="en-US" sz="1600" i="1" dirty="0">
                 <a:solidFill>
                   <a:srgbClr val="211F1B"/>
                 </a:solidFill>
@@ -2513,38 +2823,38 @@
                 <a:ea typeface="Calibri" pitchFamily="34" charset="-122"/>
                 <a:cs typeface="Calibri" pitchFamily="34" charset="-120"/>
               </a:rPr>
-              <a:t>Itemized Bill</a:t>
-            </a:r>
-            <a:endParaRPr lang="en-US" sz="1200" dirty="0"/>
-          </a:p>
-        </p:txBody>
-      </p:sp>
-      <p:sp>
-        <p:nvSpPr>
-          <p:cNvPr id="8" name="Text 6"/>
-          <p:cNvSpPr/>
-          <p:nvPr/>
-        </p:nvSpPr>
-        <p:spPr>
-          <a:xfrm>
-            <a:off x="7086600" y="2606040"/>
-            <a:ext cx="2103120" cy="640080"/>
-          </a:xfrm>
-          <a:prstGeom prst="rect">
-            <a:avLst/>
-          </a:prstGeom>
-          <a:noFill/>
-          <a:ln/>
-        </p:spPr>
-        <p:txBody>
-          <a:bodyPr wrap="square" lIns="0" tIns="0" rIns="0" bIns="0" rtlCol="0" anchor="ctr"/>
-          <a:lstStyle/>
-          <a:p>
-            <a:pPr algn="ctr" indent="0" marL="0">
-              <a:buNone/>
-            </a:pPr>
-            <a:r>
-              <a:rPr lang="en-US" sz="1100" dirty="0">
+              <a:t>We built ClearBill AI this weekend because we wanted something we'd actually trust our own families to use the next time a hospital bill like this showed up.</a:t>
+            </a:r>
+            <a:endParaRPr lang="en-US" sz="1600" dirty="0"/>
+          </a:p>
+        </p:txBody>
+      </p:sp>
+      <p:sp>
+        <p:nvSpPr>
+          <p:cNvPr id="14" name="Text 12"/>
+          <p:cNvSpPr/>
+          <p:nvPr/>
+        </p:nvSpPr>
+        <p:spPr>
+          <a:xfrm>
+            <a:off x="11338560" y="6446520"/>
+            <a:ext cx="640080" cy="274320"/>
+          </a:xfrm>
+          <a:prstGeom prst="rect">
+            <a:avLst/>
+          </a:prstGeom>
+          <a:noFill/>
+          <a:ln/>
+        </p:spPr>
+        <p:txBody>
+          <a:bodyPr wrap="square" rtlCol="0" anchor="ctr"/>
+          <a:lstStyle/>
+          <a:p>
+            <a:pPr algn="r" indent="0" marL="0">
+              <a:buNone/>
+            </a:pPr>
+            <a:r>
+              <a:rPr lang="en-US" sz="1000" dirty="0">
                 <a:solidFill>
                   <a:srgbClr val="68655A"/>
                 </a:solidFill>
@@ -2552,246 +2862,7 @@
                 <a:ea typeface="Calibri" pitchFamily="34" charset="-122"/>
                 <a:cs typeface="Calibri" pitchFamily="34" charset="-120"/>
               </a:rPr>
-              <a:t>CPT 36415</a:t>
-            </a:r>
-            <a:endParaRPr lang="en-US" sz="1100" dirty="0"/>
-          </a:p>
-          <a:p>
-            <a:pPr algn="ctr" indent="0" marL="0">
-              <a:buNone/>
-            </a:pPr>
-            <a:r>
-              <a:rPr lang="en-US" sz="1100" dirty="0">
-                <a:solidFill>
-                  <a:srgbClr val="68655A"/>
-                </a:solidFill>
-                <a:latin typeface="Calibri" pitchFamily="34" charset="0"/>
-                <a:ea typeface="Calibri" pitchFamily="34" charset="-122"/>
-                <a:cs typeface="Calibri" pitchFamily="34" charset="-120"/>
-              </a:rPr>
-              <a:t>billed twice</a:t>
-            </a:r>
-            <a:endParaRPr lang="en-US" sz="1100" dirty="0"/>
-          </a:p>
-        </p:txBody>
-      </p:sp>
-      <p:sp>
-        <p:nvSpPr>
-          <p:cNvPr id="9" name="Shape 7"/>
-          <p:cNvSpPr/>
-          <p:nvPr/>
-        </p:nvSpPr>
-        <p:spPr>
-          <a:xfrm>
-            <a:off x="9418320" y="1965960"/>
-            <a:ext cx="2103120" cy="1371600"/>
-          </a:xfrm>
-          <a:prstGeom prst="roundRect">
-            <a:avLst>
-              <a:gd name="adj" fmla="val 6667"/>
-            </a:avLst>
-          </a:prstGeom>
-          <a:solidFill>
-            <a:srgbClr val="FFFFFF"/>
-          </a:solidFill>
-          <a:ln w="12700">
-            <a:solidFill>
-              <a:srgbClr val="E7E3D9"/>
-            </a:solidFill>
-            <a:prstDash val="solid"/>
-          </a:ln>
-        </p:spPr>
-      </p:sp>
-      <p:sp>
-        <p:nvSpPr>
-          <p:cNvPr id="10" name="Text 8"/>
-          <p:cNvSpPr/>
-          <p:nvPr/>
-        </p:nvSpPr>
-        <p:spPr>
-          <a:xfrm>
-            <a:off x="9418320" y="2148840"/>
-            <a:ext cx="2103120" cy="365760"/>
-          </a:xfrm>
-          <a:prstGeom prst="rect">
-            <a:avLst/>
-          </a:prstGeom>
-          <a:noFill/>
-          <a:ln/>
-        </p:spPr>
-        <p:txBody>
-          <a:bodyPr wrap="square" lIns="0" tIns="0" rIns="0" bIns="0" rtlCol="0" anchor="ctr"/>
-          <a:lstStyle/>
-          <a:p>
-            <a:pPr algn="ctr" indent="0" marL="0">
-              <a:buNone/>
-            </a:pPr>
-            <a:r>
-              <a:rPr lang="en-US" sz="1200" b="1" dirty="0">
-                <a:solidFill>
-                  <a:srgbClr val="211F1B"/>
-                </a:solidFill>
-                <a:latin typeface="Calibri" pitchFamily="34" charset="0"/>
-                <a:ea typeface="Calibri" pitchFamily="34" charset="-122"/>
-                <a:cs typeface="Calibri" pitchFamily="34" charset="-120"/>
-              </a:rPr>
-              <a:t>Insurance EOB</a:t>
-            </a:r>
-            <a:endParaRPr lang="en-US" sz="1200" dirty="0"/>
-          </a:p>
-        </p:txBody>
-      </p:sp>
-      <p:sp>
-        <p:nvSpPr>
-          <p:cNvPr id="11" name="Text 9"/>
-          <p:cNvSpPr/>
-          <p:nvPr/>
-        </p:nvSpPr>
-        <p:spPr>
-          <a:xfrm>
-            <a:off x="9418320" y="2606040"/>
-            <a:ext cx="2103120" cy="640080"/>
-          </a:xfrm>
-          <a:prstGeom prst="rect">
-            <a:avLst/>
-          </a:prstGeom>
-          <a:noFill/>
-          <a:ln/>
-        </p:spPr>
-        <p:txBody>
-          <a:bodyPr wrap="square" lIns="0" tIns="0" rIns="0" bIns="0" rtlCol="0" anchor="ctr"/>
-          <a:lstStyle/>
-          <a:p>
-            <a:pPr algn="ctr" indent="0" marL="0">
-              <a:buNone/>
-            </a:pPr>
-            <a:r>
-              <a:rPr lang="en-US" sz="1100" dirty="0">
-                <a:solidFill>
-                  <a:srgbClr val="68655A"/>
-                </a:solidFill>
-                <a:latin typeface="Calibri" pitchFamily="34" charset="0"/>
-                <a:ea typeface="Calibri" pitchFamily="34" charset="-122"/>
-                <a:cs typeface="Calibri" pitchFamily="34" charset="-120"/>
-              </a:rPr>
-              <a:t>CARC 18:</a:t>
-            </a:r>
-            <a:endParaRPr lang="en-US" sz="1100" dirty="0"/>
-          </a:p>
-          <a:p>
-            <a:pPr algn="ctr" indent="0" marL="0">
-              <a:buNone/>
-            </a:pPr>
-            <a:r>
-              <a:rPr lang="en-US" sz="1100" dirty="0">
-                <a:solidFill>
-                  <a:srgbClr val="68655A"/>
-                </a:solidFill>
-                <a:latin typeface="Calibri" pitchFamily="34" charset="0"/>
-                <a:ea typeface="Calibri" pitchFamily="34" charset="-122"/>
-                <a:cs typeface="Calibri" pitchFamily="34" charset="-120"/>
-              </a:rPr>
-              <a:t>denied duplicate</a:t>
-            </a:r>
-            <a:endParaRPr lang="en-US" sz="1100" dirty="0"/>
-          </a:p>
-        </p:txBody>
-      </p:sp>
-      <p:sp>
-        <p:nvSpPr>
-          <p:cNvPr id="12" name="Shape 10"/>
-          <p:cNvSpPr/>
-          <p:nvPr/>
-        </p:nvSpPr>
-        <p:spPr>
-          <a:xfrm>
-            <a:off x="8092440" y="3657600"/>
-            <a:ext cx="2514600" cy="777240"/>
-          </a:xfrm>
-          <a:prstGeom prst="roundRect">
-            <a:avLst>
-              <a:gd name="adj" fmla="val 49412"/>
-            </a:avLst>
-          </a:prstGeom>
-          <a:solidFill>
-            <a:srgbClr val="F5E2DB"/>
-          </a:solidFill>
-          <a:ln/>
-        </p:spPr>
-      </p:sp>
-      <p:sp>
-        <p:nvSpPr>
-          <p:cNvPr id="13" name="Text 11"/>
-          <p:cNvSpPr/>
-          <p:nvPr/>
-        </p:nvSpPr>
-        <p:spPr>
-          <a:xfrm>
-            <a:off x="8092440" y="3657600"/>
-            <a:ext cx="2514600" cy="777240"/>
-          </a:xfrm>
-          <a:prstGeom prst="rect">
-            <a:avLst/>
-          </a:prstGeom>
-          <a:noFill/>
-          <a:ln/>
-        </p:spPr>
-        <p:txBody>
-          <a:bodyPr wrap="square" lIns="0" tIns="0" rIns="0" bIns="0" rtlCol="0" anchor="ctr"/>
-          <a:lstStyle/>
-          <a:p>
-            <a:pPr algn="ctr" indent="0" marL="0">
-              <a:buNone/>
-            </a:pPr>
-            <a:r>
-              <a:rPr lang="en-US" sz="1600" b="1" dirty="0">
-                <a:solidFill>
-                  <a:srgbClr val="AB4A37"/>
-                </a:solidFill>
-                <a:latin typeface="Cambria" pitchFamily="34" charset="0"/>
-                <a:ea typeface="Cambria" pitchFamily="34" charset="-122"/>
-                <a:cs typeface="Cambria" pitchFamily="34" charset="-120"/>
-              </a:rPr>
-              <a:t>$112 flagged</a:t>
-            </a:r>
-            <a:endParaRPr lang="en-US" sz="1600" dirty="0"/>
-          </a:p>
-        </p:txBody>
-      </p:sp>
-      <p:sp>
-        <p:nvSpPr>
-          <p:cNvPr id="14" name="Text 12"/>
-          <p:cNvSpPr/>
-          <p:nvPr/>
-        </p:nvSpPr>
-        <p:spPr>
-          <a:xfrm>
-            <a:off x="11338560" y="6446520"/>
-            <a:ext cx="640080" cy="274320"/>
-          </a:xfrm>
-          <a:prstGeom prst="rect">
-            <a:avLst/>
-          </a:prstGeom>
-          <a:noFill/>
-          <a:ln/>
-        </p:spPr>
-        <p:txBody>
-          <a:bodyPr wrap="square" rtlCol="0" anchor="ctr"/>
-          <a:lstStyle/>
-          <a:p>
-            <a:pPr algn="r" indent="0" marL="0">
-              <a:buNone/>
-            </a:pPr>
-            <a:r>
-              <a:rPr lang="en-US" sz="1000" dirty="0">
-                <a:solidFill>
-                  <a:srgbClr val="68655A"/>
-                </a:solidFill>
-                <a:latin typeface="Calibri" pitchFamily="34" charset="0"/>
-                <a:ea typeface="Calibri" pitchFamily="34" charset="-122"/>
-                <a:cs typeface="Calibri" pitchFamily="34" charset="-120"/>
-              </a:rPr>
-              <a:t>3 / 8</a:t>
+              <a:t>3 / 9</a:t>
             </a:r>
             <a:endParaRPr lang="en-US" sz="1000" dirty="0"/>
           </a:p>
@@ -2862,7 +2933,7 @@
                 <a:ea typeface="Calibri" pitchFamily="34" charset="-122"/>
                 <a:cs typeface="Calibri" pitchFamily="34" charset="-120"/>
               </a:rPr>
-              <a:t>THE PRODUCT</a:t>
+              <a:t>THE INSIGHT</a:t>
             </a:r>
             <a:endParaRPr lang="en-US" sz="1300" dirty="0"/>
           </a:p>
@@ -2901,7 +2972,7 @@
                 <a:ea typeface="Cambria" pitchFamily="34" charset="-122"/>
                 <a:cs typeface="Cambria" pitchFamily="34" charset="-120"/>
               </a:rPr>
-              <a:t>Upload. We check it. You dispute it.</a:t>
+              <a:t>The proof a bill is wrong is already in your hands</a:t>
             </a:r>
             <a:endParaRPr lang="en-US" sz="3400" dirty="0"/>
           </a:p>
@@ -2909,112 +2980,14 @@
       </p:sp>
       <p:sp>
         <p:nvSpPr>
-          <p:cNvPr id="4" name="Shape 2"/>
-          <p:cNvSpPr/>
-          <p:nvPr/>
-        </p:nvSpPr>
-        <p:spPr>
-          <a:xfrm>
-            <a:off x="548640" y="2103120"/>
-            <a:ext cx="502920" cy="502920"/>
-          </a:xfrm>
-          <a:prstGeom prst="ellipse">
-            <a:avLst/>
-          </a:prstGeom>
-          <a:solidFill>
-            <a:srgbClr val="E6F1EA"/>
-          </a:solidFill>
-          <a:ln/>
-        </p:spPr>
-      </p:sp>
-      <p:sp>
-        <p:nvSpPr>
-          <p:cNvPr id="5" name="Text 3"/>
-          <p:cNvSpPr/>
-          <p:nvPr/>
-        </p:nvSpPr>
-        <p:spPr>
-          <a:xfrm>
-            <a:off x="548640" y="2103120"/>
-            <a:ext cx="502920" cy="502920"/>
-          </a:xfrm>
-          <a:prstGeom prst="rect">
-            <a:avLst/>
-          </a:prstGeom>
-          <a:noFill/>
-          <a:ln/>
-        </p:spPr>
-        <p:txBody>
-          <a:bodyPr wrap="square" lIns="0" tIns="0" rIns="0" bIns="0" rtlCol="0" anchor="ctr"/>
-          <a:lstStyle/>
-          <a:p>
-            <a:pPr algn="ctr" indent="0" marL="0">
-              <a:buNone/>
-            </a:pPr>
-            <a:r>
-              <a:rPr lang="en-US" sz="1600" b="1" dirty="0">
-                <a:solidFill>
-                  <a:srgbClr val="2E7D5B"/>
-                </a:solidFill>
-                <a:latin typeface="Cambria" pitchFamily="34" charset="0"/>
-                <a:ea typeface="Cambria" pitchFamily="34" charset="-122"/>
-                <a:cs typeface="Cambria" pitchFamily="34" charset="-120"/>
-              </a:rPr>
-              <a:t>1</a:t>
-            </a:r>
-            <a:endParaRPr lang="en-US" sz="1600" dirty="0"/>
-          </a:p>
-        </p:txBody>
-      </p:sp>
-      <p:sp>
-        <p:nvSpPr>
-          <p:cNvPr id="6" name="Text 4"/>
-          <p:cNvSpPr/>
-          <p:nvPr/>
-        </p:nvSpPr>
-        <p:spPr>
-          <a:xfrm>
-            <a:off x="1188720" y="2121408"/>
-            <a:ext cx="2834640" cy="365760"/>
-          </a:xfrm>
-          <a:prstGeom prst="rect">
-            <a:avLst/>
-          </a:prstGeom>
-          <a:noFill/>
-          <a:ln/>
-        </p:spPr>
-        <p:txBody>
-          <a:bodyPr wrap="square" lIns="0" tIns="0" rIns="0" bIns="0" rtlCol="0" anchor="ctr"/>
-          <a:lstStyle/>
-          <a:p>
-            <a:pPr indent="0" marL="0">
-              <a:buNone/>
-            </a:pPr>
-            <a:r>
-              <a:rPr lang="en-US" sz="1500" b="1" dirty="0">
-                <a:solidFill>
-                  <a:srgbClr val="211F1B"/>
-                </a:solidFill>
-                <a:latin typeface="Calibri" pitchFamily="34" charset="0"/>
-                <a:ea typeface="Calibri" pitchFamily="34" charset="-122"/>
-                <a:cs typeface="Calibri" pitchFamily="34" charset="-120"/>
-              </a:rPr>
-              <a:t>Upload</a:t>
-            </a:r>
-            <a:endParaRPr lang="en-US" sz="1500" dirty="0"/>
-          </a:p>
-        </p:txBody>
-      </p:sp>
-      <p:sp>
-        <p:nvSpPr>
-          <p:cNvPr id="7" name="Text 5"/>
-          <p:cNvSpPr/>
-          <p:nvPr/>
-        </p:nvSpPr>
-        <p:spPr>
-          <a:xfrm>
-            <a:off x="548640" y="2743200"/>
-            <a:ext cx="3383280" cy="914400"/>
+          <p:cNvPr id="4" name="Text 2"/>
+          <p:cNvSpPr/>
+          <p:nvPr/>
+        </p:nvSpPr>
+        <p:spPr>
+          <a:xfrm>
+            <a:off x="548640" y="1920240"/>
+            <a:ext cx="6035040" cy="1371600"/>
           </a:xfrm>
           <a:prstGeom prst="rect">
             <a:avLst/>
@@ -3033,138 +3006,18 @@
               <a:buNone/>
             </a:pPr>
             <a:r>
-              <a:rPr lang="en-US" sz="1250" dirty="0">
-                <a:solidFill>
-                  <a:srgbClr val="68655A"/>
+              <a:rPr lang="en-US" sz="1900" dirty="0">
+                <a:solidFill>
+                  <a:srgbClr val="211F1B"/>
                 </a:solidFill>
                 <a:latin typeface="Calibri" pitchFamily="34" charset="0"/>
                 <a:ea typeface="Calibri" pitchFamily="34" charset="-122"/>
                 <a:cs typeface="Calibri" pitchFamily="34" charset="-120"/>
               </a:rPr>
-              <a:t>Your itemized bill, and your insurance statement if you have one</a:t>
-            </a:r>
-            <a:endParaRPr lang="en-US" sz="1250" dirty="0"/>
-          </a:p>
-        </p:txBody>
-      </p:sp>
-      <p:sp>
-        <p:nvSpPr>
-          <p:cNvPr id="8" name="Shape 6"/>
-          <p:cNvSpPr/>
-          <p:nvPr/>
-        </p:nvSpPr>
-        <p:spPr>
-          <a:xfrm>
-            <a:off x="4297680" y="2103120"/>
-            <a:ext cx="502920" cy="502920"/>
-          </a:xfrm>
-          <a:prstGeom prst="ellipse">
-            <a:avLst/>
-          </a:prstGeom>
-          <a:solidFill>
-            <a:srgbClr val="E6F1EA"/>
-          </a:solidFill>
-          <a:ln/>
-        </p:spPr>
-      </p:sp>
-      <p:sp>
-        <p:nvSpPr>
-          <p:cNvPr id="9" name="Text 7"/>
-          <p:cNvSpPr/>
-          <p:nvPr/>
-        </p:nvSpPr>
-        <p:spPr>
-          <a:xfrm>
-            <a:off x="4297680" y="2103120"/>
-            <a:ext cx="502920" cy="502920"/>
-          </a:xfrm>
-          <a:prstGeom prst="rect">
-            <a:avLst/>
-          </a:prstGeom>
-          <a:noFill/>
-          <a:ln/>
-        </p:spPr>
-        <p:txBody>
-          <a:bodyPr wrap="square" lIns="0" tIns="0" rIns="0" bIns="0" rtlCol="0" anchor="ctr"/>
-          <a:lstStyle/>
-          <a:p>
-            <a:pPr algn="ctr" indent="0" marL="0">
-              <a:buNone/>
-            </a:pPr>
-            <a:r>
-              <a:rPr lang="en-US" sz="1600" b="1" dirty="0">
-                <a:solidFill>
-                  <a:srgbClr val="2E7D5B"/>
-                </a:solidFill>
-                <a:latin typeface="Cambria" pitchFamily="34" charset="0"/>
-                <a:ea typeface="Cambria" pitchFamily="34" charset="-122"/>
-                <a:cs typeface="Cambria" pitchFamily="34" charset="-120"/>
-              </a:rPr>
-              <a:t>2</a:t>
-            </a:r>
-            <a:endParaRPr lang="en-US" sz="1600" dirty="0"/>
-          </a:p>
-        </p:txBody>
-      </p:sp>
-      <p:sp>
-        <p:nvSpPr>
-          <p:cNvPr id="10" name="Text 8"/>
-          <p:cNvSpPr/>
-          <p:nvPr/>
-        </p:nvSpPr>
-        <p:spPr>
-          <a:xfrm>
-            <a:off x="4937760" y="2121408"/>
-            <a:ext cx="2834640" cy="365760"/>
-          </a:xfrm>
-          <a:prstGeom prst="rect">
-            <a:avLst/>
-          </a:prstGeom>
-          <a:noFill/>
-          <a:ln/>
-        </p:spPr>
-        <p:txBody>
-          <a:bodyPr wrap="square" lIns="0" tIns="0" rIns="0" bIns="0" rtlCol="0" anchor="ctr"/>
-          <a:lstStyle/>
-          <a:p>
-            <a:pPr indent="0" marL="0">
-              <a:buNone/>
-            </a:pPr>
-            <a:r>
-              <a:rPr lang="en-US" sz="1500" b="1" dirty="0">
-                <a:solidFill>
-                  <a:srgbClr val="211F1B"/>
-                </a:solidFill>
-                <a:latin typeface="Calibri" pitchFamily="34" charset="0"/>
-                <a:ea typeface="Calibri" pitchFamily="34" charset="-122"/>
-                <a:cs typeface="Calibri" pitchFamily="34" charset="-120"/>
-              </a:rPr>
-              <a:t>We check it</a:t>
-            </a:r>
-            <a:endParaRPr lang="en-US" sz="1500" dirty="0"/>
-          </a:p>
-        </p:txBody>
-      </p:sp>
-      <p:sp>
-        <p:nvSpPr>
-          <p:cNvPr id="11" name="Text 9"/>
-          <p:cNvSpPr/>
-          <p:nvPr/>
-        </p:nvSpPr>
-        <p:spPr>
-          <a:xfrm>
-            <a:off x="4297680" y="2743200"/>
-            <a:ext cx="3383280" cy="914400"/>
-          </a:xfrm>
-          <a:prstGeom prst="rect">
-            <a:avLst/>
-          </a:prstGeom>
-          <a:noFill/>
-          <a:ln/>
-        </p:spPr>
-        <p:txBody>
-          <a:bodyPr wrap="square" lIns="0" tIns="0" rIns="0" bIns="0" rtlCol="0" anchor="ctr"/>
-          <a:lstStyle/>
+              <a:t>When an insurer marks a charge “denied — duplicate,” that's not our judgment.</a:t>
+            </a:r>
+            <a:endParaRPr lang="en-US" sz="1900" dirty="0"/>
+          </a:p>
           <a:p>
             <a:pPr indent="0" marL="0">
               <a:lnSpc>
@@ -3173,50 +3026,30 @@
               <a:buNone/>
             </a:pPr>
             <a:r>
-              <a:rPr lang="en-US" sz="1250" dirty="0">
-                <a:solidFill>
-                  <a:srgbClr val="68655A"/>
+              <a:rPr lang="en-US" sz="1900" dirty="0">
+                <a:solidFill>
+                  <a:srgbClr val="211F1B"/>
                 </a:solidFill>
                 <a:latin typeface="Calibri" pitchFamily="34" charset="0"/>
                 <a:ea typeface="Calibri" pitchFamily="34" charset="-122"/>
                 <a:cs typeface="Calibri" pitchFamily="34" charset="-120"/>
               </a:rPr>
-              <a:t>Duplicate charges, and anything your insurer already denied</a:t>
-            </a:r>
-            <a:endParaRPr lang="en-US" sz="1250" dirty="0"/>
-          </a:p>
-        </p:txBody>
-      </p:sp>
-      <p:sp>
-        <p:nvSpPr>
-          <p:cNvPr id="12" name="Shape 10"/>
-          <p:cNvSpPr/>
-          <p:nvPr/>
-        </p:nvSpPr>
-        <p:spPr>
-          <a:xfrm>
-            <a:off x="8046720" y="2103120"/>
-            <a:ext cx="502920" cy="502920"/>
-          </a:xfrm>
-          <a:prstGeom prst="ellipse">
-            <a:avLst/>
-          </a:prstGeom>
-          <a:solidFill>
-            <a:srgbClr val="E6F1EA"/>
-          </a:solidFill>
-          <a:ln/>
-        </p:spPr>
-      </p:sp>
-      <p:sp>
-        <p:nvSpPr>
-          <p:cNvPr id="13" name="Text 11"/>
-          <p:cNvSpPr/>
-          <p:nvPr/>
-        </p:nvSpPr>
-        <p:spPr>
-          <a:xfrm>
-            <a:off x="8046720" y="2103120"/>
-            <a:ext cx="502920" cy="502920"/>
+              <a:t>It's the payer's own ruling.</a:t>
+            </a:r>
+            <a:endParaRPr lang="en-US" sz="1900" dirty="0"/>
+          </a:p>
+        </p:txBody>
+      </p:sp>
+      <p:sp>
+        <p:nvSpPr>
+          <p:cNvPr id="5" name="Text 3"/>
+          <p:cNvSpPr/>
+          <p:nvPr/>
+        </p:nvSpPr>
+        <p:spPr>
+          <a:xfrm>
+            <a:off x="548640" y="3429000"/>
+            <a:ext cx="6035040" cy="2103120"/>
           </a:xfrm>
           <a:prstGeom prst="rect">
             <a:avLst/>
@@ -3228,119 +3061,41 @@
           <a:bodyPr wrap="square" lIns="0" tIns="0" rIns="0" bIns="0" rtlCol="0" anchor="ctr"/>
           <a:lstStyle/>
           <a:p>
-            <a:pPr algn="ctr" indent="0" marL="0">
-              <a:buNone/>
-            </a:pPr>
-            <a:r>
-              <a:rPr lang="en-US" sz="1600" b="1" dirty="0">
-                <a:solidFill>
-                  <a:srgbClr val="2E7D5B"/>
-                </a:solidFill>
-                <a:latin typeface="Cambria" pitchFamily="34" charset="0"/>
-                <a:ea typeface="Cambria" pitchFamily="34" charset="-122"/>
-                <a:cs typeface="Cambria" pitchFamily="34" charset="-120"/>
-              </a:rPr>
-              <a:t>3</a:t>
-            </a:r>
-            <a:endParaRPr lang="en-US" sz="1600" dirty="0"/>
-          </a:p>
-        </p:txBody>
-      </p:sp>
-      <p:sp>
-        <p:nvSpPr>
-          <p:cNvPr id="14" name="Text 12"/>
-          <p:cNvSpPr/>
-          <p:nvPr/>
-        </p:nvSpPr>
-        <p:spPr>
-          <a:xfrm>
-            <a:off x="8686800" y="2121408"/>
-            <a:ext cx="2834640" cy="365760"/>
-          </a:xfrm>
-          <a:prstGeom prst="rect">
-            <a:avLst/>
-          </a:prstGeom>
-          <a:noFill/>
-          <a:ln/>
-        </p:spPr>
-        <p:txBody>
-          <a:bodyPr wrap="square" lIns="0" tIns="0" rIns="0" bIns="0" rtlCol="0" anchor="ctr"/>
-          <a:lstStyle/>
-          <a:p>
             <a:pPr indent="0" marL="0">
-              <a:buNone/>
-            </a:pPr>
-            <a:r>
-              <a:rPr lang="en-US" sz="1500" b="1" dirty="0">
-                <a:solidFill>
-                  <a:srgbClr val="211F1B"/>
+              <a:lnSpc>
+                <a:spcPct val="130000"/>
+              </a:lnSpc>
+              <a:buNone/>
+            </a:pPr>
+            <a:r>
+              <a:rPr lang="en-US" sz="1450" dirty="0">
+                <a:solidFill>
+                  <a:srgbClr val="68655A"/>
                 </a:solidFill>
                 <a:latin typeface="Calibri" pitchFamily="34" charset="0"/>
                 <a:ea typeface="Calibri" pitchFamily="34" charset="-122"/>
                 <a:cs typeface="Calibri" pitchFamily="34" charset="-120"/>
               </a:rPr>
-              <a:t>You dispute it</a:t>
-            </a:r>
-            <a:endParaRPr lang="en-US" sz="1500" dirty="0"/>
-          </a:p>
-        </p:txBody>
-      </p:sp>
-      <p:sp>
-        <p:nvSpPr>
-          <p:cNvPr id="15" name="Text 13"/>
-          <p:cNvSpPr/>
-          <p:nvPr/>
-        </p:nvSpPr>
-        <p:spPr>
-          <a:xfrm>
-            <a:off x="8046720" y="2743200"/>
-            <a:ext cx="3383280" cy="914400"/>
-          </a:xfrm>
-          <a:prstGeom prst="rect">
-            <a:avLst/>
-          </a:prstGeom>
-          <a:noFill/>
-          <a:ln/>
-        </p:spPr>
-        <p:txBody>
-          <a:bodyPr wrap="square" lIns="0" tIns="0" rIns="0" bIns="0" rtlCol="0" anchor="ctr"/>
-          <a:lstStyle/>
-          <a:p>
-            <a:pPr indent="0" marL="0">
-              <a:lnSpc>
-                <a:spcPct val="125000"/>
-              </a:lnSpc>
-              <a:buNone/>
-            </a:pPr>
-            <a:r>
-              <a:rPr lang="en-US" sz="1250" dirty="0">
-                <a:solidFill>
-                  <a:srgbClr val="68655A"/>
-                </a:solidFill>
-                <a:latin typeface="Calibri" pitchFamily="34" charset="0"/>
-                <a:ea typeface="Calibri" pitchFamily="34" charset="-122"/>
-                <a:cs typeface="Calibri" pitchFamily="34" charset="-120"/>
-              </a:rPr>
-              <a:t>A ready-to-send letter citing the exact lines and codes</a:t>
-            </a:r>
-            <a:endParaRPr lang="en-US" sz="1250" dirty="0"/>
-          </a:p>
-        </p:txBody>
-      </p:sp>
-      <p:sp>
-        <p:nvSpPr>
-          <p:cNvPr id="16" name="Shape 14"/>
-          <p:cNvSpPr/>
-          <p:nvPr/>
-        </p:nvSpPr>
-        <p:spPr>
-          <a:xfrm>
-            <a:off x="548640" y="3977640"/>
-            <a:ext cx="10698480" cy="1965960"/>
+              <a:t>Nobody today cross-references the bill against the EOB by hand — it means reading two dense forms and matching line items by code and date. That's a narrow, mechanical task: exactly what a deterministic pipeline does well, with Gemini doing the document understanding and plain code doing the parts that must never hallucinate.</a:t>
+            </a:r>
+            <a:endParaRPr lang="en-US" sz="1450" dirty="0"/>
+          </a:p>
+        </p:txBody>
+      </p:sp>
+      <p:sp>
+        <p:nvSpPr>
+          <p:cNvPr id="6" name="Shape 4"/>
+          <p:cNvSpPr/>
+          <p:nvPr/>
+        </p:nvSpPr>
+        <p:spPr>
+          <a:xfrm>
+            <a:off x="7086600" y="1965960"/>
+            <a:ext cx="2103120" cy="1371600"/>
           </a:xfrm>
           <a:prstGeom prst="roundRect">
             <a:avLst>
-              <a:gd name="adj" fmla="val 6512"/>
+              <a:gd name="adj" fmla="val 6667"/>
             </a:avLst>
           </a:prstGeom>
           <a:solidFill>
@@ -3356,18 +3111,235 @@
       </p:sp>
       <p:sp>
         <p:nvSpPr>
-          <p:cNvPr id="17" name="Shape 15"/>
-          <p:cNvSpPr/>
-          <p:nvPr/>
-        </p:nvSpPr>
-        <p:spPr>
-          <a:xfrm>
-            <a:off x="822960" y="4206240"/>
-            <a:ext cx="1828800" cy="365760"/>
+          <p:cNvPr id="7" name="Text 5"/>
+          <p:cNvSpPr/>
+          <p:nvPr/>
+        </p:nvSpPr>
+        <p:spPr>
+          <a:xfrm>
+            <a:off x="7086600" y="2148840"/>
+            <a:ext cx="2103120" cy="365760"/>
+          </a:xfrm>
+          <a:prstGeom prst="rect">
+            <a:avLst/>
+          </a:prstGeom>
+          <a:noFill/>
+          <a:ln/>
+        </p:spPr>
+        <p:txBody>
+          <a:bodyPr wrap="square" lIns="0" tIns="0" rIns="0" bIns="0" rtlCol="0" anchor="ctr"/>
+          <a:lstStyle/>
+          <a:p>
+            <a:pPr algn="ctr" indent="0" marL="0">
+              <a:buNone/>
+            </a:pPr>
+            <a:r>
+              <a:rPr lang="en-US" sz="1200" b="1" dirty="0">
+                <a:solidFill>
+                  <a:srgbClr val="211F1B"/>
+                </a:solidFill>
+                <a:latin typeface="Calibri" pitchFamily="34" charset="0"/>
+                <a:ea typeface="Calibri" pitchFamily="34" charset="-122"/>
+                <a:cs typeface="Calibri" pitchFamily="34" charset="-120"/>
+              </a:rPr>
+              <a:t>Itemized Bill</a:t>
+            </a:r>
+            <a:endParaRPr lang="en-US" sz="1200" dirty="0"/>
+          </a:p>
+        </p:txBody>
+      </p:sp>
+      <p:sp>
+        <p:nvSpPr>
+          <p:cNvPr id="8" name="Text 6"/>
+          <p:cNvSpPr/>
+          <p:nvPr/>
+        </p:nvSpPr>
+        <p:spPr>
+          <a:xfrm>
+            <a:off x="7086600" y="2606040"/>
+            <a:ext cx="2103120" cy="640080"/>
+          </a:xfrm>
+          <a:prstGeom prst="rect">
+            <a:avLst/>
+          </a:prstGeom>
+          <a:noFill/>
+          <a:ln/>
+        </p:spPr>
+        <p:txBody>
+          <a:bodyPr wrap="square" lIns="0" tIns="0" rIns="0" bIns="0" rtlCol="0" anchor="ctr"/>
+          <a:lstStyle/>
+          <a:p>
+            <a:pPr algn="ctr" indent="0" marL="0">
+              <a:buNone/>
+            </a:pPr>
+            <a:r>
+              <a:rPr lang="en-US" sz="1100" dirty="0">
+                <a:solidFill>
+                  <a:srgbClr val="68655A"/>
+                </a:solidFill>
+                <a:latin typeface="Calibri" pitchFamily="34" charset="0"/>
+                <a:ea typeface="Calibri" pitchFamily="34" charset="-122"/>
+                <a:cs typeface="Calibri" pitchFamily="34" charset="-120"/>
+              </a:rPr>
+              <a:t>CPT 36415</a:t>
+            </a:r>
+            <a:endParaRPr lang="en-US" sz="1100" dirty="0"/>
+          </a:p>
+          <a:p>
+            <a:pPr algn="ctr" indent="0" marL="0">
+              <a:buNone/>
+            </a:pPr>
+            <a:r>
+              <a:rPr lang="en-US" sz="1100" dirty="0">
+                <a:solidFill>
+                  <a:srgbClr val="68655A"/>
+                </a:solidFill>
+                <a:latin typeface="Calibri" pitchFamily="34" charset="0"/>
+                <a:ea typeface="Calibri" pitchFamily="34" charset="-122"/>
+                <a:cs typeface="Calibri" pitchFamily="34" charset="-120"/>
+              </a:rPr>
+              <a:t>billed twice</a:t>
+            </a:r>
+            <a:endParaRPr lang="en-US" sz="1100" dirty="0"/>
+          </a:p>
+        </p:txBody>
+      </p:sp>
+      <p:sp>
+        <p:nvSpPr>
+          <p:cNvPr id="9" name="Shape 7"/>
+          <p:cNvSpPr/>
+          <p:nvPr/>
+        </p:nvSpPr>
+        <p:spPr>
+          <a:xfrm>
+            <a:off x="9418320" y="1965960"/>
+            <a:ext cx="2103120" cy="1371600"/>
           </a:xfrm>
           <a:prstGeom prst="roundRect">
             <a:avLst>
-              <a:gd name="adj" fmla="val 50000"/>
+              <a:gd name="adj" fmla="val 6667"/>
+            </a:avLst>
+          </a:prstGeom>
+          <a:solidFill>
+            <a:srgbClr val="FFFFFF"/>
+          </a:solidFill>
+          <a:ln w="12700">
+            <a:solidFill>
+              <a:srgbClr val="E7E3D9"/>
+            </a:solidFill>
+            <a:prstDash val="solid"/>
+          </a:ln>
+        </p:spPr>
+      </p:sp>
+      <p:sp>
+        <p:nvSpPr>
+          <p:cNvPr id="10" name="Text 8"/>
+          <p:cNvSpPr/>
+          <p:nvPr/>
+        </p:nvSpPr>
+        <p:spPr>
+          <a:xfrm>
+            <a:off x="9418320" y="2148840"/>
+            <a:ext cx="2103120" cy="365760"/>
+          </a:xfrm>
+          <a:prstGeom prst="rect">
+            <a:avLst/>
+          </a:prstGeom>
+          <a:noFill/>
+          <a:ln/>
+        </p:spPr>
+        <p:txBody>
+          <a:bodyPr wrap="square" lIns="0" tIns="0" rIns="0" bIns="0" rtlCol="0" anchor="ctr"/>
+          <a:lstStyle/>
+          <a:p>
+            <a:pPr algn="ctr" indent="0" marL="0">
+              <a:buNone/>
+            </a:pPr>
+            <a:r>
+              <a:rPr lang="en-US" sz="1200" b="1" dirty="0">
+                <a:solidFill>
+                  <a:srgbClr val="211F1B"/>
+                </a:solidFill>
+                <a:latin typeface="Calibri" pitchFamily="34" charset="0"/>
+                <a:ea typeface="Calibri" pitchFamily="34" charset="-122"/>
+                <a:cs typeface="Calibri" pitchFamily="34" charset="-120"/>
+              </a:rPr>
+              <a:t>Insurance EOB</a:t>
+            </a:r>
+            <a:endParaRPr lang="en-US" sz="1200" dirty="0"/>
+          </a:p>
+        </p:txBody>
+      </p:sp>
+      <p:sp>
+        <p:nvSpPr>
+          <p:cNvPr id="11" name="Text 9"/>
+          <p:cNvSpPr/>
+          <p:nvPr/>
+        </p:nvSpPr>
+        <p:spPr>
+          <a:xfrm>
+            <a:off x="9418320" y="2606040"/>
+            <a:ext cx="2103120" cy="640080"/>
+          </a:xfrm>
+          <a:prstGeom prst="rect">
+            <a:avLst/>
+          </a:prstGeom>
+          <a:noFill/>
+          <a:ln/>
+        </p:spPr>
+        <p:txBody>
+          <a:bodyPr wrap="square" lIns="0" tIns="0" rIns="0" bIns="0" rtlCol="0" anchor="ctr"/>
+          <a:lstStyle/>
+          <a:p>
+            <a:pPr algn="ctr" indent="0" marL="0">
+              <a:buNone/>
+            </a:pPr>
+            <a:r>
+              <a:rPr lang="en-US" sz="1100" dirty="0">
+                <a:solidFill>
+                  <a:srgbClr val="68655A"/>
+                </a:solidFill>
+                <a:latin typeface="Calibri" pitchFamily="34" charset="0"/>
+                <a:ea typeface="Calibri" pitchFamily="34" charset="-122"/>
+                <a:cs typeface="Calibri" pitchFamily="34" charset="-120"/>
+              </a:rPr>
+              <a:t>CARC 18:</a:t>
+            </a:r>
+            <a:endParaRPr lang="en-US" sz="1100" dirty="0"/>
+          </a:p>
+          <a:p>
+            <a:pPr algn="ctr" indent="0" marL="0">
+              <a:buNone/>
+            </a:pPr>
+            <a:r>
+              <a:rPr lang="en-US" sz="1100" dirty="0">
+                <a:solidFill>
+                  <a:srgbClr val="68655A"/>
+                </a:solidFill>
+                <a:latin typeface="Calibri" pitchFamily="34" charset="0"/>
+                <a:ea typeface="Calibri" pitchFamily="34" charset="-122"/>
+                <a:cs typeface="Calibri" pitchFamily="34" charset="-120"/>
+              </a:rPr>
+              <a:t>denied duplicate</a:t>
+            </a:r>
+            <a:endParaRPr lang="en-US" sz="1100" dirty="0"/>
+          </a:p>
+        </p:txBody>
+      </p:sp>
+      <p:sp>
+        <p:nvSpPr>
+          <p:cNvPr id="12" name="Shape 10"/>
+          <p:cNvSpPr/>
+          <p:nvPr/>
+        </p:nvSpPr>
+        <p:spPr>
+          <a:xfrm>
+            <a:off x="8092440" y="3657600"/>
+            <a:ext cx="2514600" cy="777240"/>
+          </a:xfrm>
+          <a:prstGeom prst="roundRect">
+            <a:avLst>
+              <a:gd name="adj" fmla="val 49412"/>
             </a:avLst>
           </a:prstGeom>
           <a:solidFill>
@@ -3378,14 +3350,14 @@
       </p:sp>
       <p:sp>
         <p:nvSpPr>
-          <p:cNvPr id="18" name="Text 16"/>
-          <p:cNvSpPr/>
-          <p:nvPr/>
-        </p:nvSpPr>
-        <p:spPr>
-          <a:xfrm>
-            <a:off x="822960" y="4206240"/>
-            <a:ext cx="1828800" cy="365760"/>
+          <p:cNvPr id="13" name="Text 11"/>
+          <p:cNvSpPr/>
+          <p:nvPr/>
+        </p:nvSpPr>
+        <p:spPr>
+          <a:xfrm>
+            <a:off x="8092440" y="3657600"/>
+            <a:ext cx="2514600" cy="777240"/>
           </a:xfrm>
           <a:prstGeom prst="rect">
             <a:avLst/>
@@ -3401,174 +3373,54 @@
               <a:buNone/>
             </a:pPr>
             <a:r>
-              <a:rPr lang="en-US" sz="950" b="1" dirty="0">
+              <a:rPr lang="en-US" sz="1600" b="1" dirty="0">
                 <a:solidFill>
                   <a:srgbClr val="AB4A37"/>
+                </a:solidFill>
+                <a:latin typeface="Cambria" pitchFamily="34" charset="0"/>
+                <a:ea typeface="Cambria" pitchFamily="34" charset="-122"/>
+                <a:cs typeface="Cambria" pitchFamily="34" charset="-120"/>
+              </a:rPr>
+              <a:t>$112 flagged</a:t>
+            </a:r>
+            <a:endParaRPr lang="en-US" sz="1600" dirty="0"/>
+          </a:p>
+        </p:txBody>
+      </p:sp>
+      <p:sp>
+        <p:nvSpPr>
+          <p:cNvPr id="14" name="Text 12"/>
+          <p:cNvSpPr/>
+          <p:nvPr/>
+        </p:nvSpPr>
+        <p:spPr>
+          <a:xfrm>
+            <a:off x="11338560" y="6446520"/>
+            <a:ext cx="640080" cy="274320"/>
+          </a:xfrm>
+          <a:prstGeom prst="rect">
+            <a:avLst/>
+          </a:prstGeom>
+          <a:noFill/>
+          <a:ln/>
+        </p:spPr>
+        <p:txBody>
+          <a:bodyPr wrap="square" rtlCol="0" anchor="ctr"/>
+          <a:lstStyle/>
+          <a:p>
+            <a:pPr algn="r" indent="0" marL="0">
+              <a:buNone/>
+            </a:pPr>
+            <a:r>
+              <a:rPr lang="en-US" sz="1000" dirty="0">
+                <a:solidFill>
+                  <a:srgbClr val="68655A"/>
                 </a:solidFill>
                 <a:latin typeface="Calibri" pitchFamily="34" charset="0"/>
                 <a:ea typeface="Calibri" pitchFamily="34" charset="-122"/>
                 <a:cs typeface="Calibri" pitchFamily="34" charset="-120"/>
               </a:rPr>
-              <a:t>DUPLICATE CHARGE</a:t>
-            </a:r>
-            <a:endParaRPr lang="en-US" sz="950" dirty="0"/>
-          </a:p>
-        </p:txBody>
-      </p:sp>
-      <p:sp>
-        <p:nvSpPr>
-          <p:cNvPr id="19" name="Text 17"/>
-          <p:cNvSpPr/>
-          <p:nvPr/>
-        </p:nvSpPr>
-        <p:spPr>
-          <a:xfrm>
-            <a:off x="9418320" y="4187952"/>
-            <a:ext cx="1737360" cy="384048"/>
-          </a:xfrm>
-          <a:prstGeom prst="rect">
-            <a:avLst/>
-          </a:prstGeom>
-          <a:noFill/>
-          <a:ln/>
-        </p:spPr>
-        <p:txBody>
-          <a:bodyPr wrap="square" lIns="0" tIns="0" rIns="0" bIns="0" rtlCol="0" anchor="ctr"/>
-          <a:lstStyle/>
-          <a:p>
-            <a:pPr algn="r" indent="0" marL="0">
-              <a:buNone/>
-            </a:pPr>
-            <a:r>
-              <a:rPr lang="en-US" sz="1600" b="1" dirty="0">
-                <a:solidFill>
-                  <a:srgbClr val="AB4A37"/>
-                </a:solidFill>
-                <a:latin typeface="Cambria" pitchFamily="34" charset="0"/>
-                <a:ea typeface="Cambria" pitchFamily="34" charset="-122"/>
-                <a:cs typeface="Cambria" pitchFamily="34" charset="-120"/>
-              </a:rPr>
-              <a:t>$112.00</a:t>
-            </a:r>
-            <a:endParaRPr lang="en-US" sz="1600" dirty="0"/>
-          </a:p>
-        </p:txBody>
-      </p:sp>
-      <p:sp>
-        <p:nvSpPr>
-          <p:cNvPr id="20" name="Text 18"/>
-          <p:cNvSpPr/>
-          <p:nvPr/>
-        </p:nvSpPr>
-        <p:spPr>
-          <a:xfrm>
-            <a:off x="822960" y="4709160"/>
-            <a:ext cx="9966960" cy="640080"/>
-          </a:xfrm>
-          <a:prstGeom prst="rect">
-            <a:avLst/>
-          </a:prstGeom>
-          <a:noFill/>
-          <a:ln/>
-        </p:spPr>
-        <p:txBody>
-          <a:bodyPr wrap="square" lIns="0" tIns="0" rIns="0" bIns="0" rtlCol="0" anchor="ctr"/>
-          <a:lstStyle/>
-          <a:p>
-            <a:pPr indent="0" marL="0">
-              <a:lnSpc>
-                <a:spcPct val="125000"/>
-              </a:lnSpc>
-              <a:buNone/>
-            </a:pPr>
-            <a:r>
-              <a:rPr lang="en-US" sz="1300" dirty="0">
-                <a:solidFill>
-                  <a:srgbClr val="211F1B"/>
-                </a:solidFill>
-                <a:latin typeface="Calibri" pitchFamily="34" charset="0"/>
-                <a:ea typeface="Calibri" pitchFamily="34" charset="-122"/>
-                <a:cs typeface="Calibri" pitchFamily="34" charset="-120"/>
-              </a:rPr>
-              <a:t>“Venipuncture, Routine Collection” (CPT 36415) was billed twice on Jul 10, 2026 — detected with plain line-count logic, not a model guess, so there's zero false-positive risk.</a:t>
-            </a:r>
-            <a:endParaRPr lang="en-US" sz="1300" dirty="0"/>
-          </a:p>
-        </p:txBody>
-      </p:sp>
-      <p:sp>
-        <p:nvSpPr>
-          <p:cNvPr id="21" name="Text 19"/>
-          <p:cNvSpPr/>
-          <p:nvPr/>
-        </p:nvSpPr>
-        <p:spPr>
-          <a:xfrm>
-            <a:off x="822960" y="5440680"/>
-            <a:ext cx="7315200" cy="320040"/>
-          </a:xfrm>
-          <a:prstGeom prst="rect">
-            <a:avLst/>
-          </a:prstGeom>
-          <a:noFill/>
-          <a:ln/>
-        </p:spPr>
-        <p:txBody>
-          <a:bodyPr wrap="square" lIns="0" tIns="0" rIns="0" bIns="0" rtlCol="0" anchor="ctr"/>
-          <a:lstStyle/>
-          <a:p>
-            <a:pPr indent="0" marL="0">
-              <a:buNone/>
-            </a:pPr>
-            <a:r>
-              <a:rPr lang="en-US" sz="1050" dirty="0">
-                <a:solidFill>
-                  <a:srgbClr val="68655A"/>
-                </a:solidFill>
-                <a:latin typeface="Calibri" pitchFamily="34" charset="0"/>
-                <a:ea typeface="Calibri" pitchFamily="34" charset="-122"/>
-                <a:cs typeface="Calibri" pitchFamily="34" charset="-120"/>
-              </a:rPr>
-              <a:t>CPT 36415  ·  Jul 10, 2026  ·  high confidence</a:t>
-            </a:r>
-            <a:endParaRPr lang="en-US" sz="1050" dirty="0"/>
-          </a:p>
-        </p:txBody>
-      </p:sp>
-      <p:sp>
-        <p:nvSpPr>
-          <p:cNvPr id="22" name="Text 20"/>
-          <p:cNvSpPr/>
-          <p:nvPr/>
-        </p:nvSpPr>
-        <p:spPr>
-          <a:xfrm>
-            <a:off x="11338560" y="6446520"/>
-            <a:ext cx="640080" cy="274320"/>
-          </a:xfrm>
-          <a:prstGeom prst="rect">
-            <a:avLst/>
-          </a:prstGeom>
-          <a:noFill/>
-          <a:ln/>
-        </p:spPr>
-        <p:txBody>
-          <a:bodyPr wrap="square" rtlCol="0" anchor="ctr"/>
-          <a:lstStyle/>
-          <a:p>
-            <a:pPr algn="r" indent="0" marL="0">
-              <a:buNone/>
-            </a:pPr>
-            <a:r>
-              <a:rPr lang="en-US" sz="1000" dirty="0">
-                <a:solidFill>
-                  <a:srgbClr val="68655A"/>
-                </a:solidFill>
-                <a:latin typeface="Calibri" pitchFamily="34" charset="0"/>
-                <a:ea typeface="Calibri" pitchFamily="34" charset="-122"/>
-                <a:cs typeface="Calibri" pitchFamily="34" charset="-120"/>
-              </a:rPr>
-              <a:t>4 / 8</a:t>
+              <a:t>4 / 9</a:t>
             </a:r>
             <a:endParaRPr lang="en-US" sz="1000" dirty="0"/>
           </a:p>
@@ -3639,7 +3491,7 @@
                 <a:ea typeface="Calibri" pitchFamily="34" charset="-122"/>
                 <a:cs typeface="Calibri" pitchFamily="34" charset="-120"/>
               </a:rPr>
-              <a:t>TECHNICAL FEASIBILITY</a:t>
+              <a:t>THE PRODUCT</a:t>
             </a:r>
             <a:endParaRPr lang="en-US" sz="1300" dirty="0"/>
           </a:p>
@@ -3678,6 +3530,783 @@
                 <a:ea typeface="Cambria" pitchFamily="34" charset="-122"/>
                 <a:cs typeface="Cambria" pitchFamily="34" charset="-120"/>
               </a:rPr>
+              <a:t>Upload. We check it. You dispute it.</a:t>
+            </a:r>
+            <a:endParaRPr lang="en-US" sz="3400" dirty="0"/>
+          </a:p>
+        </p:txBody>
+      </p:sp>
+      <p:sp>
+        <p:nvSpPr>
+          <p:cNvPr id="4" name="Shape 2"/>
+          <p:cNvSpPr/>
+          <p:nvPr/>
+        </p:nvSpPr>
+        <p:spPr>
+          <a:xfrm>
+            <a:off x="548640" y="2103120"/>
+            <a:ext cx="502920" cy="502920"/>
+          </a:xfrm>
+          <a:prstGeom prst="ellipse">
+            <a:avLst/>
+          </a:prstGeom>
+          <a:solidFill>
+            <a:srgbClr val="E6F1EA"/>
+          </a:solidFill>
+          <a:ln/>
+        </p:spPr>
+      </p:sp>
+      <p:sp>
+        <p:nvSpPr>
+          <p:cNvPr id="5" name="Text 3"/>
+          <p:cNvSpPr/>
+          <p:nvPr/>
+        </p:nvSpPr>
+        <p:spPr>
+          <a:xfrm>
+            <a:off x="548640" y="2103120"/>
+            <a:ext cx="502920" cy="502920"/>
+          </a:xfrm>
+          <a:prstGeom prst="rect">
+            <a:avLst/>
+          </a:prstGeom>
+          <a:noFill/>
+          <a:ln/>
+        </p:spPr>
+        <p:txBody>
+          <a:bodyPr wrap="square" lIns="0" tIns="0" rIns="0" bIns="0" rtlCol="0" anchor="ctr"/>
+          <a:lstStyle/>
+          <a:p>
+            <a:pPr algn="ctr" indent="0" marL="0">
+              <a:buNone/>
+            </a:pPr>
+            <a:r>
+              <a:rPr lang="en-US" sz="1600" b="1" dirty="0">
+                <a:solidFill>
+                  <a:srgbClr val="2E7D5B"/>
+                </a:solidFill>
+                <a:latin typeface="Cambria" pitchFamily="34" charset="0"/>
+                <a:ea typeface="Cambria" pitchFamily="34" charset="-122"/>
+                <a:cs typeface="Cambria" pitchFamily="34" charset="-120"/>
+              </a:rPr>
+              <a:t>1</a:t>
+            </a:r>
+            <a:endParaRPr lang="en-US" sz="1600" dirty="0"/>
+          </a:p>
+        </p:txBody>
+      </p:sp>
+      <p:sp>
+        <p:nvSpPr>
+          <p:cNvPr id="6" name="Text 4"/>
+          <p:cNvSpPr/>
+          <p:nvPr/>
+        </p:nvSpPr>
+        <p:spPr>
+          <a:xfrm>
+            <a:off x="1188720" y="2121408"/>
+            <a:ext cx="2834640" cy="365760"/>
+          </a:xfrm>
+          <a:prstGeom prst="rect">
+            <a:avLst/>
+          </a:prstGeom>
+          <a:noFill/>
+          <a:ln/>
+        </p:spPr>
+        <p:txBody>
+          <a:bodyPr wrap="square" lIns="0" tIns="0" rIns="0" bIns="0" rtlCol="0" anchor="ctr"/>
+          <a:lstStyle/>
+          <a:p>
+            <a:pPr indent="0" marL="0">
+              <a:buNone/>
+            </a:pPr>
+            <a:r>
+              <a:rPr lang="en-US" sz="1500" b="1" dirty="0">
+                <a:solidFill>
+                  <a:srgbClr val="211F1B"/>
+                </a:solidFill>
+                <a:latin typeface="Calibri" pitchFamily="34" charset="0"/>
+                <a:ea typeface="Calibri" pitchFamily="34" charset="-122"/>
+                <a:cs typeface="Calibri" pitchFamily="34" charset="-120"/>
+              </a:rPr>
+              <a:t>Upload</a:t>
+            </a:r>
+            <a:endParaRPr lang="en-US" sz="1500" dirty="0"/>
+          </a:p>
+        </p:txBody>
+      </p:sp>
+      <p:sp>
+        <p:nvSpPr>
+          <p:cNvPr id="7" name="Text 5"/>
+          <p:cNvSpPr/>
+          <p:nvPr/>
+        </p:nvSpPr>
+        <p:spPr>
+          <a:xfrm>
+            <a:off x="548640" y="2743200"/>
+            <a:ext cx="3383280" cy="914400"/>
+          </a:xfrm>
+          <a:prstGeom prst="rect">
+            <a:avLst/>
+          </a:prstGeom>
+          <a:noFill/>
+          <a:ln/>
+        </p:spPr>
+        <p:txBody>
+          <a:bodyPr wrap="square" lIns="0" tIns="0" rIns="0" bIns="0" rtlCol="0" anchor="ctr"/>
+          <a:lstStyle/>
+          <a:p>
+            <a:pPr indent="0" marL="0">
+              <a:lnSpc>
+                <a:spcPct val="125000"/>
+              </a:lnSpc>
+              <a:buNone/>
+            </a:pPr>
+            <a:r>
+              <a:rPr lang="en-US" sz="1250" dirty="0">
+                <a:solidFill>
+                  <a:srgbClr val="68655A"/>
+                </a:solidFill>
+                <a:latin typeface="Calibri" pitchFamily="34" charset="0"/>
+                <a:ea typeface="Calibri" pitchFamily="34" charset="-122"/>
+                <a:cs typeface="Calibri" pitchFamily="34" charset="-120"/>
+              </a:rPr>
+              <a:t>Your itemized bill, and your insurance statement if you have one</a:t>
+            </a:r>
+            <a:endParaRPr lang="en-US" sz="1250" dirty="0"/>
+          </a:p>
+        </p:txBody>
+      </p:sp>
+      <p:sp>
+        <p:nvSpPr>
+          <p:cNvPr id="8" name="Shape 6"/>
+          <p:cNvSpPr/>
+          <p:nvPr/>
+        </p:nvSpPr>
+        <p:spPr>
+          <a:xfrm>
+            <a:off x="4297680" y="2103120"/>
+            <a:ext cx="502920" cy="502920"/>
+          </a:xfrm>
+          <a:prstGeom prst="ellipse">
+            <a:avLst/>
+          </a:prstGeom>
+          <a:solidFill>
+            <a:srgbClr val="E6F1EA"/>
+          </a:solidFill>
+          <a:ln/>
+        </p:spPr>
+      </p:sp>
+      <p:sp>
+        <p:nvSpPr>
+          <p:cNvPr id="9" name="Text 7"/>
+          <p:cNvSpPr/>
+          <p:nvPr/>
+        </p:nvSpPr>
+        <p:spPr>
+          <a:xfrm>
+            <a:off x="4297680" y="2103120"/>
+            <a:ext cx="502920" cy="502920"/>
+          </a:xfrm>
+          <a:prstGeom prst="rect">
+            <a:avLst/>
+          </a:prstGeom>
+          <a:noFill/>
+          <a:ln/>
+        </p:spPr>
+        <p:txBody>
+          <a:bodyPr wrap="square" lIns="0" tIns="0" rIns="0" bIns="0" rtlCol="0" anchor="ctr"/>
+          <a:lstStyle/>
+          <a:p>
+            <a:pPr algn="ctr" indent="0" marL="0">
+              <a:buNone/>
+            </a:pPr>
+            <a:r>
+              <a:rPr lang="en-US" sz="1600" b="1" dirty="0">
+                <a:solidFill>
+                  <a:srgbClr val="2E7D5B"/>
+                </a:solidFill>
+                <a:latin typeface="Cambria" pitchFamily="34" charset="0"/>
+                <a:ea typeface="Cambria" pitchFamily="34" charset="-122"/>
+                <a:cs typeface="Cambria" pitchFamily="34" charset="-120"/>
+              </a:rPr>
+              <a:t>2</a:t>
+            </a:r>
+            <a:endParaRPr lang="en-US" sz="1600" dirty="0"/>
+          </a:p>
+        </p:txBody>
+      </p:sp>
+      <p:sp>
+        <p:nvSpPr>
+          <p:cNvPr id="10" name="Text 8"/>
+          <p:cNvSpPr/>
+          <p:nvPr/>
+        </p:nvSpPr>
+        <p:spPr>
+          <a:xfrm>
+            <a:off x="4937760" y="2121408"/>
+            <a:ext cx="2834640" cy="365760"/>
+          </a:xfrm>
+          <a:prstGeom prst="rect">
+            <a:avLst/>
+          </a:prstGeom>
+          <a:noFill/>
+          <a:ln/>
+        </p:spPr>
+        <p:txBody>
+          <a:bodyPr wrap="square" lIns="0" tIns="0" rIns="0" bIns="0" rtlCol="0" anchor="ctr"/>
+          <a:lstStyle/>
+          <a:p>
+            <a:pPr indent="0" marL="0">
+              <a:buNone/>
+            </a:pPr>
+            <a:r>
+              <a:rPr lang="en-US" sz="1500" b="1" dirty="0">
+                <a:solidFill>
+                  <a:srgbClr val="211F1B"/>
+                </a:solidFill>
+                <a:latin typeface="Calibri" pitchFamily="34" charset="0"/>
+                <a:ea typeface="Calibri" pitchFamily="34" charset="-122"/>
+                <a:cs typeface="Calibri" pitchFamily="34" charset="-120"/>
+              </a:rPr>
+              <a:t>We check it</a:t>
+            </a:r>
+            <a:endParaRPr lang="en-US" sz="1500" dirty="0"/>
+          </a:p>
+        </p:txBody>
+      </p:sp>
+      <p:sp>
+        <p:nvSpPr>
+          <p:cNvPr id="11" name="Text 9"/>
+          <p:cNvSpPr/>
+          <p:nvPr/>
+        </p:nvSpPr>
+        <p:spPr>
+          <a:xfrm>
+            <a:off x="4297680" y="2743200"/>
+            <a:ext cx="3383280" cy="914400"/>
+          </a:xfrm>
+          <a:prstGeom prst="rect">
+            <a:avLst/>
+          </a:prstGeom>
+          <a:noFill/>
+          <a:ln/>
+        </p:spPr>
+        <p:txBody>
+          <a:bodyPr wrap="square" lIns="0" tIns="0" rIns="0" bIns="0" rtlCol="0" anchor="ctr"/>
+          <a:lstStyle/>
+          <a:p>
+            <a:pPr indent="0" marL="0">
+              <a:lnSpc>
+                <a:spcPct val="125000"/>
+              </a:lnSpc>
+              <a:buNone/>
+            </a:pPr>
+            <a:r>
+              <a:rPr lang="en-US" sz="1250" dirty="0">
+                <a:solidFill>
+                  <a:srgbClr val="68655A"/>
+                </a:solidFill>
+                <a:latin typeface="Calibri" pitchFamily="34" charset="0"/>
+                <a:ea typeface="Calibri" pitchFamily="34" charset="-122"/>
+                <a:cs typeface="Calibri" pitchFamily="34" charset="-120"/>
+              </a:rPr>
+              <a:t>Duplicate charges, and anything your insurer already denied</a:t>
+            </a:r>
+            <a:endParaRPr lang="en-US" sz="1250" dirty="0"/>
+          </a:p>
+        </p:txBody>
+      </p:sp>
+      <p:sp>
+        <p:nvSpPr>
+          <p:cNvPr id="12" name="Shape 10"/>
+          <p:cNvSpPr/>
+          <p:nvPr/>
+        </p:nvSpPr>
+        <p:spPr>
+          <a:xfrm>
+            <a:off x="8046720" y="2103120"/>
+            <a:ext cx="502920" cy="502920"/>
+          </a:xfrm>
+          <a:prstGeom prst="ellipse">
+            <a:avLst/>
+          </a:prstGeom>
+          <a:solidFill>
+            <a:srgbClr val="E6F1EA"/>
+          </a:solidFill>
+          <a:ln/>
+        </p:spPr>
+      </p:sp>
+      <p:sp>
+        <p:nvSpPr>
+          <p:cNvPr id="13" name="Text 11"/>
+          <p:cNvSpPr/>
+          <p:nvPr/>
+        </p:nvSpPr>
+        <p:spPr>
+          <a:xfrm>
+            <a:off x="8046720" y="2103120"/>
+            <a:ext cx="502920" cy="502920"/>
+          </a:xfrm>
+          <a:prstGeom prst="rect">
+            <a:avLst/>
+          </a:prstGeom>
+          <a:noFill/>
+          <a:ln/>
+        </p:spPr>
+        <p:txBody>
+          <a:bodyPr wrap="square" lIns="0" tIns="0" rIns="0" bIns="0" rtlCol="0" anchor="ctr"/>
+          <a:lstStyle/>
+          <a:p>
+            <a:pPr algn="ctr" indent="0" marL="0">
+              <a:buNone/>
+            </a:pPr>
+            <a:r>
+              <a:rPr lang="en-US" sz="1600" b="1" dirty="0">
+                <a:solidFill>
+                  <a:srgbClr val="2E7D5B"/>
+                </a:solidFill>
+                <a:latin typeface="Cambria" pitchFamily="34" charset="0"/>
+                <a:ea typeface="Cambria" pitchFamily="34" charset="-122"/>
+                <a:cs typeface="Cambria" pitchFamily="34" charset="-120"/>
+              </a:rPr>
+              <a:t>3</a:t>
+            </a:r>
+            <a:endParaRPr lang="en-US" sz="1600" dirty="0"/>
+          </a:p>
+        </p:txBody>
+      </p:sp>
+      <p:sp>
+        <p:nvSpPr>
+          <p:cNvPr id="14" name="Text 12"/>
+          <p:cNvSpPr/>
+          <p:nvPr/>
+        </p:nvSpPr>
+        <p:spPr>
+          <a:xfrm>
+            <a:off x="8686800" y="2121408"/>
+            <a:ext cx="2834640" cy="365760"/>
+          </a:xfrm>
+          <a:prstGeom prst="rect">
+            <a:avLst/>
+          </a:prstGeom>
+          <a:noFill/>
+          <a:ln/>
+        </p:spPr>
+        <p:txBody>
+          <a:bodyPr wrap="square" lIns="0" tIns="0" rIns="0" bIns="0" rtlCol="0" anchor="ctr"/>
+          <a:lstStyle/>
+          <a:p>
+            <a:pPr indent="0" marL="0">
+              <a:buNone/>
+            </a:pPr>
+            <a:r>
+              <a:rPr lang="en-US" sz="1500" b="1" dirty="0">
+                <a:solidFill>
+                  <a:srgbClr val="211F1B"/>
+                </a:solidFill>
+                <a:latin typeface="Calibri" pitchFamily="34" charset="0"/>
+                <a:ea typeface="Calibri" pitchFamily="34" charset="-122"/>
+                <a:cs typeface="Calibri" pitchFamily="34" charset="-120"/>
+              </a:rPr>
+              <a:t>You dispute it</a:t>
+            </a:r>
+            <a:endParaRPr lang="en-US" sz="1500" dirty="0"/>
+          </a:p>
+        </p:txBody>
+      </p:sp>
+      <p:sp>
+        <p:nvSpPr>
+          <p:cNvPr id="15" name="Text 13"/>
+          <p:cNvSpPr/>
+          <p:nvPr/>
+        </p:nvSpPr>
+        <p:spPr>
+          <a:xfrm>
+            <a:off x="8046720" y="2743200"/>
+            <a:ext cx="3383280" cy="914400"/>
+          </a:xfrm>
+          <a:prstGeom prst="rect">
+            <a:avLst/>
+          </a:prstGeom>
+          <a:noFill/>
+          <a:ln/>
+        </p:spPr>
+        <p:txBody>
+          <a:bodyPr wrap="square" lIns="0" tIns="0" rIns="0" bIns="0" rtlCol="0" anchor="ctr"/>
+          <a:lstStyle/>
+          <a:p>
+            <a:pPr indent="0" marL="0">
+              <a:lnSpc>
+                <a:spcPct val="125000"/>
+              </a:lnSpc>
+              <a:buNone/>
+            </a:pPr>
+            <a:r>
+              <a:rPr lang="en-US" sz="1250" dirty="0">
+                <a:solidFill>
+                  <a:srgbClr val="68655A"/>
+                </a:solidFill>
+                <a:latin typeface="Calibri" pitchFamily="34" charset="0"/>
+                <a:ea typeface="Calibri" pitchFamily="34" charset="-122"/>
+                <a:cs typeface="Calibri" pitchFamily="34" charset="-120"/>
+              </a:rPr>
+              <a:t>A ready-to-send letter citing the exact lines and codes</a:t>
+            </a:r>
+            <a:endParaRPr lang="en-US" sz="1250" dirty="0"/>
+          </a:p>
+        </p:txBody>
+      </p:sp>
+      <p:sp>
+        <p:nvSpPr>
+          <p:cNvPr id="16" name="Shape 14"/>
+          <p:cNvSpPr/>
+          <p:nvPr/>
+        </p:nvSpPr>
+        <p:spPr>
+          <a:xfrm>
+            <a:off x="548640" y="3977640"/>
+            <a:ext cx="10698480" cy="1965960"/>
+          </a:xfrm>
+          <a:prstGeom prst="roundRect">
+            <a:avLst>
+              <a:gd name="adj" fmla="val 6512"/>
+            </a:avLst>
+          </a:prstGeom>
+          <a:solidFill>
+            <a:srgbClr val="FFFFFF"/>
+          </a:solidFill>
+          <a:ln w="12700">
+            <a:solidFill>
+              <a:srgbClr val="E7E3D9"/>
+            </a:solidFill>
+            <a:prstDash val="solid"/>
+          </a:ln>
+        </p:spPr>
+      </p:sp>
+      <p:sp>
+        <p:nvSpPr>
+          <p:cNvPr id="17" name="Shape 15"/>
+          <p:cNvSpPr/>
+          <p:nvPr/>
+        </p:nvSpPr>
+        <p:spPr>
+          <a:xfrm>
+            <a:off x="822960" y="4206240"/>
+            <a:ext cx="1828800" cy="365760"/>
+          </a:xfrm>
+          <a:prstGeom prst="roundRect">
+            <a:avLst>
+              <a:gd name="adj" fmla="val 50000"/>
+            </a:avLst>
+          </a:prstGeom>
+          <a:solidFill>
+            <a:srgbClr val="F5E2DB"/>
+          </a:solidFill>
+          <a:ln/>
+        </p:spPr>
+      </p:sp>
+      <p:sp>
+        <p:nvSpPr>
+          <p:cNvPr id="18" name="Text 16"/>
+          <p:cNvSpPr/>
+          <p:nvPr/>
+        </p:nvSpPr>
+        <p:spPr>
+          <a:xfrm>
+            <a:off x="822960" y="4206240"/>
+            <a:ext cx="1828800" cy="365760"/>
+          </a:xfrm>
+          <a:prstGeom prst="rect">
+            <a:avLst/>
+          </a:prstGeom>
+          <a:noFill/>
+          <a:ln/>
+        </p:spPr>
+        <p:txBody>
+          <a:bodyPr wrap="square" lIns="0" tIns="0" rIns="0" bIns="0" rtlCol="0" anchor="ctr"/>
+          <a:lstStyle/>
+          <a:p>
+            <a:pPr algn="ctr" indent="0" marL="0">
+              <a:buNone/>
+            </a:pPr>
+            <a:r>
+              <a:rPr lang="en-US" sz="950" b="1" dirty="0">
+                <a:solidFill>
+                  <a:srgbClr val="AB4A37"/>
+                </a:solidFill>
+                <a:latin typeface="Calibri" pitchFamily="34" charset="0"/>
+                <a:ea typeface="Calibri" pitchFamily="34" charset="-122"/>
+                <a:cs typeface="Calibri" pitchFamily="34" charset="-120"/>
+              </a:rPr>
+              <a:t>DUPLICATE CHARGE</a:t>
+            </a:r>
+            <a:endParaRPr lang="en-US" sz="950" dirty="0"/>
+          </a:p>
+        </p:txBody>
+      </p:sp>
+      <p:sp>
+        <p:nvSpPr>
+          <p:cNvPr id="19" name="Text 17"/>
+          <p:cNvSpPr/>
+          <p:nvPr/>
+        </p:nvSpPr>
+        <p:spPr>
+          <a:xfrm>
+            <a:off x="9418320" y="4187952"/>
+            <a:ext cx="1737360" cy="384048"/>
+          </a:xfrm>
+          <a:prstGeom prst="rect">
+            <a:avLst/>
+          </a:prstGeom>
+          <a:noFill/>
+          <a:ln/>
+        </p:spPr>
+        <p:txBody>
+          <a:bodyPr wrap="square" lIns="0" tIns="0" rIns="0" bIns="0" rtlCol="0" anchor="ctr"/>
+          <a:lstStyle/>
+          <a:p>
+            <a:pPr algn="r" indent="0" marL="0">
+              <a:buNone/>
+            </a:pPr>
+            <a:r>
+              <a:rPr lang="en-US" sz="1600" b="1" dirty="0">
+                <a:solidFill>
+                  <a:srgbClr val="AB4A37"/>
+                </a:solidFill>
+                <a:latin typeface="Cambria" pitchFamily="34" charset="0"/>
+                <a:ea typeface="Cambria" pitchFamily="34" charset="-122"/>
+                <a:cs typeface="Cambria" pitchFamily="34" charset="-120"/>
+              </a:rPr>
+              <a:t>$112.00</a:t>
+            </a:r>
+            <a:endParaRPr lang="en-US" sz="1600" dirty="0"/>
+          </a:p>
+        </p:txBody>
+      </p:sp>
+      <p:sp>
+        <p:nvSpPr>
+          <p:cNvPr id="20" name="Text 18"/>
+          <p:cNvSpPr/>
+          <p:nvPr/>
+        </p:nvSpPr>
+        <p:spPr>
+          <a:xfrm>
+            <a:off x="822960" y="4709160"/>
+            <a:ext cx="9966960" cy="640080"/>
+          </a:xfrm>
+          <a:prstGeom prst="rect">
+            <a:avLst/>
+          </a:prstGeom>
+          <a:noFill/>
+          <a:ln/>
+        </p:spPr>
+        <p:txBody>
+          <a:bodyPr wrap="square" lIns="0" tIns="0" rIns="0" bIns="0" rtlCol="0" anchor="ctr"/>
+          <a:lstStyle/>
+          <a:p>
+            <a:pPr indent="0" marL="0">
+              <a:lnSpc>
+                <a:spcPct val="125000"/>
+              </a:lnSpc>
+              <a:buNone/>
+            </a:pPr>
+            <a:r>
+              <a:rPr lang="en-US" sz="1300" dirty="0">
+                <a:solidFill>
+                  <a:srgbClr val="211F1B"/>
+                </a:solidFill>
+                <a:latin typeface="Calibri" pitchFamily="34" charset="0"/>
+                <a:ea typeface="Calibri" pitchFamily="34" charset="-122"/>
+                <a:cs typeface="Calibri" pitchFamily="34" charset="-120"/>
+              </a:rPr>
+              <a:t>“Venipuncture, Routine Collection” (CPT 36415) was billed twice on Jul 10, 2026 — detected with plain line-count logic, not a model guess, so there's zero false-positive risk.</a:t>
+            </a:r>
+            <a:endParaRPr lang="en-US" sz="1300" dirty="0"/>
+          </a:p>
+        </p:txBody>
+      </p:sp>
+      <p:sp>
+        <p:nvSpPr>
+          <p:cNvPr id="21" name="Text 19"/>
+          <p:cNvSpPr/>
+          <p:nvPr/>
+        </p:nvSpPr>
+        <p:spPr>
+          <a:xfrm>
+            <a:off x="822960" y="5440680"/>
+            <a:ext cx="7315200" cy="320040"/>
+          </a:xfrm>
+          <a:prstGeom prst="rect">
+            <a:avLst/>
+          </a:prstGeom>
+          <a:noFill/>
+          <a:ln/>
+        </p:spPr>
+        <p:txBody>
+          <a:bodyPr wrap="square" lIns="0" tIns="0" rIns="0" bIns="0" rtlCol="0" anchor="ctr"/>
+          <a:lstStyle/>
+          <a:p>
+            <a:pPr indent="0" marL="0">
+              <a:buNone/>
+            </a:pPr>
+            <a:r>
+              <a:rPr lang="en-US" sz="1050" dirty="0">
+                <a:solidFill>
+                  <a:srgbClr val="68655A"/>
+                </a:solidFill>
+                <a:latin typeface="Calibri" pitchFamily="34" charset="0"/>
+                <a:ea typeface="Calibri" pitchFamily="34" charset="-122"/>
+                <a:cs typeface="Calibri" pitchFamily="34" charset="-120"/>
+              </a:rPr>
+              <a:t>CPT 36415  ·  Jul 10, 2026  ·  high confidence</a:t>
+            </a:r>
+            <a:endParaRPr lang="en-US" sz="1050" dirty="0"/>
+          </a:p>
+        </p:txBody>
+      </p:sp>
+      <p:sp>
+        <p:nvSpPr>
+          <p:cNvPr id="22" name="Text 20"/>
+          <p:cNvSpPr/>
+          <p:nvPr/>
+        </p:nvSpPr>
+        <p:spPr>
+          <a:xfrm>
+            <a:off x="11338560" y="6446520"/>
+            <a:ext cx="640080" cy="274320"/>
+          </a:xfrm>
+          <a:prstGeom prst="rect">
+            <a:avLst/>
+          </a:prstGeom>
+          <a:noFill/>
+          <a:ln/>
+        </p:spPr>
+        <p:txBody>
+          <a:bodyPr wrap="square" rtlCol="0" anchor="ctr"/>
+          <a:lstStyle/>
+          <a:p>
+            <a:pPr algn="r" indent="0" marL="0">
+              <a:buNone/>
+            </a:pPr>
+            <a:r>
+              <a:rPr lang="en-US" sz="1000" dirty="0">
+                <a:solidFill>
+                  <a:srgbClr val="68655A"/>
+                </a:solidFill>
+                <a:latin typeface="Calibri" pitchFamily="34" charset="0"/>
+                <a:ea typeface="Calibri" pitchFamily="34" charset="-122"/>
+                <a:cs typeface="Calibri" pitchFamily="34" charset="-120"/>
+              </a:rPr>
+              <a:t>5 / 9</a:t>
+            </a:r>
+            <a:endParaRPr lang="en-US" sz="1000" dirty="0"/>
+          </a:p>
+        </p:txBody>
+      </p:sp>
+    </p:spTree>
+  </p:cSld>
+  <p:clrMapOvr>
+    <a:masterClrMapping/>
+  </p:clrMapOvr>
+</p:sld>
+</file>
+
+<file path=ppt/slides/slide6.xml><?xml version="1.0" encoding="utf-8"?>
+<p:sld xmlns:a="http://schemas.openxmlformats.org/drawingml/2006/main" xmlns:r="http://schemas.openxmlformats.org/officeDocument/2006/relationships" xmlns:p="http://schemas.openxmlformats.org/presentationml/2006/main">
+  <p:cSld name="Slide 6">
+    <p:bg>
+      <p:bgPr>
+        <a:solidFill>
+          <a:srgbClr val="FCFBF9"/>
+        </a:solidFill>
+      </p:bgPr>
+    </p:bg>
+    <p:spTree>
+      <p:nvGrpSpPr>
+        <p:cNvPr id="1" name=""/>
+        <p:cNvGrpSpPr/>
+        <p:nvPr/>
+      </p:nvGrpSpPr>
+      <p:grpSpPr>
+        <a:xfrm>
+          <a:off x="0" y="0"/>
+          <a:ext cx="0" cy="0"/>
+          <a:chOff x="0" y="0"/>
+          <a:chExt cx="0" cy="0"/>
+        </a:xfrm>
+      </p:grpSpPr>
+      <p:sp>
+        <p:nvSpPr>
+          <p:cNvPr id="2" name="Text 0"/>
+          <p:cNvSpPr/>
+          <p:nvPr/>
+        </p:nvSpPr>
+        <p:spPr>
+          <a:xfrm>
+            <a:off x="548640" y="411480"/>
+            <a:ext cx="7315200" cy="365760"/>
+          </a:xfrm>
+          <a:prstGeom prst="rect">
+            <a:avLst/>
+          </a:prstGeom>
+          <a:noFill/>
+          <a:ln/>
+        </p:spPr>
+        <p:txBody>
+          <a:bodyPr wrap="square" rtlCol="0" anchor="ctr"/>
+          <a:lstStyle/>
+          <a:p>
+            <a:pPr indent="0" marL="0">
+              <a:buNone/>
+            </a:pPr>
+            <a:r>
+              <a:rPr lang="en-US" sz="1300" b="1" spc="200" kern="0" dirty="0">
+                <a:solidFill>
+                  <a:srgbClr val="2E7D5B"/>
+                </a:solidFill>
+                <a:latin typeface="Calibri" pitchFamily="34" charset="0"/>
+                <a:ea typeface="Calibri" pitchFamily="34" charset="-122"/>
+                <a:cs typeface="Calibri" pitchFamily="34" charset="-120"/>
+              </a:rPr>
+              <a:t>TECHNICAL FEASIBILITY</a:t>
+            </a:r>
+            <a:endParaRPr lang="en-US" sz="1300" dirty="0"/>
+          </a:p>
+        </p:txBody>
+      </p:sp>
+      <p:sp>
+        <p:nvSpPr>
+          <p:cNvPr id="3" name="Text 1"/>
+          <p:cNvSpPr/>
+          <p:nvPr/>
+        </p:nvSpPr>
+        <p:spPr>
+          <a:xfrm>
+            <a:off x="548640" y="731520"/>
+            <a:ext cx="10515600" cy="822960"/>
+          </a:xfrm>
+          <a:prstGeom prst="rect">
+            <a:avLst/>
+          </a:prstGeom>
+          <a:noFill/>
+          <a:ln/>
+        </p:spPr>
+        <p:txBody>
+          <a:bodyPr wrap="square" lIns="0" tIns="0" rIns="0" bIns="0" rtlCol="0" anchor="ctr"/>
+          <a:lstStyle/>
+          <a:p>
+            <a:pPr indent="0" marL="0">
+              <a:buNone/>
+            </a:pPr>
+            <a:r>
+              <a:rPr lang="en-US" sz="3400" b="1" dirty="0">
+                <a:solidFill>
+                  <a:srgbClr val="211F1B"/>
+                </a:solidFill>
+                <a:latin typeface="Cambria" pitchFamily="34" charset="0"/>
+                <a:ea typeface="Cambria" pitchFamily="34" charset="-122"/>
+                <a:cs typeface="Cambria" pitchFamily="34" charset="-120"/>
+              </a:rPr>
               <a:t>Built and verified, not just pitched</a:t>
             </a:r>
             <a:endParaRPr lang="en-US" sz="3400" dirty="0"/>
@@ -4312,7 +4941,7 @@
       </p:sp>
       <p:graphicFrame>
         <p:nvGraphicFramePr>
-          <p:cNvPr id="6" name="Table 0"/>
+          <p:cNvPr id="7" name="Table 0"/>
           <p:cNvGraphicFramePr>
             <a:graphicFrameLocks noGrp="1"/>
           </p:cNvGraphicFramePr>
@@ -5404,771 +6033,7 @@
                 <a:ea typeface="Calibri" pitchFamily="34" charset="-122"/>
                 <a:cs typeface="Calibri" pitchFamily="34" charset="-120"/>
               </a:rPr>
-              <a:t>5 / 8</a:t>
-            </a:r>
-            <a:endParaRPr lang="en-US" sz="1000" dirty="0"/>
-          </a:p>
-        </p:txBody>
-      </p:sp>
-    </p:spTree>
-  </p:cSld>
-  <p:clrMapOvr>
-    <a:masterClrMapping/>
-  </p:clrMapOvr>
-</p:sld>
-</file>
-
-<file path=ppt/slides/slide6.xml><?xml version="1.0" encoding="utf-8"?>
-<p:sld xmlns:a="http://schemas.openxmlformats.org/drawingml/2006/main" xmlns:r="http://schemas.openxmlformats.org/officeDocument/2006/relationships" xmlns:p="http://schemas.openxmlformats.org/presentationml/2006/main">
-  <p:cSld name="Slide 6">
-    <p:bg>
-      <p:bgPr>
-        <a:solidFill>
-          <a:srgbClr val="FCFBF9"/>
-        </a:solidFill>
-      </p:bgPr>
-    </p:bg>
-    <p:spTree>
-      <p:nvGrpSpPr>
-        <p:cNvPr id="1" name=""/>
-        <p:cNvGrpSpPr/>
-        <p:nvPr/>
-      </p:nvGrpSpPr>
-      <p:grpSpPr>
-        <a:xfrm>
-          <a:off x="0" y="0"/>
-          <a:ext cx="0" cy="0"/>
-          <a:chOff x="0" y="0"/>
-          <a:chExt cx="0" cy="0"/>
-        </a:xfrm>
-      </p:grpSpPr>
-      <p:sp>
-        <p:nvSpPr>
-          <p:cNvPr id="2" name="Text 0"/>
-          <p:cNvSpPr/>
-          <p:nvPr/>
-        </p:nvSpPr>
-        <p:spPr>
-          <a:xfrm>
-            <a:off x="548640" y="411480"/>
-            <a:ext cx="7315200" cy="365760"/>
-          </a:xfrm>
-          <a:prstGeom prst="rect">
-            <a:avLst/>
-          </a:prstGeom>
-          <a:noFill/>
-          <a:ln/>
-        </p:spPr>
-        <p:txBody>
-          <a:bodyPr wrap="square" rtlCol="0" anchor="ctr"/>
-          <a:lstStyle/>
-          <a:p>
-            <a:pPr indent="0" marL="0">
-              <a:buNone/>
-            </a:pPr>
-            <a:r>
-              <a:rPr lang="en-US" sz="1300" b="1" spc="200" kern="0" dirty="0">
-                <a:solidFill>
-                  <a:srgbClr val="2E7D5B"/>
-                </a:solidFill>
-                <a:latin typeface="Calibri" pitchFamily="34" charset="0"/>
-                <a:ea typeface="Calibri" pitchFamily="34" charset="-122"/>
-                <a:cs typeface="Calibri" pitchFamily="34" charset="-120"/>
-              </a:rPr>
-              <a:t>MARKET POTENTIAL &amp; FUNDABILITY</a:t>
-            </a:r>
-            <a:endParaRPr lang="en-US" sz="1300" dirty="0"/>
-          </a:p>
-        </p:txBody>
-      </p:sp>
-      <p:sp>
-        <p:nvSpPr>
-          <p:cNvPr id="3" name="Text 1"/>
-          <p:cNvSpPr/>
-          <p:nvPr/>
-        </p:nvSpPr>
-        <p:spPr>
-          <a:xfrm>
-            <a:off x="548640" y="731520"/>
-            <a:ext cx="10515600" cy="822960"/>
-          </a:xfrm>
-          <a:prstGeom prst="rect">
-            <a:avLst/>
-          </a:prstGeom>
-          <a:noFill/>
-          <a:ln/>
-        </p:spPr>
-        <p:txBody>
-          <a:bodyPr wrap="square" lIns="0" tIns="0" rIns="0" bIns="0" rtlCol="0" anchor="ctr"/>
-          <a:lstStyle/>
-          <a:p>
-            <a:pPr indent="0" marL="0">
-              <a:buNone/>
-            </a:pPr>
-            <a:r>
-              <a:rPr lang="en-US" sz="3400" b="1" dirty="0">
-                <a:solidFill>
-                  <a:srgbClr val="211F1B"/>
-                </a:solidFill>
-                <a:latin typeface="Cambria" pitchFamily="34" charset="0"/>
-                <a:ea typeface="Cambria" pitchFamily="34" charset="-122"/>
-                <a:cs typeface="Cambria" pitchFamily="34" charset="-120"/>
-              </a:rPr>
-              <a:t>People already pay for this — slowly</a:t>
-            </a:r>
-            <a:endParaRPr lang="en-US" sz="3400" dirty="0"/>
-          </a:p>
-        </p:txBody>
-      </p:sp>
-      <p:sp>
-        <p:nvSpPr>
-          <p:cNvPr id="4" name="Shape 2"/>
-          <p:cNvSpPr/>
-          <p:nvPr/>
-        </p:nvSpPr>
-        <p:spPr>
-          <a:xfrm>
-            <a:off x="548640" y="1965960"/>
-            <a:ext cx="3291840" cy="1554480"/>
-          </a:xfrm>
-          <a:prstGeom prst="roundRect">
-            <a:avLst>
-              <a:gd name="adj" fmla="val 7059"/>
-            </a:avLst>
-          </a:prstGeom>
-          <a:solidFill>
-            <a:srgbClr val="FFFFFF"/>
-          </a:solidFill>
-          <a:ln w="12700">
-            <a:solidFill>
-              <a:srgbClr val="E7E3D9"/>
-            </a:solidFill>
-            <a:prstDash val="solid"/>
-          </a:ln>
-          <a:effectLst>
-            <a:outerShdw sx="100000" sy="100000" kx="0" ky="0" algn="bl" rotWithShape="0" blurRad="101600" dist="38100" dir="5400000">
-              <a:srgbClr val="211F1B">
-                <a:alpha val="12000"/>
-              </a:srgbClr>
-            </a:outerShdw>
-          </a:effectLst>
-        </p:spPr>
-      </p:sp>
-      <p:sp>
-        <p:nvSpPr>
-          <p:cNvPr id="5" name="Text 3"/>
-          <p:cNvSpPr/>
-          <p:nvPr/>
-        </p:nvSpPr>
-        <p:spPr>
-          <a:xfrm>
-            <a:off x="548640" y="2130552"/>
-            <a:ext cx="3291840" cy="854964"/>
-          </a:xfrm>
-          <a:prstGeom prst="rect">
-            <a:avLst/>
-          </a:prstGeom>
-          <a:noFill/>
-          <a:ln/>
-        </p:spPr>
-        <p:txBody>
-          <a:bodyPr wrap="square" lIns="0" tIns="0" rIns="0" bIns="0" rtlCol="0" anchor="ctr"/>
-          <a:lstStyle/>
-          <a:p>
-            <a:pPr algn="ctr" indent="0" marL="0">
-              <a:buNone/>
-            </a:pPr>
-            <a:r>
-              <a:rPr lang="en-US" sz="4000" b="1" dirty="0">
-                <a:solidFill>
-                  <a:srgbClr val="2E7D5B"/>
-                </a:solidFill>
-                <a:latin typeface="Cambria" pitchFamily="34" charset="0"/>
-                <a:ea typeface="Cambria" pitchFamily="34" charset="-122"/>
-                <a:cs typeface="Cambria" pitchFamily="34" charset="-120"/>
-              </a:rPr>
-              <a:t>100M+</a:t>
-            </a:r>
-            <a:endParaRPr lang="en-US" sz="4000" dirty="0"/>
-          </a:p>
-        </p:txBody>
-      </p:sp>
-      <p:sp>
-        <p:nvSpPr>
-          <p:cNvPr id="6" name="Text 4"/>
-          <p:cNvSpPr/>
-          <p:nvPr/>
-        </p:nvSpPr>
-        <p:spPr>
-          <a:xfrm>
-            <a:off x="731520" y="2953512"/>
-            <a:ext cx="2926080" cy="457200"/>
-          </a:xfrm>
-          <a:prstGeom prst="rect">
-            <a:avLst/>
-          </a:prstGeom>
-          <a:noFill/>
-          <a:ln/>
-        </p:spPr>
-        <p:txBody>
-          <a:bodyPr wrap="square" lIns="0" tIns="0" rIns="0" bIns="0" rtlCol="0" anchor="ctr"/>
-          <a:lstStyle/>
-          <a:p>
-            <a:pPr algn="ctr" indent="0" marL="0">
-              <a:buNone/>
-            </a:pPr>
-            <a:r>
-              <a:rPr lang="en-US" sz="1250" dirty="0">
-                <a:solidFill>
-                  <a:srgbClr val="68655A"/>
-                </a:solidFill>
-                <a:latin typeface="Calibri" pitchFamily="34" charset="0"/>
-                <a:ea typeface="Calibri" pitchFamily="34" charset="-122"/>
-                <a:cs typeface="Calibri" pitchFamily="34" charset="-120"/>
-              </a:rPr>
-              <a:t>Americans hold medical debt</a:t>
-            </a:r>
-            <a:endParaRPr lang="en-US" sz="1250" dirty="0"/>
-          </a:p>
-        </p:txBody>
-      </p:sp>
-      <p:sp>
-        <p:nvSpPr>
-          <p:cNvPr id="7" name="Shape 5"/>
-          <p:cNvSpPr/>
-          <p:nvPr/>
-        </p:nvSpPr>
-        <p:spPr>
-          <a:xfrm>
-            <a:off x="3977640" y="1965960"/>
-            <a:ext cx="3291840" cy="1554480"/>
-          </a:xfrm>
-          <a:prstGeom prst="roundRect">
-            <a:avLst>
-              <a:gd name="adj" fmla="val 7059"/>
-            </a:avLst>
-          </a:prstGeom>
-          <a:solidFill>
-            <a:srgbClr val="FFFFFF"/>
-          </a:solidFill>
-          <a:ln w="12700">
-            <a:solidFill>
-              <a:srgbClr val="E7E3D9"/>
-            </a:solidFill>
-            <a:prstDash val="solid"/>
-          </a:ln>
-          <a:effectLst>
-            <a:outerShdw sx="100000" sy="100000" kx="0" ky="0" algn="bl" rotWithShape="0" blurRad="101600" dist="38100" dir="5400000">
-              <a:srgbClr val="211F1B">
-                <a:alpha val="12000"/>
-              </a:srgbClr>
-            </a:outerShdw>
-          </a:effectLst>
-        </p:spPr>
-      </p:sp>
-      <p:sp>
-        <p:nvSpPr>
-          <p:cNvPr id="8" name="Text 6"/>
-          <p:cNvSpPr/>
-          <p:nvPr/>
-        </p:nvSpPr>
-        <p:spPr>
-          <a:xfrm>
-            <a:off x="3977640" y="2130552"/>
-            <a:ext cx="3291840" cy="854964"/>
-          </a:xfrm>
-          <a:prstGeom prst="rect">
-            <a:avLst/>
-          </a:prstGeom>
-          <a:noFill/>
-          <a:ln/>
-        </p:spPr>
-        <p:txBody>
-          <a:bodyPr wrap="square" lIns="0" tIns="0" rIns="0" bIns="0" rtlCol="0" anchor="ctr"/>
-          <a:lstStyle/>
-          <a:p>
-            <a:pPr algn="ctr" indent="0" marL="0">
-              <a:buNone/>
-            </a:pPr>
-            <a:r>
-              <a:rPr lang="en-US" sz="4000" b="1" dirty="0">
-                <a:solidFill>
-                  <a:srgbClr val="B07A2C"/>
-                </a:solidFill>
-                <a:latin typeface="Cambria" pitchFamily="34" charset="0"/>
-                <a:ea typeface="Cambria" pitchFamily="34" charset="-122"/>
-                <a:cs typeface="Cambria" pitchFamily="34" charset="-120"/>
-              </a:rPr>
-              <a:t>1.5B</a:t>
-            </a:r>
-            <a:endParaRPr lang="en-US" sz="4000" dirty="0"/>
-          </a:p>
-        </p:txBody>
-      </p:sp>
-      <p:sp>
-        <p:nvSpPr>
-          <p:cNvPr id="9" name="Text 7"/>
-          <p:cNvSpPr/>
-          <p:nvPr/>
-        </p:nvSpPr>
-        <p:spPr>
-          <a:xfrm>
-            <a:off x="4160520" y="2953512"/>
-            <a:ext cx="2926080" cy="457200"/>
-          </a:xfrm>
-          <a:prstGeom prst="rect">
-            <a:avLst/>
-          </a:prstGeom>
-          <a:noFill/>
-          <a:ln/>
-        </p:spPr>
-        <p:txBody>
-          <a:bodyPr wrap="square" lIns="0" tIns="0" rIns="0" bIns="0" rtlCol="0" anchor="ctr"/>
-          <a:lstStyle/>
-          <a:p>
-            <a:pPr algn="ctr" indent="0" marL="0">
-              <a:buNone/>
-            </a:pPr>
-            <a:r>
-              <a:rPr lang="en-US" sz="1250" dirty="0">
-                <a:solidFill>
-                  <a:srgbClr val="68655A"/>
-                </a:solidFill>
-                <a:latin typeface="Calibri" pitchFamily="34" charset="0"/>
-                <a:ea typeface="Calibri" pitchFamily="34" charset="-122"/>
-                <a:cs typeface="Calibri" pitchFamily="34" charset="-120"/>
-              </a:rPr>
-              <a:t>medical bills issued/year in the US</a:t>
-            </a:r>
-            <a:endParaRPr lang="en-US" sz="1250" dirty="0"/>
-          </a:p>
-        </p:txBody>
-      </p:sp>
-      <p:sp>
-        <p:nvSpPr>
-          <p:cNvPr id="10" name="Shape 8"/>
-          <p:cNvSpPr/>
-          <p:nvPr/>
-        </p:nvSpPr>
-        <p:spPr>
-          <a:xfrm>
-            <a:off x="7406640" y="1965960"/>
-            <a:ext cx="3840480" cy="1554480"/>
-          </a:xfrm>
-          <a:prstGeom prst="roundRect">
-            <a:avLst>
-              <a:gd name="adj" fmla="val 7059"/>
-            </a:avLst>
-          </a:prstGeom>
-          <a:solidFill>
-            <a:srgbClr val="FFFFFF"/>
-          </a:solidFill>
-          <a:ln w="12700">
-            <a:solidFill>
-              <a:srgbClr val="E7E3D9"/>
-            </a:solidFill>
-            <a:prstDash val="solid"/>
-          </a:ln>
-          <a:effectLst>
-            <a:outerShdw sx="100000" sy="100000" kx="0" ky="0" algn="bl" rotWithShape="0" blurRad="101600" dist="38100" dir="5400000">
-              <a:srgbClr val="211F1B">
-                <a:alpha val="12000"/>
-              </a:srgbClr>
-            </a:outerShdw>
-          </a:effectLst>
-        </p:spPr>
-      </p:sp>
-      <p:sp>
-        <p:nvSpPr>
-          <p:cNvPr id="11" name="Text 9"/>
-          <p:cNvSpPr/>
-          <p:nvPr/>
-        </p:nvSpPr>
-        <p:spPr>
-          <a:xfrm>
-            <a:off x="7406640" y="2130552"/>
-            <a:ext cx="3840480" cy="854964"/>
-          </a:xfrm>
-          <a:prstGeom prst="rect">
-            <a:avLst/>
-          </a:prstGeom>
-          <a:noFill/>
-          <a:ln/>
-        </p:spPr>
-        <p:txBody>
-          <a:bodyPr wrap="square" lIns="0" tIns="0" rIns="0" bIns="0" rtlCol="0" anchor="ctr"/>
-          <a:lstStyle/>
-          <a:p>
-            <a:pPr algn="ctr" indent="0" marL="0">
-              <a:buNone/>
-            </a:pPr>
-            <a:r>
-              <a:rPr lang="en-US" sz="4000" b="1" dirty="0">
-                <a:solidFill>
-                  <a:srgbClr val="AB4A37"/>
-                </a:solidFill>
-                <a:latin typeface="Cambria" pitchFamily="34" charset="0"/>
-                <a:ea typeface="Cambria" pitchFamily="34" charset="-122"/>
-                <a:cs typeface="Cambria" pitchFamily="34" charset="-120"/>
-              </a:rPr>
-              <a:t>25–35%</a:t>
-            </a:r>
-            <a:endParaRPr lang="en-US" sz="4000" dirty="0"/>
-          </a:p>
-        </p:txBody>
-      </p:sp>
-      <p:sp>
-        <p:nvSpPr>
-          <p:cNvPr id="12" name="Text 10"/>
-          <p:cNvSpPr/>
-          <p:nvPr/>
-        </p:nvSpPr>
-        <p:spPr>
-          <a:xfrm>
-            <a:off x="7589520" y="2953512"/>
-            <a:ext cx="3474720" cy="457200"/>
-          </a:xfrm>
-          <a:prstGeom prst="rect">
-            <a:avLst/>
-          </a:prstGeom>
-          <a:noFill/>
-          <a:ln/>
-        </p:spPr>
-        <p:txBody>
-          <a:bodyPr wrap="square" lIns="0" tIns="0" rIns="0" bIns="0" rtlCol="0" anchor="ctr"/>
-          <a:lstStyle/>
-          <a:p>
-            <a:pPr algn="ctr" indent="0" marL="0">
-              <a:buNone/>
-            </a:pPr>
-            <a:r>
-              <a:rPr lang="en-US" sz="1250" dirty="0">
-                <a:solidFill>
-                  <a:srgbClr val="68655A"/>
-                </a:solidFill>
-                <a:latin typeface="Calibri" pitchFamily="34" charset="0"/>
-                <a:ea typeface="Calibri" pitchFamily="34" charset="-122"/>
-                <a:cs typeface="Calibri" pitchFamily="34" charset="-120"/>
-              </a:rPr>
-              <a:t>contingency fees existing services already charge</a:t>
-            </a:r>
-            <a:endParaRPr lang="en-US" sz="1250" dirty="0"/>
-          </a:p>
-        </p:txBody>
-      </p:sp>
-      <p:sp>
-        <p:nvSpPr>
-          <p:cNvPr id="13" name="Text 11"/>
-          <p:cNvSpPr/>
-          <p:nvPr/>
-        </p:nvSpPr>
-        <p:spPr>
-          <a:xfrm>
-            <a:off x="548640" y="3794760"/>
-            <a:ext cx="4572000" cy="365760"/>
-          </a:xfrm>
-          <a:prstGeom prst="rect">
-            <a:avLst/>
-          </a:prstGeom>
-          <a:noFill/>
-          <a:ln/>
-        </p:spPr>
-        <p:txBody>
-          <a:bodyPr wrap="square" lIns="0" tIns="0" rIns="0" bIns="0" rtlCol="0" anchor="ctr"/>
-          <a:lstStyle/>
-          <a:p>
-            <a:pPr indent="0" marL="0">
-              <a:buNone/>
-            </a:pPr>
-            <a:r>
-              <a:rPr lang="en-US" sz="1500" b="1" dirty="0">
-                <a:solidFill>
-                  <a:srgbClr val="211F1B"/>
-                </a:solidFill>
-                <a:latin typeface="Calibri" pitchFamily="34" charset="0"/>
-                <a:ea typeface="Calibri" pitchFamily="34" charset="-122"/>
-                <a:cs typeface="Calibri" pitchFamily="34" charset="-120"/>
-              </a:rPr>
-              <a:t>Business model</a:t>
-            </a:r>
-            <a:endParaRPr lang="en-US" sz="1500" dirty="0"/>
-          </a:p>
-        </p:txBody>
-      </p:sp>
-      <p:sp>
-        <p:nvSpPr>
-          <p:cNvPr id="14" name="Text 12"/>
-          <p:cNvSpPr/>
-          <p:nvPr/>
-        </p:nvSpPr>
-        <p:spPr>
-          <a:xfrm>
-            <a:off x="548640" y="4251960"/>
-            <a:ext cx="5394960" cy="365760"/>
-          </a:xfrm>
-          <a:prstGeom prst="rect">
-            <a:avLst/>
-          </a:prstGeom>
-          <a:noFill/>
-          <a:ln/>
-        </p:spPr>
-        <p:txBody>
-          <a:bodyPr wrap="square" lIns="0" tIns="0" rIns="0" bIns="0" rtlCol="0" anchor="ctr"/>
-          <a:lstStyle/>
-          <a:p>
-            <a:pPr indent="0" marL="0">
-              <a:buNone/>
-            </a:pPr>
-            <a:r>
-              <a:rPr lang="en-US" sz="1300" dirty="0">
-                <a:solidFill>
-                  <a:srgbClr val="68655A"/>
-                </a:solidFill>
-                <a:latin typeface="Calibri" pitchFamily="34" charset="0"/>
-                <a:ea typeface="Calibri" pitchFamily="34" charset="-122"/>
-                <a:cs typeface="Calibri" pitchFamily="34" charset="-120"/>
-              </a:rPr>
-              <a:t>• Freemium: free bill scan + evidence report</a:t>
-            </a:r>
-            <a:endParaRPr lang="en-US" sz="1300" dirty="0"/>
-          </a:p>
-        </p:txBody>
-      </p:sp>
-      <p:sp>
-        <p:nvSpPr>
-          <p:cNvPr id="15" name="Text 13"/>
-          <p:cNvSpPr/>
-          <p:nvPr/>
-        </p:nvSpPr>
-        <p:spPr>
-          <a:xfrm>
-            <a:off x="548640" y="4636008"/>
-            <a:ext cx="5394960" cy="365760"/>
-          </a:xfrm>
-          <a:prstGeom prst="rect">
-            <a:avLst/>
-          </a:prstGeom>
-          <a:noFill/>
-          <a:ln/>
-        </p:spPr>
-        <p:txBody>
-          <a:bodyPr wrap="square" lIns="0" tIns="0" rIns="0" bIns="0" rtlCol="0" anchor="ctr"/>
-          <a:lstStyle/>
-          <a:p>
-            <a:pPr indent="0" marL="0">
-              <a:buNone/>
-            </a:pPr>
-            <a:r>
-              <a:rPr lang="en-US" sz="1300" dirty="0">
-                <a:solidFill>
-                  <a:srgbClr val="68655A"/>
-                </a:solidFill>
-                <a:latin typeface="Calibri" pitchFamily="34" charset="0"/>
-                <a:ea typeface="Calibri" pitchFamily="34" charset="-122"/>
-                <a:cs typeface="Calibri" pitchFamily="34" charset="-120"/>
-              </a:rPr>
-              <a:t>• Success fee on verified, recovered savings</a:t>
-            </a:r>
-            <a:endParaRPr lang="en-US" sz="1300" dirty="0"/>
-          </a:p>
-        </p:txBody>
-      </p:sp>
-      <p:sp>
-        <p:nvSpPr>
-          <p:cNvPr id="16" name="Text 14"/>
-          <p:cNvSpPr/>
-          <p:nvPr/>
-        </p:nvSpPr>
-        <p:spPr>
-          <a:xfrm>
-            <a:off x="548640" y="5020056"/>
-            <a:ext cx="5394960" cy="365760"/>
-          </a:xfrm>
-          <a:prstGeom prst="rect">
-            <a:avLst/>
-          </a:prstGeom>
-          <a:noFill/>
-          <a:ln/>
-        </p:spPr>
-        <p:txBody>
-          <a:bodyPr wrap="square" lIns="0" tIns="0" rIns="0" bIns="0" rtlCol="0" anchor="ctr"/>
-          <a:lstStyle/>
-          <a:p>
-            <a:pPr indent="0" marL="0">
-              <a:buNone/>
-            </a:pPr>
-            <a:r>
-              <a:rPr lang="en-US" sz="1300" dirty="0">
-                <a:solidFill>
-                  <a:srgbClr val="68655A"/>
-                </a:solidFill>
-                <a:latin typeface="Calibri" pitchFamily="34" charset="0"/>
-                <a:ea typeface="Calibri" pitchFamily="34" charset="-122"/>
-                <a:cs typeface="Calibri" pitchFamily="34" charset="-120"/>
-              </a:rPr>
-              <a:t>• B2B2C: employer benefits, patient advocacy nonprofits, TPAs</a:t>
-            </a:r>
-            <a:endParaRPr lang="en-US" sz="1300" dirty="0"/>
-          </a:p>
-        </p:txBody>
-      </p:sp>
-      <p:sp>
-        <p:nvSpPr>
-          <p:cNvPr id="17" name="Text 15"/>
-          <p:cNvSpPr/>
-          <p:nvPr/>
-        </p:nvSpPr>
-        <p:spPr>
-          <a:xfrm>
-            <a:off x="6400800" y="3794760"/>
-            <a:ext cx="4572000" cy="365760"/>
-          </a:xfrm>
-          <a:prstGeom prst="rect">
-            <a:avLst/>
-          </a:prstGeom>
-          <a:noFill/>
-          <a:ln/>
-        </p:spPr>
-        <p:txBody>
-          <a:bodyPr wrap="square" lIns="0" tIns="0" rIns="0" bIns="0" rtlCol="0" anchor="ctr"/>
-          <a:lstStyle/>
-          <a:p>
-            <a:pPr indent="0" marL="0">
-              <a:buNone/>
-            </a:pPr>
-            <a:r>
-              <a:rPr lang="en-US" sz="1500" b="1" dirty="0">
-                <a:solidFill>
-                  <a:srgbClr val="211F1B"/>
-                </a:solidFill>
-                <a:latin typeface="Calibri" pitchFamily="34" charset="0"/>
-                <a:ea typeface="Calibri" pitchFamily="34" charset="-122"/>
-                <a:cs typeface="Calibri" pitchFamily="34" charset="-120"/>
-              </a:rPr>
-              <a:t>Why now</a:t>
-            </a:r>
-            <a:endParaRPr lang="en-US" sz="1500" dirty="0"/>
-          </a:p>
-        </p:txBody>
-      </p:sp>
-      <p:sp>
-        <p:nvSpPr>
-          <p:cNvPr id="18" name="Text 16"/>
-          <p:cNvSpPr/>
-          <p:nvPr/>
-        </p:nvSpPr>
-        <p:spPr>
-          <a:xfrm>
-            <a:off x="6400800" y="4251960"/>
-            <a:ext cx="5394960" cy="548640"/>
-          </a:xfrm>
-          <a:prstGeom prst="rect">
-            <a:avLst/>
-          </a:prstGeom>
-          <a:noFill/>
-          <a:ln/>
-        </p:spPr>
-        <p:txBody>
-          <a:bodyPr wrap="square" lIns="0" tIns="0" rIns="0" bIns="0" rtlCol="0" anchor="ctr"/>
-          <a:lstStyle/>
-          <a:p>
-            <a:pPr indent="0" marL="0">
-              <a:lnSpc>
-                <a:spcPct val="120000"/>
-              </a:lnSpc>
-              <a:buNone/>
-            </a:pPr>
-            <a:r>
-              <a:rPr lang="en-US" sz="1250" dirty="0">
-                <a:solidFill>
-                  <a:srgbClr val="68655A"/>
-                </a:solidFill>
-                <a:latin typeface="Calibri" pitchFamily="34" charset="0"/>
-                <a:ea typeface="Calibri" pitchFamily="34" charset="-122"/>
-                <a:cs typeface="Calibri" pitchFamily="34" charset="-120"/>
-              </a:rPr>
-              <a:t>• CFPB's 2025 rule barring medical debt from credit reports sharpened scrutiny on billing accuracy</a:t>
-            </a:r>
-            <a:endParaRPr lang="en-US" sz="1250" dirty="0"/>
-          </a:p>
-        </p:txBody>
-      </p:sp>
-      <p:sp>
-        <p:nvSpPr>
-          <p:cNvPr id="19" name="Text 17"/>
-          <p:cNvSpPr/>
-          <p:nvPr/>
-        </p:nvSpPr>
-        <p:spPr>
-          <a:xfrm>
-            <a:off x="6400800" y="4818888"/>
-            <a:ext cx="5394960" cy="548640"/>
-          </a:xfrm>
-          <a:prstGeom prst="rect">
-            <a:avLst/>
-          </a:prstGeom>
-          <a:noFill/>
-          <a:ln/>
-        </p:spPr>
-        <p:txBody>
-          <a:bodyPr wrap="square" lIns="0" tIns="0" rIns="0" bIns="0" rtlCol="0" anchor="ctr"/>
-          <a:lstStyle/>
-          <a:p>
-            <a:pPr indent="0" marL="0">
-              <a:lnSpc>
-                <a:spcPct val="120000"/>
-              </a:lnSpc>
-              <a:buNone/>
-            </a:pPr>
-            <a:r>
-              <a:rPr lang="en-US" sz="1250" dirty="0">
-                <a:solidFill>
-                  <a:srgbClr val="68655A"/>
-                </a:solidFill>
-                <a:latin typeface="Calibri" pitchFamily="34" charset="0"/>
-                <a:ea typeface="Calibri" pitchFamily="34" charset="-122"/>
-                <a:cs typeface="Calibri" pitchFamily="34" charset="-120"/>
-              </a:rPr>
-              <a:t>• Gemini's document understanding makes a $200/hr patient advocate's job instant and free to start</a:t>
-            </a:r>
-            <a:endParaRPr lang="en-US" sz="1250" dirty="0"/>
-          </a:p>
-        </p:txBody>
-      </p:sp>
-      <p:sp>
-        <p:nvSpPr>
-          <p:cNvPr id="20" name="Text 18"/>
-          <p:cNvSpPr/>
-          <p:nvPr/>
-        </p:nvSpPr>
-        <p:spPr>
-          <a:xfrm>
-            <a:off x="11338560" y="6446520"/>
-            <a:ext cx="640080" cy="274320"/>
-          </a:xfrm>
-          <a:prstGeom prst="rect">
-            <a:avLst/>
-          </a:prstGeom>
-          <a:noFill/>
-          <a:ln/>
-        </p:spPr>
-        <p:txBody>
-          <a:bodyPr wrap="square" rtlCol="0" anchor="ctr"/>
-          <a:lstStyle/>
-          <a:p>
-            <a:pPr algn="r" indent="0" marL="0">
-              <a:buNone/>
-            </a:pPr>
-            <a:r>
-              <a:rPr lang="en-US" sz="1000" dirty="0">
-                <a:solidFill>
-                  <a:srgbClr val="68655A"/>
-                </a:solidFill>
-                <a:latin typeface="Calibri" pitchFamily="34" charset="0"/>
-                <a:ea typeface="Calibri" pitchFamily="34" charset="-122"/>
-                <a:cs typeface="Calibri" pitchFamily="34" charset="-120"/>
-              </a:rPr>
-              <a:t>6 / 8</a:t>
+              <a:t>6 / 9</a:t>
             </a:r>
             <a:endParaRPr lang="en-US" sz="1000" dirty="0"/>
           </a:p>
@@ -6239,7 +6104,7 @@
                 <a:ea typeface="Calibri" pitchFamily="34" charset="-122"/>
                 <a:cs typeface="Calibri" pitchFamily="34" charset="-120"/>
               </a:rPr>
-              <a:t>GO-TO-MARKET TRACTION</a:t>
+              <a:t>WHY CLEARBILL WINS</a:t>
             </a:r>
             <a:endParaRPr lang="en-US" sz="1300" dirty="0"/>
           </a:p>
@@ -6278,106 +6143,1434 @@
                 <a:ea typeface="Cambria" pitchFamily="34" charset="-122"/>
                 <a:cs typeface="Cambria" pitchFamily="34" charset="-120"/>
               </a:rPr>
-              <a:t>Built to spread on its own</a:t>
+              <a:t>Not a weekend chatbot wrapper</a:t>
             </a:r>
             <a:endParaRPr lang="en-US" sz="3400" dirty="0"/>
           </a:p>
         </p:txBody>
       </p:sp>
-      <p:sp>
-        <p:nvSpPr>
-          <p:cNvPr id="4" name="Shape 2"/>
-          <p:cNvSpPr/>
-          <p:nvPr/>
-        </p:nvSpPr>
-        <p:spPr>
-          <a:xfrm>
-            <a:off x="548640" y="2011680"/>
-            <a:ext cx="5120640" cy="3840480"/>
-          </a:xfrm>
-          <a:prstGeom prst="roundRect">
-            <a:avLst>
-              <a:gd name="adj" fmla="val 3333"/>
-            </a:avLst>
-          </a:prstGeom>
-          <a:solidFill>
-            <a:srgbClr val="1B4D38"/>
-          </a:solidFill>
-          <a:ln/>
-        </p:spPr>
-      </p:sp>
-      <p:sp>
-        <p:nvSpPr>
-          <p:cNvPr id="5" name="Text 3"/>
-          <p:cNvSpPr/>
-          <p:nvPr/>
-        </p:nvSpPr>
-        <p:spPr>
-          <a:xfrm>
-            <a:off x="822960" y="2331720"/>
-            <a:ext cx="4572000" cy="1280160"/>
-          </a:xfrm>
-          <a:prstGeom prst="rect">
-            <a:avLst/>
-          </a:prstGeom>
-          <a:noFill/>
-          <a:ln/>
-        </p:spPr>
-        <p:txBody>
-          <a:bodyPr wrap="square" lIns="0" tIns="0" rIns="0" bIns="0" rtlCol="0" anchor="ctr"/>
-          <a:lstStyle/>
-          <a:p>
-            <a:pPr indent="0" marL="0">
-              <a:lnSpc>
-                <a:spcPct val="115000"/>
-              </a:lnSpc>
-              <a:buNone/>
-            </a:pPr>
-            <a:r>
-              <a:rPr lang="en-US" sz="2600" b="1" dirty="0">
-                <a:solidFill>
-                  <a:srgbClr val="FFFFFF"/>
-                </a:solidFill>
-                <a:latin typeface="Cambria" pitchFamily="34" charset="0"/>
-                <a:ea typeface="Cambria" pitchFamily="34" charset="-122"/>
-                <a:cs typeface="Cambria" pitchFamily="34" charset="-120"/>
-              </a:rPr>
-              <a:t>“We found $112</a:t>
-            </a:r>
-            <a:endParaRPr lang="en-US" sz="2600" dirty="0"/>
-          </a:p>
-          <a:p>
-            <a:pPr indent="0" marL="0">
-              <a:lnSpc>
-                <a:spcPct val="115000"/>
-              </a:lnSpc>
-              <a:buNone/>
-            </a:pPr>
-            <a:r>
-              <a:rPr lang="en-US" sz="2600" b="1" dirty="0">
-                <a:solidFill>
-                  <a:srgbClr val="FFFFFF"/>
-                </a:solidFill>
-                <a:latin typeface="Cambria" pitchFamily="34" charset="0"/>
-                <a:ea typeface="Cambria" pitchFamily="34" charset="-122"/>
-                <a:cs typeface="Cambria" pitchFamily="34" charset="-120"/>
-              </a:rPr>
-              <a:t>you don't owe.”</a:t>
-            </a:r>
-            <a:endParaRPr lang="en-US" sz="2600" dirty="0"/>
-          </a:p>
-        </p:txBody>
-      </p:sp>
-      <p:sp>
-        <p:nvSpPr>
-          <p:cNvPr id="6" name="Text 4"/>
-          <p:cNvSpPr/>
-          <p:nvPr/>
-        </p:nvSpPr>
-        <p:spPr>
-          <a:xfrm>
-            <a:off x="822960" y="3749040"/>
-            <a:ext cx="4572000" cy="1097280"/>
+      <p:graphicFrame>
+        <p:nvGraphicFramePr>
+          <p:cNvPr id="8" name="Table 0"/>
+          <p:cNvGraphicFramePr>
+            <a:graphicFrameLocks noGrp="1"/>
+          </p:cNvGraphicFramePr>
+          <p:nvPr>
+            <p:extLst>
+              <p:ext uri="{D42A27DB-BD31-4B8C-83A1-F6EECF244321}">
+                <p14:modId xmlns:p14="http://schemas.microsoft.com/office/powerpoint/2010/main" val="1579011935"/>
+              </p:ext>
+            </p:extLst>
+          </p:nvPr>
+        </p:nvGraphicFramePr>
+        <p:xfrm>
+          <a:off x="548640" y="1965960"/>
+          <a:ext cx="10698480" cy="914400"/>
+        </p:xfrm>
+        <a:graphic>
+          <a:graphicData uri="http://schemas.openxmlformats.org/drawingml/2006/table">
+            <a:tbl>
+              <a:tblPr/>
+              <a:tblGrid>
+                <a:gridCol w="2468880"/>
+                <a:gridCol w="2651760"/>
+                <a:gridCol w="2834640"/>
+                <a:gridCol w="2743200"/>
+              </a:tblGrid>
+              <a:tr h="548640">
+                <a:tc>
+                  <a:txBody>
+                    <a:bodyPr/>
+                    <a:lstStyle/>
+                    <a:p>
+                      <a:pPr algn="l" indent="0" marL="0">
+                        <a:buNone/>
+                      </a:pPr>
+                      <a:endParaRPr lang="en-US" sz="1250" dirty="0">
+                        <a:latin typeface="Calibri" charset="0"/>
+                        <a:ea typeface="Calibri" charset="0"/>
+                        <a:cs typeface="Calibri" charset="0"/>
+                      </a:endParaRPr>
+                    </a:p>
+                  </a:txBody>
+                  <a:tcPr marL="91440" marR="91440" marT="45720" marB="45720" anchor="ctr">
+                    <a:lnL w="9525" cap="flat" cmpd="sng" algn="ctr">
+                      <a:solidFill>
+                        <a:srgbClr val="E7E3D9"/>
+                      </a:solidFill>
+                      <a:prstDash val="solid"/>
+                      <a:round/>
+                      <a:headEnd type="none" w="med" len="med"/>
+                      <a:tailEnd type="none" w="med" len="med"/>
+                    </a:lnL>
+                    <a:lnR w="9525" cap="flat" cmpd="sng" algn="ctr">
+                      <a:solidFill>
+                        <a:srgbClr val="E7E3D9"/>
+                      </a:solidFill>
+                      <a:prstDash val="solid"/>
+                      <a:round/>
+                      <a:headEnd type="none" w="med" len="med"/>
+                      <a:tailEnd type="none" w="med" len="med"/>
+                    </a:lnR>
+                    <a:lnT w="9525" cap="flat" cmpd="sng" algn="ctr">
+                      <a:solidFill>
+                        <a:srgbClr val="E7E3D9"/>
+                      </a:solidFill>
+                      <a:prstDash val="solid"/>
+                      <a:round/>
+                      <a:headEnd type="none" w="med" len="med"/>
+                      <a:tailEnd type="none" w="med" len="med"/>
+                    </a:lnT>
+                    <a:lnB w="9525" cap="flat" cmpd="sng" algn="ctr">
+                      <a:solidFill>
+                        <a:srgbClr val="E7E3D9"/>
+                      </a:solidFill>
+                      <a:prstDash val="solid"/>
+                      <a:round/>
+                      <a:headEnd type="none" w="med" len="med"/>
+                      <a:tailEnd type="none" w="med" len="med"/>
+                    </a:lnB>
+                    <a:solidFill>
+                      <a:srgbClr val="2E7D5B"/>
+                    </a:solidFill>
+                  </a:tcPr>
+                </a:tc>
+                <a:tc>
+                  <a:txBody>
+                    <a:bodyPr/>
+                    <a:lstStyle/>
+                    <a:p>
+                      <a:pPr algn="ctr" indent="0" marL="0">
+                        <a:buNone/>
+                      </a:pPr>
+                      <a:r>
+                        <a:rPr lang="en-US" sz="1250" b="1" dirty="0">
+                          <a:solidFill>
+                            <a:srgbClr val="FFFFFF"/>
+                          </a:solidFill>
+                          <a:latin typeface="Calibri" pitchFamily="34" charset="0"/>
+                          <a:ea typeface="Calibri" pitchFamily="34" charset="-122"/>
+                          <a:cs typeface="Calibri" pitchFamily="34" charset="-120"/>
+                        </a:rPr>
+                        <a:t>Generic AI Chatbot</a:t>
+                      </a:r>
+                      <a:endParaRPr lang="en-US" sz="1250" dirty="0">
+                        <a:latin typeface="Calibri" charset="0"/>
+                        <a:ea typeface="Calibri" charset="0"/>
+                        <a:cs typeface="Calibri" charset="0"/>
+                      </a:endParaRPr>
+                    </a:p>
+                  </a:txBody>
+                  <a:tcPr marL="91440" marR="91440" marT="45720" marB="45720" anchor="ctr">
+                    <a:lnL w="9525" cap="flat" cmpd="sng" algn="ctr">
+                      <a:solidFill>
+                        <a:srgbClr val="E7E3D9"/>
+                      </a:solidFill>
+                      <a:prstDash val="solid"/>
+                      <a:round/>
+                      <a:headEnd type="none" w="med" len="med"/>
+                      <a:tailEnd type="none" w="med" len="med"/>
+                    </a:lnL>
+                    <a:lnR w="9525" cap="flat" cmpd="sng" algn="ctr">
+                      <a:solidFill>
+                        <a:srgbClr val="E7E3D9"/>
+                      </a:solidFill>
+                      <a:prstDash val="solid"/>
+                      <a:round/>
+                      <a:headEnd type="none" w="med" len="med"/>
+                      <a:tailEnd type="none" w="med" len="med"/>
+                    </a:lnR>
+                    <a:lnT w="9525" cap="flat" cmpd="sng" algn="ctr">
+                      <a:solidFill>
+                        <a:srgbClr val="E7E3D9"/>
+                      </a:solidFill>
+                      <a:prstDash val="solid"/>
+                      <a:round/>
+                      <a:headEnd type="none" w="med" len="med"/>
+                      <a:tailEnd type="none" w="med" len="med"/>
+                    </a:lnT>
+                    <a:lnB w="9525" cap="flat" cmpd="sng" algn="ctr">
+                      <a:solidFill>
+                        <a:srgbClr val="E7E3D9"/>
+                      </a:solidFill>
+                      <a:prstDash val="solid"/>
+                      <a:round/>
+                      <a:headEnd type="none" w="med" len="med"/>
+                      <a:tailEnd type="none" w="med" len="med"/>
+                    </a:lnB>
+                    <a:solidFill>
+                      <a:srgbClr val="2E7D5B"/>
+                    </a:solidFill>
+                  </a:tcPr>
+                </a:tc>
+                <a:tc>
+                  <a:txBody>
+                    <a:bodyPr/>
+                    <a:lstStyle/>
+                    <a:p>
+                      <a:pPr algn="ctr" indent="0" marL="0">
+                        <a:buNone/>
+                      </a:pPr>
+                      <a:r>
+                        <a:rPr lang="en-US" sz="1250" b="1" dirty="0">
+                          <a:solidFill>
+                            <a:srgbClr val="FFFFFF"/>
+                          </a:solidFill>
+                          <a:latin typeface="Calibri" pitchFamily="34" charset="0"/>
+                          <a:ea typeface="Calibri" pitchFamily="34" charset="-122"/>
+                          <a:cs typeface="Calibri" pitchFamily="34" charset="-120"/>
+                        </a:rPr>
+                        <a:t>Manual Advocate</a:t>
+                      </a:r>
+                      <a:endParaRPr lang="en-US" sz="1250" dirty="0">
+                        <a:latin typeface="Calibri" charset="0"/>
+                        <a:ea typeface="Calibri" charset="0"/>
+                        <a:cs typeface="Calibri" charset="0"/>
+                      </a:endParaRPr>
+                    </a:p>
+                    <a:p>
+                      <a:pPr algn="ctr" indent="0" marL="0">
+                        <a:buNone/>
+                      </a:pPr>
+                      <a:r>
+                        <a:rPr lang="en-US" sz="1250" b="1" dirty="0">
+                          <a:solidFill>
+                            <a:srgbClr val="FFFFFF"/>
+                          </a:solidFill>
+                          <a:latin typeface="Calibri" pitchFamily="34" charset="0"/>
+                          <a:ea typeface="Calibri" pitchFamily="34" charset="-122"/>
+                          <a:cs typeface="Calibri" pitchFamily="34" charset="-120"/>
+                        </a:rPr>
+                        <a:t>(Resolve, GoodBill)</a:t>
+                      </a:r>
+                      <a:endParaRPr lang="en-US" sz="1250" dirty="0">
+                        <a:latin typeface="Calibri" charset="0"/>
+                        <a:ea typeface="Calibri" charset="0"/>
+                        <a:cs typeface="Calibri" charset="0"/>
+                      </a:endParaRPr>
+                    </a:p>
+                  </a:txBody>
+                  <a:tcPr marL="91440" marR="91440" marT="45720" marB="45720" anchor="ctr">
+                    <a:lnL w="9525" cap="flat" cmpd="sng" algn="ctr">
+                      <a:solidFill>
+                        <a:srgbClr val="E7E3D9"/>
+                      </a:solidFill>
+                      <a:prstDash val="solid"/>
+                      <a:round/>
+                      <a:headEnd type="none" w="med" len="med"/>
+                      <a:tailEnd type="none" w="med" len="med"/>
+                    </a:lnL>
+                    <a:lnR w="9525" cap="flat" cmpd="sng" algn="ctr">
+                      <a:solidFill>
+                        <a:srgbClr val="E7E3D9"/>
+                      </a:solidFill>
+                      <a:prstDash val="solid"/>
+                      <a:round/>
+                      <a:headEnd type="none" w="med" len="med"/>
+                      <a:tailEnd type="none" w="med" len="med"/>
+                    </a:lnR>
+                    <a:lnT w="9525" cap="flat" cmpd="sng" algn="ctr">
+                      <a:solidFill>
+                        <a:srgbClr val="E7E3D9"/>
+                      </a:solidFill>
+                      <a:prstDash val="solid"/>
+                      <a:round/>
+                      <a:headEnd type="none" w="med" len="med"/>
+                      <a:tailEnd type="none" w="med" len="med"/>
+                    </a:lnT>
+                    <a:lnB w="9525" cap="flat" cmpd="sng" algn="ctr">
+                      <a:solidFill>
+                        <a:srgbClr val="E7E3D9"/>
+                      </a:solidFill>
+                      <a:prstDash val="solid"/>
+                      <a:round/>
+                      <a:headEnd type="none" w="med" len="med"/>
+                      <a:tailEnd type="none" w="med" len="med"/>
+                    </a:lnB>
+                    <a:solidFill>
+                      <a:srgbClr val="2E7D5B"/>
+                    </a:solidFill>
+                  </a:tcPr>
+                </a:tc>
+                <a:tc>
+                  <a:txBody>
+                    <a:bodyPr/>
+                    <a:lstStyle/>
+                    <a:p>
+                      <a:pPr algn="ctr" indent="0" marL="0">
+                        <a:buNone/>
+                      </a:pPr>
+                      <a:r>
+                        <a:rPr lang="en-US" sz="1250" b="1" dirty="0">
+                          <a:solidFill>
+                            <a:srgbClr val="FFFFFF"/>
+                          </a:solidFill>
+                          <a:latin typeface="Calibri" pitchFamily="34" charset="0"/>
+                          <a:ea typeface="Calibri" pitchFamily="34" charset="-122"/>
+                          <a:cs typeface="Calibri" pitchFamily="34" charset="-120"/>
+                        </a:rPr>
+                        <a:t>ClearBill AI</a:t>
+                      </a:r>
+                      <a:endParaRPr lang="en-US" sz="1250" dirty="0">
+                        <a:latin typeface="Calibri" charset="0"/>
+                        <a:ea typeface="Calibri" charset="0"/>
+                        <a:cs typeface="Calibri" charset="0"/>
+                      </a:endParaRPr>
+                    </a:p>
+                  </a:txBody>
+                  <a:tcPr marL="91440" marR="91440" marT="45720" marB="45720" anchor="ctr">
+                    <a:lnL w="9525" cap="flat" cmpd="sng" algn="ctr">
+                      <a:solidFill>
+                        <a:srgbClr val="E7E3D9"/>
+                      </a:solidFill>
+                      <a:prstDash val="solid"/>
+                      <a:round/>
+                      <a:headEnd type="none" w="med" len="med"/>
+                      <a:tailEnd type="none" w="med" len="med"/>
+                    </a:lnL>
+                    <a:lnR w="9525" cap="flat" cmpd="sng" algn="ctr">
+                      <a:solidFill>
+                        <a:srgbClr val="E7E3D9"/>
+                      </a:solidFill>
+                      <a:prstDash val="solid"/>
+                      <a:round/>
+                      <a:headEnd type="none" w="med" len="med"/>
+                      <a:tailEnd type="none" w="med" len="med"/>
+                    </a:lnR>
+                    <a:lnT w="9525" cap="flat" cmpd="sng" algn="ctr">
+                      <a:solidFill>
+                        <a:srgbClr val="E7E3D9"/>
+                      </a:solidFill>
+                      <a:prstDash val="solid"/>
+                      <a:round/>
+                      <a:headEnd type="none" w="med" len="med"/>
+                      <a:tailEnd type="none" w="med" len="med"/>
+                    </a:lnT>
+                    <a:lnB w="9525" cap="flat" cmpd="sng" algn="ctr">
+                      <a:solidFill>
+                        <a:srgbClr val="E7E3D9"/>
+                      </a:solidFill>
+                      <a:prstDash val="solid"/>
+                      <a:round/>
+                      <a:headEnd type="none" w="med" len="med"/>
+                      <a:tailEnd type="none" w="med" len="med"/>
+                    </a:lnB>
+                    <a:solidFill>
+                      <a:srgbClr val="2E7D5B"/>
+                    </a:solidFill>
+                  </a:tcPr>
+                </a:tc>
+              </a:tr>
+              <a:tr h="548640">
+                <a:tc>
+                  <a:txBody>
+                    <a:bodyPr/>
+                    <a:lstStyle/>
+                    <a:p>
+                      <a:pPr algn="l" indent="0" marL="0">
+                        <a:buNone/>
+                      </a:pPr>
+                      <a:r>
+                        <a:rPr lang="en-US" sz="1200" b="1" dirty="0">
+                          <a:solidFill>
+                            <a:srgbClr val="211F1B"/>
+                          </a:solidFill>
+                          <a:latin typeface="Calibri" pitchFamily="34" charset="0"/>
+                          <a:ea typeface="Calibri" pitchFamily="34" charset="-122"/>
+                          <a:cs typeface="Calibri" pitchFamily="34" charset="-120"/>
+                        </a:rPr>
+                        <a:t>Accuracy</a:t>
+                      </a:r>
+                      <a:endParaRPr lang="en-US" sz="1200" dirty="0">
+                        <a:latin typeface="Calibri" charset="0"/>
+                        <a:ea typeface="Calibri" charset="0"/>
+                        <a:cs typeface="Calibri" charset="0"/>
+                      </a:endParaRPr>
+                    </a:p>
+                  </a:txBody>
+                  <a:tcPr marL="91440" marR="91440" marT="45720" marB="45720" anchor="ctr">
+                    <a:lnL w="9525" cap="flat" cmpd="sng" algn="ctr">
+                      <a:solidFill>
+                        <a:srgbClr val="E7E3D9"/>
+                      </a:solidFill>
+                      <a:prstDash val="solid"/>
+                      <a:round/>
+                      <a:headEnd type="none" w="med" len="med"/>
+                      <a:tailEnd type="none" w="med" len="med"/>
+                    </a:lnL>
+                    <a:lnR w="9525" cap="flat" cmpd="sng" algn="ctr">
+                      <a:solidFill>
+                        <a:srgbClr val="E7E3D9"/>
+                      </a:solidFill>
+                      <a:prstDash val="solid"/>
+                      <a:round/>
+                      <a:headEnd type="none" w="med" len="med"/>
+                      <a:tailEnd type="none" w="med" len="med"/>
+                    </a:lnR>
+                    <a:lnT w="9525" cap="flat" cmpd="sng" algn="ctr">
+                      <a:solidFill>
+                        <a:srgbClr val="E7E3D9"/>
+                      </a:solidFill>
+                      <a:prstDash val="solid"/>
+                      <a:round/>
+                      <a:headEnd type="none" w="med" len="med"/>
+                      <a:tailEnd type="none" w="med" len="med"/>
+                    </a:lnT>
+                    <a:lnB w="9525" cap="flat" cmpd="sng" algn="ctr">
+                      <a:solidFill>
+                        <a:srgbClr val="E7E3D9"/>
+                      </a:solidFill>
+                      <a:prstDash val="solid"/>
+                      <a:round/>
+                      <a:headEnd type="none" w="med" len="med"/>
+                      <a:tailEnd type="none" w="med" len="med"/>
+                    </a:lnB>
+                    <a:solidFill>
+                      <a:srgbClr val="F6F5EE"/>
+                    </a:solidFill>
+                  </a:tcPr>
+                </a:tc>
+                <a:tc>
+                  <a:txBody>
+                    <a:bodyPr/>
+                    <a:lstStyle/>
+                    <a:p>
+                      <a:pPr algn="ctr" indent="0" marL="0">
+                        <a:buNone/>
+                      </a:pPr>
+                      <a:r>
+                        <a:rPr lang="en-US" sz="1200" dirty="0">
+                          <a:solidFill>
+                            <a:srgbClr val="211F1B"/>
+                          </a:solidFill>
+                          <a:latin typeface="Calibri" pitchFamily="34" charset="0"/>
+                          <a:ea typeface="Calibri" pitchFamily="34" charset="-122"/>
+                          <a:cs typeface="Calibri" pitchFamily="34" charset="-120"/>
+                        </a:rPr>
+                        <a:t>Can hallucinate</a:t>
+                      </a:r>
+                      <a:endParaRPr lang="en-US" sz="1200" dirty="0">
+                        <a:latin typeface="Calibri" charset="0"/>
+                        <a:ea typeface="Calibri" charset="0"/>
+                        <a:cs typeface="Calibri" charset="0"/>
+                      </a:endParaRPr>
+                    </a:p>
+                  </a:txBody>
+                  <a:tcPr marL="91440" marR="91440" marT="45720" marB="45720" anchor="ctr">
+                    <a:lnL w="9525" cap="flat" cmpd="sng" algn="ctr">
+                      <a:solidFill>
+                        <a:srgbClr val="E7E3D9"/>
+                      </a:solidFill>
+                      <a:prstDash val="solid"/>
+                      <a:round/>
+                      <a:headEnd type="none" w="med" len="med"/>
+                      <a:tailEnd type="none" w="med" len="med"/>
+                    </a:lnL>
+                    <a:lnR w="9525" cap="flat" cmpd="sng" algn="ctr">
+                      <a:solidFill>
+                        <a:srgbClr val="E7E3D9"/>
+                      </a:solidFill>
+                      <a:prstDash val="solid"/>
+                      <a:round/>
+                      <a:headEnd type="none" w="med" len="med"/>
+                      <a:tailEnd type="none" w="med" len="med"/>
+                    </a:lnR>
+                    <a:lnT w="9525" cap="flat" cmpd="sng" algn="ctr">
+                      <a:solidFill>
+                        <a:srgbClr val="E7E3D9"/>
+                      </a:solidFill>
+                      <a:prstDash val="solid"/>
+                      <a:round/>
+                      <a:headEnd type="none" w="med" len="med"/>
+                      <a:tailEnd type="none" w="med" len="med"/>
+                    </a:lnT>
+                    <a:lnB w="9525" cap="flat" cmpd="sng" algn="ctr">
+                      <a:solidFill>
+                        <a:srgbClr val="E7E3D9"/>
+                      </a:solidFill>
+                      <a:prstDash val="solid"/>
+                      <a:round/>
+                      <a:headEnd type="none" w="med" len="med"/>
+                      <a:tailEnd type="none" w="med" len="med"/>
+                    </a:lnB>
+                    <a:solidFill>
+                      <a:srgbClr val="F6F5EE"/>
+                    </a:solidFill>
+                  </a:tcPr>
+                </a:tc>
+                <a:tc>
+                  <a:txBody>
+                    <a:bodyPr/>
+                    <a:lstStyle/>
+                    <a:p>
+                      <a:pPr algn="ctr" indent="0" marL="0">
+                        <a:buNone/>
+                      </a:pPr>
+                      <a:r>
+                        <a:rPr lang="en-US" sz="1200" dirty="0">
+                          <a:solidFill>
+                            <a:srgbClr val="211F1B"/>
+                          </a:solidFill>
+                          <a:latin typeface="Calibri" pitchFamily="34" charset="0"/>
+                          <a:ea typeface="Calibri" pitchFamily="34" charset="-122"/>
+                          <a:cs typeface="Calibri" pitchFamily="34" charset="-120"/>
+                        </a:rPr>
+                        <a:t>Accurate (human-reviewed)</a:t>
+                      </a:r>
+                      <a:endParaRPr lang="en-US" sz="1200" dirty="0">
+                        <a:latin typeface="Calibri" charset="0"/>
+                        <a:ea typeface="Calibri" charset="0"/>
+                        <a:cs typeface="Calibri" charset="0"/>
+                      </a:endParaRPr>
+                    </a:p>
+                  </a:txBody>
+                  <a:tcPr marL="91440" marR="91440" marT="45720" marB="45720" anchor="ctr">
+                    <a:lnL w="9525" cap="flat" cmpd="sng" algn="ctr">
+                      <a:solidFill>
+                        <a:srgbClr val="E7E3D9"/>
+                      </a:solidFill>
+                      <a:prstDash val="solid"/>
+                      <a:round/>
+                      <a:headEnd type="none" w="med" len="med"/>
+                      <a:tailEnd type="none" w="med" len="med"/>
+                    </a:lnL>
+                    <a:lnR w="9525" cap="flat" cmpd="sng" algn="ctr">
+                      <a:solidFill>
+                        <a:srgbClr val="E7E3D9"/>
+                      </a:solidFill>
+                      <a:prstDash val="solid"/>
+                      <a:round/>
+                      <a:headEnd type="none" w="med" len="med"/>
+                      <a:tailEnd type="none" w="med" len="med"/>
+                    </a:lnR>
+                    <a:lnT w="9525" cap="flat" cmpd="sng" algn="ctr">
+                      <a:solidFill>
+                        <a:srgbClr val="E7E3D9"/>
+                      </a:solidFill>
+                      <a:prstDash val="solid"/>
+                      <a:round/>
+                      <a:headEnd type="none" w="med" len="med"/>
+                      <a:tailEnd type="none" w="med" len="med"/>
+                    </a:lnT>
+                    <a:lnB w="9525" cap="flat" cmpd="sng" algn="ctr">
+                      <a:solidFill>
+                        <a:srgbClr val="E7E3D9"/>
+                      </a:solidFill>
+                      <a:prstDash val="solid"/>
+                      <a:round/>
+                      <a:headEnd type="none" w="med" len="med"/>
+                      <a:tailEnd type="none" w="med" len="med"/>
+                    </a:lnB>
+                    <a:solidFill>
+                      <a:srgbClr val="F6F5EE"/>
+                    </a:solidFill>
+                  </a:tcPr>
+                </a:tc>
+                <a:tc>
+                  <a:txBody>
+                    <a:bodyPr/>
+                    <a:lstStyle/>
+                    <a:p>
+                      <a:pPr algn="ctr" indent="0" marL="0">
+                        <a:buNone/>
+                      </a:pPr>
+                      <a:r>
+                        <a:rPr lang="en-US" sz="1200" b="1" dirty="0">
+                          <a:solidFill>
+                            <a:srgbClr val="2E7D5B"/>
+                          </a:solidFill>
+                          <a:latin typeface="Calibri" pitchFamily="34" charset="0"/>
+                          <a:ea typeface="Calibri" pitchFamily="34" charset="-122"/>
+                          <a:cs typeface="Calibri" pitchFamily="34" charset="-120"/>
+                        </a:rPr>
+                        <a:t>Deterministic — zero false positives</a:t>
+                      </a:r>
+                      <a:endParaRPr lang="en-US" sz="1200" dirty="0">
+                        <a:latin typeface="Calibri" charset="0"/>
+                        <a:ea typeface="Calibri" charset="0"/>
+                        <a:cs typeface="Calibri" charset="0"/>
+                      </a:endParaRPr>
+                    </a:p>
+                  </a:txBody>
+                  <a:tcPr marL="91440" marR="91440" marT="45720" marB="45720" anchor="ctr">
+                    <a:lnL w="9525" cap="flat" cmpd="sng" algn="ctr">
+                      <a:solidFill>
+                        <a:srgbClr val="E7E3D9"/>
+                      </a:solidFill>
+                      <a:prstDash val="solid"/>
+                      <a:round/>
+                      <a:headEnd type="none" w="med" len="med"/>
+                      <a:tailEnd type="none" w="med" len="med"/>
+                    </a:lnL>
+                    <a:lnR w="9525" cap="flat" cmpd="sng" algn="ctr">
+                      <a:solidFill>
+                        <a:srgbClr val="E7E3D9"/>
+                      </a:solidFill>
+                      <a:prstDash val="solid"/>
+                      <a:round/>
+                      <a:headEnd type="none" w="med" len="med"/>
+                      <a:tailEnd type="none" w="med" len="med"/>
+                    </a:lnR>
+                    <a:lnT w="9525" cap="flat" cmpd="sng" algn="ctr">
+                      <a:solidFill>
+                        <a:srgbClr val="E7E3D9"/>
+                      </a:solidFill>
+                      <a:prstDash val="solid"/>
+                      <a:round/>
+                      <a:headEnd type="none" w="med" len="med"/>
+                      <a:tailEnd type="none" w="med" len="med"/>
+                    </a:lnT>
+                    <a:lnB w="9525" cap="flat" cmpd="sng" algn="ctr">
+                      <a:solidFill>
+                        <a:srgbClr val="E7E3D9"/>
+                      </a:solidFill>
+                      <a:prstDash val="solid"/>
+                      <a:round/>
+                      <a:headEnd type="none" w="med" len="med"/>
+                      <a:tailEnd type="none" w="med" len="med"/>
+                    </a:lnB>
+                    <a:solidFill>
+                      <a:srgbClr val="E6F1EA"/>
+                    </a:solidFill>
+                  </a:tcPr>
+                </a:tc>
+              </a:tr>
+              <a:tr h="548640">
+                <a:tc>
+                  <a:txBody>
+                    <a:bodyPr/>
+                    <a:lstStyle/>
+                    <a:p>
+                      <a:pPr algn="l" indent="0" marL="0">
+                        <a:buNone/>
+                      </a:pPr>
+                      <a:r>
+                        <a:rPr lang="en-US" sz="1200" b="1" dirty="0">
+                          <a:solidFill>
+                            <a:srgbClr val="211F1B"/>
+                          </a:solidFill>
+                          <a:latin typeface="Calibri" pitchFamily="34" charset="0"/>
+                          <a:ea typeface="Calibri" pitchFamily="34" charset="-122"/>
+                          <a:cs typeface="Calibri" pitchFamily="34" charset="-120"/>
+                        </a:rPr>
+                        <a:t>Speed</a:t>
+                      </a:r>
+                      <a:endParaRPr lang="en-US" sz="1200" dirty="0">
+                        <a:latin typeface="Calibri" charset="0"/>
+                        <a:ea typeface="Calibri" charset="0"/>
+                        <a:cs typeface="Calibri" charset="0"/>
+                      </a:endParaRPr>
+                    </a:p>
+                  </a:txBody>
+                  <a:tcPr marL="91440" marR="91440" marT="45720" marB="45720" anchor="ctr">
+                    <a:lnL w="9525" cap="flat" cmpd="sng" algn="ctr">
+                      <a:solidFill>
+                        <a:srgbClr val="E7E3D9"/>
+                      </a:solidFill>
+                      <a:prstDash val="solid"/>
+                      <a:round/>
+                      <a:headEnd type="none" w="med" len="med"/>
+                      <a:tailEnd type="none" w="med" len="med"/>
+                    </a:lnL>
+                    <a:lnR w="9525" cap="flat" cmpd="sng" algn="ctr">
+                      <a:solidFill>
+                        <a:srgbClr val="E7E3D9"/>
+                      </a:solidFill>
+                      <a:prstDash val="solid"/>
+                      <a:round/>
+                      <a:headEnd type="none" w="med" len="med"/>
+                      <a:tailEnd type="none" w="med" len="med"/>
+                    </a:lnR>
+                    <a:lnT w="9525" cap="flat" cmpd="sng" algn="ctr">
+                      <a:solidFill>
+                        <a:srgbClr val="E7E3D9"/>
+                      </a:solidFill>
+                      <a:prstDash val="solid"/>
+                      <a:round/>
+                      <a:headEnd type="none" w="med" len="med"/>
+                      <a:tailEnd type="none" w="med" len="med"/>
+                    </a:lnT>
+                    <a:lnB w="9525" cap="flat" cmpd="sng" algn="ctr">
+                      <a:solidFill>
+                        <a:srgbClr val="E7E3D9"/>
+                      </a:solidFill>
+                      <a:prstDash val="solid"/>
+                      <a:round/>
+                      <a:headEnd type="none" w="med" len="med"/>
+                      <a:tailEnd type="none" w="med" len="med"/>
+                    </a:lnB>
+                    <a:solidFill>
+                      <a:srgbClr val="FFFFFF"/>
+                    </a:solidFill>
+                  </a:tcPr>
+                </a:tc>
+                <a:tc>
+                  <a:txBody>
+                    <a:bodyPr/>
+                    <a:lstStyle/>
+                    <a:p>
+                      <a:pPr algn="ctr" indent="0" marL="0">
+                        <a:buNone/>
+                      </a:pPr>
+                      <a:r>
+                        <a:rPr lang="en-US" sz="1200" dirty="0">
+                          <a:solidFill>
+                            <a:srgbClr val="211F1B"/>
+                          </a:solidFill>
+                          <a:latin typeface="Calibri" pitchFamily="34" charset="0"/>
+                          <a:ea typeface="Calibri" pitchFamily="34" charset="-122"/>
+                          <a:cs typeface="Calibri" pitchFamily="34" charset="-120"/>
+                        </a:rPr>
+                        <a:t>Instant</a:t>
+                      </a:r>
+                      <a:endParaRPr lang="en-US" sz="1200" dirty="0">
+                        <a:latin typeface="Calibri" charset="0"/>
+                        <a:ea typeface="Calibri" charset="0"/>
+                        <a:cs typeface="Calibri" charset="0"/>
+                      </a:endParaRPr>
+                    </a:p>
+                  </a:txBody>
+                  <a:tcPr marL="91440" marR="91440" marT="45720" marB="45720" anchor="ctr">
+                    <a:lnL w="9525" cap="flat" cmpd="sng" algn="ctr">
+                      <a:solidFill>
+                        <a:srgbClr val="E7E3D9"/>
+                      </a:solidFill>
+                      <a:prstDash val="solid"/>
+                      <a:round/>
+                      <a:headEnd type="none" w="med" len="med"/>
+                      <a:tailEnd type="none" w="med" len="med"/>
+                    </a:lnL>
+                    <a:lnR w="9525" cap="flat" cmpd="sng" algn="ctr">
+                      <a:solidFill>
+                        <a:srgbClr val="E7E3D9"/>
+                      </a:solidFill>
+                      <a:prstDash val="solid"/>
+                      <a:round/>
+                      <a:headEnd type="none" w="med" len="med"/>
+                      <a:tailEnd type="none" w="med" len="med"/>
+                    </a:lnR>
+                    <a:lnT w="9525" cap="flat" cmpd="sng" algn="ctr">
+                      <a:solidFill>
+                        <a:srgbClr val="E7E3D9"/>
+                      </a:solidFill>
+                      <a:prstDash val="solid"/>
+                      <a:round/>
+                      <a:headEnd type="none" w="med" len="med"/>
+                      <a:tailEnd type="none" w="med" len="med"/>
+                    </a:lnT>
+                    <a:lnB w="9525" cap="flat" cmpd="sng" algn="ctr">
+                      <a:solidFill>
+                        <a:srgbClr val="E7E3D9"/>
+                      </a:solidFill>
+                      <a:prstDash val="solid"/>
+                      <a:round/>
+                      <a:headEnd type="none" w="med" len="med"/>
+                      <a:tailEnd type="none" w="med" len="med"/>
+                    </a:lnB>
+                    <a:solidFill>
+                      <a:srgbClr val="FFFFFF"/>
+                    </a:solidFill>
+                  </a:tcPr>
+                </a:tc>
+                <a:tc>
+                  <a:txBody>
+                    <a:bodyPr/>
+                    <a:lstStyle/>
+                    <a:p>
+                      <a:pPr algn="ctr" indent="0" marL="0">
+                        <a:buNone/>
+                      </a:pPr>
+                      <a:r>
+                        <a:rPr lang="en-US" sz="1200" dirty="0">
+                          <a:solidFill>
+                            <a:srgbClr val="211F1B"/>
+                          </a:solidFill>
+                          <a:latin typeface="Calibri" pitchFamily="34" charset="0"/>
+                          <a:ea typeface="Calibri" pitchFamily="34" charset="-122"/>
+                          <a:cs typeface="Calibri" pitchFamily="34" charset="-120"/>
+                        </a:rPr>
+                        <a:t>Days to weeks</a:t>
+                      </a:r>
+                      <a:endParaRPr lang="en-US" sz="1200" dirty="0">
+                        <a:latin typeface="Calibri" charset="0"/>
+                        <a:ea typeface="Calibri" charset="0"/>
+                        <a:cs typeface="Calibri" charset="0"/>
+                      </a:endParaRPr>
+                    </a:p>
+                  </a:txBody>
+                  <a:tcPr marL="91440" marR="91440" marT="45720" marB="45720" anchor="ctr">
+                    <a:lnL w="9525" cap="flat" cmpd="sng" algn="ctr">
+                      <a:solidFill>
+                        <a:srgbClr val="E7E3D9"/>
+                      </a:solidFill>
+                      <a:prstDash val="solid"/>
+                      <a:round/>
+                      <a:headEnd type="none" w="med" len="med"/>
+                      <a:tailEnd type="none" w="med" len="med"/>
+                    </a:lnL>
+                    <a:lnR w="9525" cap="flat" cmpd="sng" algn="ctr">
+                      <a:solidFill>
+                        <a:srgbClr val="E7E3D9"/>
+                      </a:solidFill>
+                      <a:prstDash val="solid"/>
+                      <a:round/>
+                      <a:headEnd type="none" w="med" len="med"/>
+                      <a:tailEnd type="none" w="med" len="med"/>
+                    </a:lnR>
+                    <a:lnT w="9525" cap="flat" cmpd="sng" algn="ctr">
+                      <a:solidFill>
+                        <a:srgbClr val="E7E3D9"/>
+                      </a:solidFill>
+                      <a:prstDash val="solid"/>
+                      <a:round/>
+                      <a:headEnd type="none" w="med" len="med"/>
+                      <a:tailEnd type="none" w="med" len="med"/>
+                    </a:lnT>
+                    <a:lnB w="9525" cap="flat" cmpd="sng" algn="ctr">
+                      <a:solidFill>
+                        <a:srgbClr val="E7E3D9"/>
+                      </a:solidFill>
+                      <a:prstDash val="solid"/>
+                      <a:round/>
+                      <a:headEnd type="none" w="med" len="med"/>
+                      <a:tailEnd type="none" w="med" len="med"/>
+                    </a:lnB>
+                    <a:solidFill>
+                      <a:srgbClr val="FFFFFF"/>
+                    </a:solidFill>
+                  </a:tcPr>
+                </a:tc>
+                <a:tc>
+                  <a:txBody>
+                    <a:bodyPr/>
+                    <a:lstStyle/>
+                    <a:p>
+                      <a:pPr algn="ctr" indent="0" marL="0">
+                        <a:buNone/>
+                      </a:pPr>
+                      <a:r>
+                        <a:rPr lang="en-US" sz="1200" b="1" dirty="0">
+                          <a:solidFill>
+                            <a:srgbClr val="2E7D5B"/>
+                          </a:solidFill>
+                          <a:latin typeface="Calibri" pitchFamily="34" charset="0"/>
+                          <a:ea typeface="Calibri" pitchFamily="34" charset="-122"/>
+                          <a:cs typeface="Calibri" pitchFamily="34" charset="-120"/>
+                        </a:rPr>
+                        <a:t>Under 60 seconds</a:t>
+                      </a:r>
+                      <a:endParaRPr lang="en-US" sz="1200" dirty="0">
+                        <a:latin typeface="Calibri" charset="0"/>
+                        <a:ea typeface="Calibri" charset="0"/>
+                        <a:cs typeface="Calibri" charset="0"/>
+                      </a:endParaRPr>
+                    </a:p>
+                  </a:txBody>
+                  <a:tcPr marL="91440" marR="91440" marT="45720" marB="45720" anchor="ctr">
+                    <a:lnL w="9525" cap="flat" cmpd="sng" algn="ctr">
+                      <a:solidFill>
+                        <a:srgbClr val="E7E3D9"/>
+                      </a:solidFill>
+                      <a:prstDash val="solid"/>
+                      <a:round/>
+                      <a:headEnd type="none" w="med" len="med"/>
+                      <a:tailEnd type="none" w="med" len="med"/>
+                    </a:lnL>
+                    <a:lnR w="9525" cap="flat" cmpd="sng" algn="ctr">
+                      <a:solidFill>
+                        <a:srgbClr val="E7E3D9"/>
+                      </a:solidFill>
+                      <a:prstDash val="solid"/>
+                      <a:round/>
+                      <a:headEnd type="none" w="med" len="med"/>
+                      <a:tailEnd type="none" w="med" len="med"/>
+                    </a:lnR>
+                    <a:lnT w="9525" cap="flat" cmpd="sng" algn="ctr">
+                      <a:solidFill>
+                        <a:srgbClr val="E7E3D9"/>
+                      </a:solidFill>
+                      <a:prstDash val="solid"/>
+                      <a:round/>
+                      <a:headEnd type="none" w="med" len="med"/>
+                      <a:tailEnd type="none" w="med" len="med"/>
+                    </a:lnT>
+                    <a:lnB w="9525" cap="flat" cmpd="sng" algn="ctr">
+                      <a:solidFill>
+                        <a:srgbClr val="E7E3D9"/>
+                      </a:solidFill>
+                      <a:prstDash val="solid"/>
+                      <a:round/>
+                      <a:headEnd type="none" w="med" len="med"/>
+                      <a:tailEnd type="none" w="med" len="med"/>
+                    </a:lnB>
+                    <a:solidFill>
+                      <a:srgbClr val="E6F1EA"/>
+                    </a:solidFill>
+                  </a:tcPr>
+                </a:tc>
+              </a:tr>
+              <a:tr h="548640">
+                <a:tc>
+                  <a:txBody>
+                    <a:bodyPr/>
+                    <a:lstStyle/>
+                    <a:p>
+                      <a:pPr algn="l" indent="0" marL="0">
+                        <a:buNone/>
+                      </a:pPr>
+                      <a:r>
+                        <a:rPr lang="en-US" sz="1200" b="1" dirty="0">
+                          <a:solidFill>
+                            <a:srgbClr val="211F1B"/>
+                          </a:solidFill>
+                          <a:latin typeface="Calibri" pitchFamily="34" charset="0"/>
+                          <a:ea typeface="Calibri" pitchFamily="34" charset="-122"/>
+                          <a:cs typeface="Calibri" pitchFamily="34" charset="-120"/>
+                        </a:rPr>
+                        <a:t>Cost to patient</a:t>
+                      </a:r>
+                      <a:endParaRPr lang="en-US" sz="1200" dirty="0">
+                        <a:latin typeface="Calibri" charset="0"/>
+                        <a:ea typeface="Calibri" charset="0"/>
+                        <a:cs typeface="Calibri" charset="0"/>
+                      </a:endParaRPr>
+                    </a:p>
+                  </a:txBody>
+                  <a:tcPr marL="91440" marR="91440" marT="45720" marB="45720" anchor="ctr">
+                    <a:lnL w="9525" cap="flat" cmpd="sng" algn="ctr">
+                      <a:solidFill>
+                        <a:srgbClr val="E7E3D9"/>
+                      </a:solidFill>
+                      <a:prstDash val="solid"/>
+                      <a:round/>
+                      <a:headEnd type="none" w="med" len="med"/>
+                      <a:tailEnd type="none" w="med" len="med"/>
+                    </a:lnL>
+                    <a:lnR w="9525" cap="flat" cmpd="sng" algn="ctr">
+                      <a:solidFill>
+                        <a:srgbClr val="E7E3D9"/>
+                      </a:solidFill>
+                      <a:prstDash val="solid"/>
+                      <a:round/>
+                      <a:headEnd type="none" w="med" len="med"/>
+                      <a:tailEnd type="none" w="med" len="med"/>
+                    </a:lnR>
+                    <a:lnT w="9525" cap="flat" cmpd="sng" algn="ctr">
+                      <a:solidFill>
+                        <a:srgbClr val="E7E3D9"/>
+                      </a:solidFill>
+                      <a:prstDash val="solid"/>
+                      <a:round/>
+                      <a:headEnd type="none" w="med" len="med"/>
+                      <a:tailEnd type="none" w="med" len="med"/>
+                    </a:lnT>
+                    <a:lnB w="9525" cap="flat" cmpd="sng" algn="ctr">
+                      <a:solidFill>
+                        <a:srgbClr val="E7E3D9"/>
+                      </a:solidFill>
+                      <a:prstDash val="solid"/>
+                      <a:round/>
+                      <a:headEnd type="none" w="med" len="med"/>
+                      <a:tailEnd type="none" w="med" len="med"/>
+                    </a:lnB>
+                    <a:solidFill>
+                      <a:srgbClr val="F6F5EE"/>
+                    </a:solidFill>
+                  </a:tcPr>
+                </a:tc>
+                <a:tc>
+                  <a:txBody>
+                    <a:bodyPr/>
+                    <a:lstStyle/>
+                    <a:p>
+                      <a:pPr algn="ctr" indent="0" marL="0">
+                        <a:buNone/>
+                      </a:pPr>
+                      <a:r>
+                        <a:rPr lang="en-US" sz="1200" dirty="0">
+                          <a:solidFill>
+                            <a:srgbClr val="211F1B"/>
+                          </a:solidFill>
+                          <a:latin typeface="Calibri" pitchFamily="34" charset="0"/>
+                          <a:ea typeface="Calibri" pitchFamily="34" charset="-122"/>
+                          <a:cs typeface="Calibri" pitchFamily="34" charset="-120"/>
+                        </a:rPr>
+                        <a:t>Free / cheap</a:t>
+                      </a:r>
+                      <a:endParaRPr lang="en-US" sz="1200" dirty="0">
+                        <a:latin typeface="Calibri" charset="0"/>
+                        <a:ea typeface="Calibri" charset="0"/>
+                        <a:cs typeface="Calibri" charset="0"/>
+                      </a:endParaRPr>
+                    </a:p>
+                  </a:txBody>
+                  <a:tcPr marL="91440" marR="91440" marT="45720" marB="45720" anchor="ctr">
+                    <a:lnL w="9525" cap="flat" cmpd="sng" algn="ctr">
+                      <a:solidFill>
+                        <a:srgbClr val="E7E3D9"/>
+                      </a:solidFill>
+                      <a:prstDash val="solid"/>
+                      <a:round/>
+                      <a:headEnd type="none" w="med" len="med"/>
+                      <a:tailEnd type="none" w="med" len="med"/>
+                    </a:lnL>
+                    <a:lnR w="9525" cap="flat" cmpd="sng" algn="ctr">
+                      <a:solidFill>
+                        <a:srgbClr val="E7E3D9"/>
+                      </a:solidFill>
+                      <a:prstDash val="solid"/>
+                      <a:round/>
+                      <a:headEnd type="none" w="med" len="med"/>
+                      <a:tailEnd type="none" w="med" len="med"/>
+                    </a:lnR>
+                    <a:lnT w="9525" cap="flat" cmpd="sng" algn="ctr">
+                      <a:solidFill>
+                        <a:srgbClr val="E7E3D9"/>
+                      </a:solidFill>
+                      <a:prstDash val="solid"/>
+                      <a:round/>
+                      <a:headEnd type="none" w="med" len="med"/>
+                      <a:tailEnd type="none" w="med" len="med"/>
+                    </a:lnT>
+                    <a:lnB w="9525" cap="flat" cmpd="sng" algn="ctr">
+                      <a:solidFill>
+                        <a:srgbClr val="E7E3D9"/>
+                      </a:solidFill>
+                      <a:prstDash val="solid"/>
+                      <a:round/>
+                      <a:headEnd type="none" w="med" len="med"/>
+                      <a:tailEnd type="none" w="med" len="med"/>
+                    </a:lnB>
+                    <a:solidFill>
+                      <a:srgbClr val="F6F5EE"/>
+                    </a:solidFill>
+                  </a:tcPr>
+                </a:tc>
+                <a:tc>
+                  <a:txBody>
+                    <a:bodyPr/>
+                    <a:lstStyle/>
+                    <a:p>
+                      <a:pPr algn="ctr" indent="0" marL="0">
+                        <a:buNone/>
+                      </a:pPr>
+                      <a:r>
+                        <a:rPr lang="en-US" sz="1200" dirty="0">
+                          <a:solidFill>
+                            <a:srgbClr val="211F1B"/>
+                          </a:solidFill>
+                          <a:latin typeface="Calibri" pitchFamily="34" charset="0"/>
+                          <a:ea typeface="Calibri" pitchFamily="34" charset="-122"/>
+                          <a:cs typeface="Calibri" pitchFamily="34" charset="-120"/>
+                        </a:rPr>
+                        <a:t>25–35% contingency fee</a:t>
+                      </a:r>
+                      <a:endParaRPr lang="en-US" sz="1200" dirty="0">
+                        <a:latin typeface="Calibri" charset="0"/>
+                        <a:ea typeface="Calibri" charset="0"/>
+                        <a:cs typeface="Calibri" charset="0"/>
+                      </a:endParaRPr>
+                    </a:p>
+                  </a:txBody>
+                  <a:tcPr marL="91440" marR="91440" marT="45720" marB="45720" anchor="ctr">
+                    <a:lnL w="9525" cap="flat" cmpd="sng" algn="ctr">
+                      <a:solidFill>
+                        <a:srgbClr val="E7E3D9"/>
+                      </a:solidFill>
+                      <a:prstDash val="solid"/>
+                      <a:round/>
+                      <a:headEnd type="none" w="med" len="med"/>
+                      <a:tailEnd type="none" w="med" len="med"/>
+                    </a:lnL>
+                    <a:lnR w="9525" cap="flat" cmpd="sng" algn="ctr">
+                      <a:solidFill>
+                        <a:srgbClr val="E7E3D9"/>
+                      </a:solidFill>
+                      <a:prstDash val="solid"/>
+                      <a:round/>
+                      <a:headEnd type="none" w="med" len="med"/>
+                      <a:tailEnd type="none" w="med" len="med"/>
+                    </a:lnR>
+                    <a:lnT w="9525" cap="flat" cmpd="sng" algn="ctr">
+                      <a:solidFill>
+                        <a:srgbClr val="E7E3D9"/>
+                      </a:solidFill>
+                      <a:prstDash val="solid"/>
+                      <a:round/>
+                      <a:headEnd type="none" w="med" len="med"/>
+                      <a:tailEnd type="none" w="med" len="med"/>
+                    </a:lnT>
+                    <a:lnB w="9525" cap="flat" cmpd="sng" algn="ctr">
+                      <a:solidFill>
+                        <a:srgbClr val="E7E3D9"/>
+                      </a:solidFill>
+                      <a:prstDash val="solid"/>
+                      <a:round/>
+                      <a:headEnd type="none" w="med" len="med"/>
+                      <a:tailEnd type="none" w="med" len="med"/>
+                    </a:lnB>
+                    <a:solidFill>
+                      <a:srgbClr val="F6F5EE"/>
+                    </a:solidFill>
+                  </a:tcPr>
+                </a:tc>
+                <a:tc>
+                  <a:txBody>
+                    <a:bodyPr/>
+                    <a:lstStyle/>
+                    <a:p>
+                      <a:pPr algn="ctr" indent="0" marL="0">
+                        <a:buNone/>
+                      </a:pPr>
+                      <a:r>
+                        <a:rPr lang="en-US" sz="1200" b="1" dirty="0">
+                          <a:solidFill>
+                            <a:srgbClr val="2E7D5B"/>
+                          </a:solidFill>
+                          <a:latin typeface="Calibri" pitchFamily="34" charset="0"/>
+                          <a:ea typeface="Calibri" pitchFamily="34" charset="-122"/>
+                          <a:cs typeface="Calibri" pitchFamily="34" charset="-120"/>
+                        </a:rPr>
+                        <a:t>Free to start</a:t>
+                      </a:r>
+                      <a:endParaRPr lang="en-US" sz="1200" dirty="0">
+                        <a:latin typeface="Calibri" charset="0"/>
+                        <a:ea typeface="Calibri" charset="0"/>
+                        <a:cs typeface="Calibri" charset="0"/>
+                      </a:endParaRPr>
+                    </a:p>
+                  </a:txBody>
+                  <a:tcPr marL="91440" marR="91440" marT="45720" marB="45720" anchor="ctr">
+                    <a:lnL w="9525" cap="flat" cmpd="sng" algn="ctr">
+                      <a:solidFill>
+                        <a:srgbClr val="E7E3D9"/>
+                      </a:solidFill>
+                      <a:prstDash val="solid"/>
+                      <a:round/>
+                      <a:headEnd type="none" w="med" len="med"/>
+                      <a:tailEnd type="none" w="med" len="med"/>
+                    </a:lnL>
+                    <a:lnR w="9525" cap="flat" cmpd="sng" algn="ctr">
+                      <a:solidFill>
+                        <a:srgbClr val="E7E3D9"/>
+                      </a:solidFill>
+                      <a:prstDash val="solid"/>
+                      <a:round/>
+                      <a:headEnd type="none" w="med" len="med"/>
+                      <a:tailEnd type="none" w="med" len="med"/>
+                    </a:lnR>
+                    <a:lnT w="9525" cap="flat" cmpd="sng" algn="ctr">
+                      <a:solidFill>
+                        <a:srgbClr val="E7E3D9"/>
+                      </a:solidFill>
+                      <a:prstDash val="solid"/>
+                      <a:round/>
+                      <a:headEnd type="none" w="med" len="med"/>
+                      <a:tailEnd type="none" w="med" len="med"/>
+                    </a:lnT>
+                    <a:lnB w="9525" cap="flat" cmpd="sng" algn="ctr">
+                      <a:solidFill>
+                        <a:srgbClr val="E7E3D9"/>
+                      </a:solidFill>
+                      <a:prstDash val="solid"/>
+                      <a:round/>
+                      <a:headEnd type="none" w="med" len="med"/>
+                      <a:tailEnd type="none" w="med" len="med"/>
+                    </a:lnB>
+                    <a:solidFill>
+                      <a:srgbClr val="E6F1EA"/>
+                    </a:solidFill>
+                  </a:tcPr>
+                </a:tc>
+              </a:tr>
+              <a:tr h="548640">
+                <a:tc>
+                  <a:txBody>
+                    <a:bodyPr/>
+                    <a:lstStyle/>
+                    <a:p>
+                      <a:pPr algn="l" indent="0" marL="0">
+                        <a:buNone/>
+                      </a:pPr>
+                      <a:r>
+                        <a:rPr lang="en-US" sz="1200" b="1" dirty="0">
+                          <a:solidFill>
+                            <a:srgbClr val="211F1B"/>
+                          </a:solidFill>
+                          <a:latin typeface="Calibri" pitchFamily="34" charset="0"/>
+                          <a:ea typeface="Calibri" pitchFamily="34" charset="-122"/>
+                          <a:cs typeface="Calibri" pitchFamily="34" charset="-120"/>
+                        </a:rPr>
+                        <a:t>Follows through to refund</a:t>
+                      </a:r>
+                      <a:endParaRPr lang="en-US" sz="1200" dirty="0">
+                        <a:latin typeface="Calibri" charset="0"/>
+                        <a:ea typeface="Calibri" charset="0"/>
+                        <a:cs typeface="Calibri" charset="0"/>
+                      </a:endParaRPr>
+                    </a:p>
+                  </a:txBody>
+                  <a:tcPr marL="91440" marR="91440" marT="45720" marB="45720" anchor="ctr">
+                    <a:lnL w="9525" cap="flat" cmpd="sng" algn="ctr">
+                      <a:solidFill>
+                        <a:srgbClr val="E7E3D9"/>
+                      </a:solidFill>
+                      <a:prstDash val="solid"/>
+                      <a:round/>
+                      <a:headEnd type="none" w="med" len="med"/>
+                      <a:tailEnd type="none" w="med" len="med"/>
+                    </a:lnL>
+                    <a:lnR w="9525" cap="flat" cmpd="sng" algn="ctr">
+                      <a:solidFill>
+                        <a:srgbClr val="E7E3D9"/>
+                      </a:solidFill>
+                      <a:prstDash val="solid"/>
+                      <a:round/>
+                      <a:headEnd type="none" w="med" len="med"/>
+                      <a:tailEnd type="none" w="med" len="med"/>
+                    </a:lnR>
+                    <a:lnT w="9525" cap="flat" cmpd="sng" algn="ctr">
+                      <a:solidFill>
+                        <a:srgbClr val="E7E3D9"/>
+                      </a:solidFill>
+                      <a:prstDash val="solid"/>
+                      <a:round/>
+                      <a:headEnd type="none" w="med" len="med"/>
+                      <a:tailEnd type="none" w="med" len="med"/>
+                    </a:lnT>
+                    <a:lnB w="9525" cap="flat" cmpd="sng" algn="ctr">
+                      <a:solidFill>
+                        <a:srgbClr val="E7E3D9"/>
+                      </a:solidFill>
+                      <a:prstDash val="solid"/>
+                      <a:round/>
+                      <a:headEnd type="none" w="med" len="med"/>
+                      <a:tailEnd type="none" w="med" len="med"/>
+                    </a:lnB>
+                    <a:solidFill>
+                      <a:srgbClr val="FFFFFF"/>
+                    </a:solidFill>
+                  </a:tcPr>
+                </a:tc>
+                <a:tc>
+                  <a:txBody>
+                    <a:bodyPr/>
+                    <a:lstStyle/>
+                    <a:p>
+                      <a:pPr algn="ctr" indent="0" marL="0">
+                        <a:buNone/>
+                      </a:pPr>
+                      <a:r>
+                        <a:rPr lang="en-US" sz="1200" dirty="0">
+                          <a:solidFill>
+                            <a:srgbClr val="211F1B"/>
+                          </a:solidFill>
+                          <a:latin typeface="Calibri" pitchFamily="34" charset="0"/>
+                          <a:ea typeface="Calibri" pitchFamily="34" charset="-122"/>
+                          <a:cs typeface="Calibri" pitchFamily="34" charset="-120"/>
+                        </a:rPr>
+                        <a:t>No</a:t>
+                      </a:r>
+                      <a:endParaRPr lang="en-US" sz="1200" dirty="0">
+                        <a:latin typeface="Calibri" charset="0"/>
+                        <a:ea typeface="Calibri" charset="0"/>
+                        <a:cs typeface="Calibri" charset="0"/>
+                      </a:endParaRPr>
+                    </a:p>
+                  </a:txBody>
+                  <a:tcPr marL="91440" marR="91440" marT="45720" marB="45720" anchor="ctr">
+                    <a:lnL w="9525" cap="flat" cmpd="sng" algn="ctr">
+                      <a:solidFill>
+                        <a:srgbClr val="E7E3D9"/>
+                      </a:solidFill>
+                      <a:prstDash val="solid"/>
+                      <a:round/>
+                      <a:headEnd type="none" w="med" len="med"/>
+                      <a:tailEnd type="none" w="med" len="med"/>
+                    </a:lnL>
+                    <a:lnR w="9525" cap="flat" cmpd="sng" algn="ctr">
+                      <a:solidFill>
+                        <a:srgbClr val="E7E3D9"/>
+                      </a:solidFill>
+                      <a:prstDash val="solid"/>
+                      <a:round/>
+                      <a:headEnd type="none" w="med" len="med"/>
+                      <a:tailEnd type="none" w="med" len="med"/>
+                    </a:lnR>
+                    <a:lnT w="9525" cap="flat" cmpd="sng" algn="ctr">
+                      <a:solidFill>
+                        <a:srgbClr val="E7E3D9"/>
+                      </a:solidFill>
+                      <a:prstDash val="solid"/>
+                      <a:round/>
+                      <a:headEnd type="none" w="med" len="med"/>
+                      <a:tailEnd type="none" w="med" len="med"/>
+                    </a:lnT>
+                    <a:lnB w="9525" cap="flat" cmpd="sng" algn="ctr">
+                      <a:solidFill>
+                        <a:srgbClr val="E7E3D9"/>
+                      </a:solidFill>
+                      <a:prstDash val="solid"/>
+                      <a:round/>
+                      <a:headEnd type="none" w="med" len="med"/>
+                      <a:tailEnd type="none" w="med" len="med"/>
+                    </a:lnB>
+                    <a:solidFill>
+                      <a:srgbClr val="FFFFFF"/>
+                    </a:solidFill>
+                  </a:tcPr>
+                </a:tc>
+                <a:tc>
+                  <a:txBody>
+                    <a:bodyPr/>
+                    <a:lstStyle/>
+                    <a:p>
+                      <a:pPr algn="ctr" indent="0" marL="0">
+                        <a:buNone/>
+                      </a:pPr>
+                      <a:r>
+                        <a:rPr lang="en-US" sz="1200" dirty="0">
+                          <a:solidFill>
+                            <a:srgbClr val="211F1B"/>
+                          </a:solidFill>
+                          <a:latin typeface="Calibri" pitchFamily="34" charset="0"/>
+                          <a:ea typeface="Calibri" pitchFamily="34" charset="-122"/>
+                          <a:cs typeface="Calibri" pitchFamily="34" charset="-120"/>
+                        </a:rPr>
+                        <a:t>Yes</a:t>
+                      </a:r>
+                      <a:endParaRPr lang="en-US" sz="1200" dirty="0">
+                        <a:latin typeface="Calibri" charset="0"/>
+                        <a:ea typeface="Calibri" charset="0"/>
+                        <a:cs typeface="Calibri" charset="0"/>
+                      </a:endParaRPr>
+                    </a:p>
+                  </a:txBody>
+                  <a:tcPr marL="91440" marR="91440" marT="45720" marB="45720" anchor="ctr">
+                    <a:lnL w="9525" cap="flat" cmpd="sng" algn="ctr">
+                      <a:solidFill>
+                        <a:srgbClr val="E7E3D9"/>
+                      </a:solidFill>
+                      <a:prstDash val="solid"/>
+                      <a:round/>
+                      <a:headEnd type="none" w="med" len="med"/>
+                      <a:tailEnd type="none" w="med" len="med"/>
+                    </a:lnL>
+                    <a:lnR w="9525" cap="flat" cmpd="sng" algn="ctr">
+                      <a:solidFill>
+                        <a:srgbClr val="E7E3D9"/>
+                      </a:solidFill>
+                      <a:prstDash val="solid"/>
+                      <a:round/>
+                      <a:headEnd type="none" w="med" len="med"/>
+                      <a:tailEnd type="none" w="med" len="med"/>
+                    </a:lnR>
+                    <a:lnT w="9525" cap="flat" cmpd="sng" algn="ctr">
+                      <a:solidFill>
+                        <a:srgbClr val="E7E3D9"/>
+                      </a:solidFill>
+                      <a:prstDash val="solid"/>
+                      <a:round/>
+                      <a:headEnd type="none" w="med" len="med"/>
+                      <a:tailEnd type="none" w="med" len="med"/>
+                    </a:lnT>
+                    <a:lnB w="9525" cap="flat" cmpd="sng" algn="ctr">
+                      <a:solidFill>
+                        <a:srgbClr val="E7E3D9"/>
+                      </a:solidFill>
+                      <a:prstDash val="solid"/>
+                      <a:round/>
+                      <a:headEnd type="none" w="med" len="med"/>
+                      <a:tailEnd type="none" w="med" len="med"/>
+                    </a:lnB>
+                    <a:solidFill>
+                      <a:srgbClr val="FFFFFF"/>
+                    </a:solidFill>
+                  </a:tcPr>
+                </a:tc>
+                <a:tc>
+                  <a:txBody>
+                    <a:bodyPr/>
+                    <a:lstStyle/>
+                    <a:p>
+                      <a:pPr algn="ctr" indent="0" marL="0">
+                        <a:buNone/>
+                      </a:pPr>
+                      <a:r>
+                        <a:rPr lang="en-US" sz="1200" b="1" dirty="0">
+                          <a:solidFill>
+                            <a:srgbClr val="2E7D5B"/>
+                          </a:solidFill>
+                          <a:latin typeface="Calibri" pitchFamily="34" charset="0"/>
+                          <a:ea typeface="Calibri" pitchFamily="34" charset="-122"/>
+                          <a:cs typeface="Calibri" pitchFamily="34" charset="-120"/>
+                        </a:rPr>
+                        <a:t>Yes — on the roadmap</a:t>
+                      </a:r>
+                      <a:endParaRPr lang="en-US" sz="1200" dirty="0">
+                        <a:latin typeface="Calibri" charset="0"/>
+                        <a:ea typeface="Calibri" charset="0"/>
+                        <a:cs typeface="Calibri" charset="0"/>
+                      </a:endParaRPr>
+                    </a:p>
+                  </a:txBody>
+                  <a:tcPr marL="91440" marR="91440" marT="45720" marB="45720" anchor="ctr">
+                    <a:lnL w="9525" cap="flat" cmpd="sng" algn="ctr">
+                      <a:solidFill>
+                        <a:srgbClr val="E7E3D9"/>
+                      </a:solidFill>
+                      <a:prstDash val="solid"/>
+                      <a:round/>
+                      <a:headEnd type="none" w="med" len="med"/>
+                      <a:tailEnd type="none" w="med" len="med"/>
+                    </a:lnL>
+                    <a:lnR w="9525" cap="flat" cmpd="sng" algn="ctr">
+                      <a:solidFill>
+                        <a:srgbClr val="E7E3D9"/>
+                      </a:solidFill>
+                      <a:prstDash val="solid"/>
+                      <a:round/>
+                      <a:headEnd type="none" w="med" len="med"/>
+                      <a:tailEnd type="none" w="med" len="med"/>
+                    </a:lnR>
+                    <a:lnT w="9525" cap="flat" cmpd="sng" algn="ctr">
+                      <a:solidFill>
+                        <a:srgbClr val="E7E3D9"/>
+                      </a:solidFill>
+                      <a:prstDash val="solid"/>
+                      <a:round/>
+                      <a:headEnd type="none" w="med" len="med"/>
+                      <a:tailEnd type="none" w="med" len="med"/>
+                    </a:lnT>
+                    <a:lnB w="9525" cap="flat" cmpd="sng" algn="ctr">
+                      <a:solidFill>
+                        <a:srgbClr val="E7E3D9"/>
+                      </a:solidFill>
+                      <a:prstDash val="solid"/>
+                      <a:round/>
+                      <a:headEnd type="none" w="med" len="med"/>
+                      <a:tailEnd type="none" w="med" len="med"/>
+                    </a:lnB>
+                    <a:solidFill>
+                      <a:srgbClr val="E6F1EA"/>
+                    </a:solidFill>
+                  </a:tcPr>
+                </a:tc>
+              </a:tr>
+            </a:tbl>
+          </a:graphicData>
+        </a:graphic>
+      </p:graphicFrame>
+      <p:sp>
+        <p:nvSpPr>
+          <p:cNvPr id="5" name="Text 2"/>
+          <p:cNvSpPr/>
+          <p:nvPr/>
+        </p:nvSpPr>
+        <p:spPr>
+          <a:xfrm>
+            <a:off x="548640" y="5074920"/>
+            <a:ext cx="10698480" cy="822960"/>
           </a:xfrm>
           <a:prstGeom prst="rect">
             <a:avLst/>
@@ -6396,411 +7589,54 @@
               <a:buNone/>
             </a:pPr>
             <a:r>
-              <a:rPr lang="en-US" sz="1350" dirty="0">
-                <a:solidFill>
-                  <a:srgbClr val="CFE3D8"/>
+              <a:rPr lang="en-US" sz="1400" i="1" dirty="0">
+                <a:solidFill>
+                  <a:srgbClr val="68655A"/>
                 </a:solidFill>
                 <a:latin typeface="Calibri" pitchFamily="34" charset="0"/>
                 <a:ea typeface="Calibri" pitchFamily="34" charset="-122"/>
                 <a:cs typeface="Calibri" pitchFamily="34" charset="-120"/>
               </a:rPr>
-              <a:t>The same content shape as viral tax-refund-reveal and settlement-check posts — we built a shareable result card for exactly this moment.</a:t>
-            </a:r>
-            <a:endParaRPr lang="en-US" sz="1350" dirty="0"/>
-          </a:p>
-        </p:txBody>
-      </p:sp>
-      <p:sp>
-        <p:nvSpPr>
-          <p:cNvPr id="7" name="Text 5"/>
-          <p:cNvSpPr/>
-          <p:nvPr/>
-        </p:nvSpPr>
-        <p:spPr>
-          <a:xfrm>
-            <a:off x="822960" y="4937760"/>
-            <a:ext cx="4572000" cy="822960"/>
-          </a:xfrm>
-          <a:prstGeom prst="rect">
-            <a:avLst/>
-          </a:prstGeom>
-          <a:noFill/>
-          <a:ln/>
-        </p:spPr>
-        <p:txBody>
-          <a:bodyPr wrap="square" lIns="0" tIns="0" rIns="0" bIns="0" rtlCol="0" anchor="ctr"/>
-          <a:lstStyle/>
-          <a:p>
-            <a:pPr indent="0" marL="0">
-              <a:lnSpc>
-                <a:spcPct val="125000"/>
-              </a:lnSpc>
-              <a:buNone/>
-            </a:pPr>
-            <a:r>
-              <a:rPr lang="en-US" sz="1200" i="1" dirty="0">
-                <a:solidFill>
-                  <a:srgbClr val="8FB6A3"/>
+              <a:t>Every flag is grounded in deterministic logic or the insurer's own official denial code — never a model's guess. And we're building the full loop, from detection to a confirmed refund, not a one-time scan.</a:t>
+            </a:r>
+            <a:endParaRPr lang="en-US" sz="1400" dirty="0"/>
+          </a:p>
+        </p:txBody>
+      </p:sp>
+      <p:sp>
+        <p:nvSpPr>
+          <p:cNvPr id="6" name="Text 3"/>
+          <p:cNvSpPr/>
+          <p:nvPr/>
+        </p:nvSpPr>
+        <p:spPr>
+          <a:xfrm>
+            <a:off x="11338560" y="6446520"/>
+            <a:ext cx="640080" cy="274320"/>
+          </a:xfrm>
+          <a:prstGeom prst="rect">
+            <a:avLst/>
+          </a:prstGeom>
+          <a:noFill/>
+          <a:ln/>
+        </p:spPr>
+        <p:txBody>
+          <a:bodyPr wrap="square" rtlCol="0" anchor="ctr"/>
+          <a:lstStyle/>
+          <a:p>
+            <a:pPr algn="r" indent="0" marL="0">
+              <a:buNone/>
+            </a:pPr>
+            <a:r>
+              <a:rPr lang="en-US" sz="1000" dirty="0">
+                <a:solidFill>
+                  <a:srgbClr val="68655A"/>
                 </a:solidFill>
                 <a:latin typeface="Calibri" pitchFamily="34" charset="0"/>
                 <a:ea typeface="Calibri" pitchFamily="34" charset="-122"/>
                 <a:cs typeface="Calibri" pitchFamily="34" charset="-120"/>
               </a:rPr>
-              <a:t>The hook travels on its own: “49–80% of medical bills contain an error” — alarming, true, citation-backed.</a:t>
-            </a:r>
-            <a:endParaRPr lang="en-US" sz="1200" dirty="0"/>
-          </a:p>
-        </p:txBody>
-      </p:sp>
-      <p:sp>
-        <p:nvSpPr>
-          <p:cNvPr id="8" name="Text 6"/>
-          <p:cNvSpPr/>
-          <p:nvPr/>
-        </p:nvSpPr>
-        <p:spPr>
-          <a:xfrm>
-            <a:off x="5989320" y="2011680"/>
-            <a:ext cx="5486400" cy="365760"/>
-          </a:xfrm>
-          <a:prstGeom prst="rect">
-            <a:avLst/>
-          </a:prstGeom>
-          <a:noFill/>
-          <a:ln/>
-        </p:spPr>
-        <p:txBody>
-          <a:bodyPr wrap="square" lIns="0" tIns="0" rIns="0" bIns="0" rtlCol="0" anchor="ctr"/>
-          <a:lstStyle/>
-          <a:p>
-            <a:pPr indent="0" marL="0">
-              <a:buNone/>
-            </a:pPr>
-            <a:r>
-              <a:rPr lang="en-US" sz="1500" b="1" dirty="0">
-                <a:solidFill>
-                  <a:srgbClr val="211F1B"/>
-                </a:solidFill>
-                <a:latin typeface="Calibri" pitchFamily="34" charset="0"/>
-                <a:ea typeface="Calibri" pitchFamily="34" charset="-122"/>
-                <a:cs typeface="Calibri" pitchFamily="34" charset="-120"/>
-              </a:rPr>
-              <a:t>Distribution channels already mapped</a:t>
-            </a:r>
-            <a:endParaRPr lang="en-US" sz="1500" dirty="0"/>
-          </a:p>
-        </p:txBody>
-      </p:sp>
-      <p:sp>
-        <p:nvSpPr>
-          <p:cNvPr id="9" name="Shape 7"/>
-          <p:cNvSpPr/>
-          <p:nvPr/>
-        </p:nvSpPr>
-        <p:spPr>
-          <a:xfrm>
-            <a:off x="5989320" y="2514600"/>
-            <a:ext cx="5120640" cy="640080"/>
-          </a:xfrm>
-          <a:prstGeom prst="roundRect">
-            <a:avLst>
-              <a:gd name="adj" fmla="val 14286"/>
-            </a:avLst>
-          </a:prstGeom>
-          <a:solidFill>
-            <a:srgbClr val="FFFFFF"/>
-          </a:solidFill>
-          <a:ln w="12700">
-            <a:solidFill>
-              <a:srgbClr val="E7E3D9"/>
-            </a:solidFill>
-            <a:prstDash val="solid"/>
-          </a:ln>
-        </p:spPr>
-      </p:sp>
-      <p:sp>
-        <p:nvSpPr>
-          <p:cNvPr id="10" name="Text 8"/>
-          <p:cNvSpPr/>
-          <p:nvPr/>
-        </p:nvSpPr>
-        <p:spPr>
-          <a:xfrm>
-            <a:off x="6217920" y="2514600"/>
-            <a:ext cx="4663440" cy="640080"/>
-          </a:xfrm>
-          <a:prstGeom prst="rect">
-            <a:avLst/>
-          </a:prstGeom>
-          <a:noFill/>
-          <a:ln/>
-        </p:spPr>
-        <p:txBody>
-          <a:bodyPr wrap="square" lIns="0" tIns="0" rIns="0" bIns="0" rtlCol="0" anchor="ctr"/>
-          <a:lstStyle/>
-          <a:p>
-            <a:pPr indent="0" marL="0">
-              <a:lnSpc>
-                <a:spcPct val="120000"/>
-              </a:lnSpc>
-              <a:buNone/>
-            </a:pPr>
-            <a:r>
-              <a:rPr lang="en-US" sz="1250" dirty="0">
-                <a:solidFill>
-                  <a:srgbClr val="211F1B"/>
-                </a:solidFill>
-                <a:latin typeface="Calibri" pitchFamily="34" charset="0"/>
-                <a:ea typeface="Calibri" pitchFamily="34" charset="-122"/>
-                <a:cs typeface="Calibri" pitchFamily="34" charset="-120"/>
-              </a:rPr>
-              <a:t>r/personalfinance, r/HealthInsurance</a:t>
-            </a:r>
-            <a:endParaRPr lang="en-US" sz="1250" dirty="0"/>
-          </a:p>
-        </p:txBody>
-      </p:sp>
-      <p:sp>
-        <p:nvSpPr>
-          <p:cNvPr id="11" name="Shape 9"/>
-          <p:cNvSpPr/>
-          <p:nvPr/>
-        </p:nvSpPr>
-        <p:spPr>
-          <a:xfrm>
-            <a:off x="5989320" y="3291840"/>
-            <a:ext cx="5120640" cy="640080"/>
-          </a:xfrm>
-          <a:prstGeom prst="roundRect">
-            <a:avLst>
-              <a:gd name="adj" fmla="val 14286"/>
-            </a:avLst>
-          </a:prstGeom>
-          <a:solidFill>
-            <a:srgbClr val="FFFFFF"/>
-          </a:solidFill>
-          <a:ln w="12700">
-            <a:solidFill>
-              <a:srgbClr val="E7E3D9"/>
-            </a:solidFill>
-            <a:prstDash val="solid"/>
-          </a:ln>
-        </p:spPr>
-      </p:sp>
-      <p:sp>
-        <p:nvSpPr>
-          <p:cNvPr id="12" name="Text 10"/>
-          <p:cNvSpPr/>
-          <p:nvPr/>
-        </p:nvSpPr>
-        <p:spPr>
-          <a:xfrm>
-            <a:off x="6217920" y="3291840"/>
-            <a:ext cx="4663440" cy="640080"/>
-          </a:xfrm>
-          <a:prstGeom prst="rect">
-            <a:avLst/>
-          </a:prstGeom>
-          <a:noFill/>
-          <a:ln/>
-        </p:spPr>
-        <p:txBody>
-          <a:bodyPr wrap="square" lIns="0" tIns="0" rIns="0" bIns="0" rtlCol="0" anchor="ctr"/>
-          <a:lstStyle/>
-          <a:p>
-            <a:pPr indent="0" marL="0">
-              <a:lnSpc>
-                <a:spcPct val="120000"/>
-              </a:lnSpc>
-              <a:buNone/>
-            </a:pPr>
-            <a:r>
-              <a:rPr lang="en-US" sz="1250" dirty="0">
-                <a:solidFill>
-                  <a:srgbClr val="211F1B"/>
-                </a:solidFill>
-                <a:latin typeface="Calibri" pitchFamily="34" charset="0"/>
-                <a:ea typeface="Calibri" pitchFamily="34" charset="-122"/>
-                <a:cs typeface="Calibri" pitchFamily="34" charset="-120"/>
-              </a:rPr>
-              <a:t>Patient-advocacy Facebook groups</a:t>
-            </a:r>
-            <a:endParaRPr lang="en-US" sz="1250" dirty="0"/>
-          </a:p>
-        </p:txBody>
-      </p:sp>
-      <p:sp>
-        <p:nvSpPr>
-          <p:cNvPr id="13" name="Shape 11"/>
-          <p:cNvSpPr/>
-          <p:nvPr/>
-        </p:nvSpPr>
-        <p:spPr>
-          <a:xfrm>
-            <a:off x="5989320" y="4069080"/>
-            <a:ext cx="5120640" cy="640080"/>
-          </a:xfrm>
-          <a:prstGeom prst="roundRect">
-            <a:avLst>
-              <a:gd name="adj" fmla="val 14286"/>
-            </a:avLst>
-          </a:prstGeom>
-          <a:solidFill>
-            <a:srgbClr val="FFFFFF"/>
-          </a:solidFill>
-          <a:ln w="12700">
-            <a:solidFill>
-              <a:srgbClr val="E7E3D9"/>
-            </a:solidFill>
-            <a:prstDash val="solid"/>
-          </a:ln>
-        </p:spPr>
-      </p:sp>
-      <p:sp>
-        <p:nvSpPr>
-          <p:cNvPr id="14" name="Text 12"/>
-          <p:cNvSpPr/>
-          <p:nvPr/>
-        </p:nvSpPr>
-        <p:spPr>
-          <a:xfrm>
-            <a:off x="6217920" y="4069080"/>
-            <a:ext cx="4663440" cy="640080"/>
-          </a:xfrm>
-          <a:prstGeom prst="rect">
-            <a:avLst/>
-          </a:prstGeom>
-          <a:noFill/>
-          <a:ln/>
-        </p:spPr>
-        <p:txBody>
-          <a:bodyPr wrap="square" lIns="0" tIns="0" rIns="0" bIns="0" rtlCol="0" anchor="ctr"/>
-          <a:lstStyle/>
-          <a:p>
-            <a:pPr indent="0" marL="0">
-              <a:lnSpc>
-                <a:spcPct val="120000"/>
-              </a:lnSpc>
-              <a:buNone/>
-            </a:pPr>
-            <a:r>
-              <a:rPr lang="en-US" sz="1250" dirty="0">
-                <a:solidFill>
-                  <a:srgbClr val="211F1B"/>
-                </a:solidFill>
-                <a:latin typeface="Calibri" pitchFamily="34" charset="0"/>
-                <a:ea typeface="Calibri" pitchFamily="34" charset="-122"/>
-                <a:cs typeface="Calibri" pitchFamily="34" charset="-120"/>
-              </a:rPr>
-              <a:t>Personal-finance creators already covering medical debt</a:t>
-            </a:r>
-            <a:endParaRPr lang="en-US" sz="1250" dirty="0"/>
-          </a:p>
-        </p:txBody>
-      </p:sp>
-      <p:sp>
-        <p:nvSpPr>
-          <p:cNvPr id="15" name="Shape 13"/>
-          <p:cNvSpPr/>
-          <p:nvPr/>
-        </p:nvSpPr>
-        <p:spPr>
-          <a:xfrm>
-            <a:off x="5989320" y="4846320"/>
-            <a:ext cx="5120640" cy="640080"/>
-          </a:xfrm>
-          <a:prstGeom prst="roundRect">
-            <a:avLst>
-              <a:gd name="adj" fmla="val 14286"/>
-            </a:avLst>
-          </a:prstGeom>
-          <a:solidFill>
-            <a:srgbClr val="FFFFFF"/>
-          </a:solidFill>
-          <a:ln w="12700">
-            <a:solidFill>
-              <a:srgbClr val="E7E3D9"/>
-            </a:solidFill>
-            <a:prstDash val="solid"/>
-          </a:ln>
-        </p:spPr>
-      </p:sp>
-      <p:sp>
-        <p:nvSpPr>
-          <p:cNvPr id="16" name="Text 14"/>
-          <p:cNvSpPr/>
-          <p:nvPr/>
-        </p:nvSpPr>
-        <p:spPr>
-          <a:xfrm>
-            <a:off x="6217920" y="4846320"/>
-            <a:ext cx="4663440" cy="640080"/>
-          </a:xfrm>
-          <a:prstGeom prst="rect">
-            <a:avLst/>
-          </a:prstGeom>
-          <a:noFill/>
-          <a:ln/>
-        </p:spPr>
-        <p:txBody>
-          <a:bodyPr wrap="square" lIns="0" tIns="0" rIns="0" bIns="0" rtlCol="0" anchor="ctr"/>
-          <a:lstStyle/>
-          <a:p>
-            <a:pPr indent="0" marL="0">
-              <a:lnSpc>
-                <a:spcPct val="120000"/>
-              </a:lnSpc>
-              <a:buNone/>
-            </a:pPr>
-            <a:r>
-              <a:rPr lang="en-US" sz="1250" dirty="0">
-                <a:solidFill>
-                  <a:srgbClr val="211F1B"/>
-                </a:solidFill>
-                <a:latin typeface="Calibri" pitchFamily="34" charset="0"/>
-                <a:ea typeface="Calibri" pitchFamily="34" charset="-122"/>
-                <a:cs typeface="Calibri" pitchFamily="34" charset="-120"/>
-              </a:rPr>
-              <a:t>Employer benefits partnerships — one push reaches thousands of employees at once</a:t>
-            </a:r>
-            <a:endParaRPr lang="en-US" sz="1250" dirty="0"/>
-          </a:p>
-        </p:txBody>
-      </p:sp>
-      <p:sp>
-        <p:nvSpPr>
-          <p:cNvPr id="17" name="Text 15"/>
-          <p:cNvSpPr/>
-          <p:nvPr/>
-        </p:nvSpPr>
-        <p:spPr>
-          <a:xfrm>
-            <a:off x="11338560" y="6446520"/>
-            <a:ext cx="640080" cy="274320"/>
-          </a:xfrm>
-          <a:prstGeom prst="rect">
-            <a:avLst/>
-          </a:prstGeom>
-          <a:noFill/>
-          <a:ln/>
-        </p:spPr>
-        <p:txBody>
-          <a:bodyPr wrap="square" rtlCol="0" anchor="ctr"/>
-          <a:lstStyle/>
-          <a:p>
-            <a:pPr algn="r" indent="0" marL="0">
-              <a:buNone/>
-            </a:pPr>
-            <a:r>
-              <a:rPr lang="en-US" sz="1000" dirty="0">
-                <a:solidFill>
-                  <a:srgbClr val="68655A"/>
-                </a:solidFill>
-                <a:latin typeface="Calibri" pitchFamily="34" charset="0"/>
-                <a:ea typeface="Calibri" pitchFamily="34" charset="-122"/>
-                <a:cs typeface="Calibri" pitchFamily="34" charset="-120"/>
-              </a:rPr>
-              <a:t>7 / 8</a:t>
+              <a:t>7 / 9</a:t>
             </a:r>
             <a:endParaRPr lang="en-US" sz="1000" dirty="0"/>
           </a:p>
@@ -6817,6 +7653,863 @@
 <file path=ppt/slides/slide8.xml><?xml version="1.0" encoding="utf-8"?>
 <p:sld xmlns:a="http://schemas.openxmlformats.org/drawingml/2006/main" xmlns:r="http://schemas.openxmlformats.org/officeDocument/2006/relationships" xmlns:p="http://schemas.openxmlformats.org/presentationml/2006/main">
   <p:cSld name="Slide 8">
+    <p:bg>
+      <p:bgPr>
+        <a:solidFill>
+          <a:srgbClr val="FCFBF9"/>
+        </a:solidFill>
+      </p:bgPr>
+    </p:bg>
+    <p:spTree>
+      <p:nvGrpSpPr>
+        <p:cNvPr id="1" name=""/>
+        <p:cNvGrpSpPr/>
+        <p:nvPr/>
+      </p:nvGrpSpPr>
+      <p:grpSpPr>
+        <a:xfrm>
+          <a:off x="0" y="0"/>
+          <a:ext cx="0" cy="0"/>
+          <a:chOff x="0" y="0"/>
+          <a:chExt cx="0" cy="0"/>
+        </a:xfrm>
+      </p:grpSpPr>
+      <p:sp>
+        <p:nvSpPr>
+          <p:cNvPr id="2" name="Text 0"/>
+          <p:cNvSpPr/>
+          <p:nvPr/>
+        </p:nvSpPr>
+        <p:spPr>
+          <a:xfrm>
+            <a:off x="548640" y="411480"/>
+            <a:ext cx="7315200" cy="365760"/>
+          </a:xfrm>
+          <a:prstGeom prst="rect">
+            <a:avLst/>
+          </a:prstGeom>
+          <a:noFill/>
+          <a:ln/>
+        </p:spPr>
+        <p:txBody>
+          <a:bodyPr wrap="square" rtlCol="0" anchor="ctr"/>
+          <a:lstStyle/>
+          <a:p>
+            <a:pPr indent="0" marL="0">
+              <a:buNone/>
+            </a:pPr>
+            <a:r>
+              <a:rPr lang="en-US" sz="1300" b="1" spc="200" kern="0" dirty="0">
+                <a:solidFill>
+                  <a:srgbClr val="2E7D5B"/>
+                </a:solidFill>
+                <a:latin typeface="Calibri" pitchFamily="34" charset="0"/>
+                <a:ea typeface="Calibri" pitchFamily="34" charset="-122"/>
+                <a:cs typeface="Calibri" pitchFamily="34" charset="-120"/>
+              </a:rPr>
+              <a:t>MARKET POTENTIAL &amp; GO-TO-MARKET</a:t>
+            </a:r>
+            <a:endParaRPr lang="en-US" sz="1300" dirty="0"/>
+          </a:p>
+        </p:txBody>
+      </p:sp>
+      <p:sp>
+        <p:nvSpPr>
+          <p:cNvPr id="3" name="Text 1"/>
+          <p:cNvSpPr/>
+          <p:nvPr/>
+        </p:nvSpPr>
+        <p:spPr>
+          <a:xfrm>
+            <a:off x="548640" y="731520"/>
+            <a:ext cx="10515600" cy="822960"/>
+          </a:xfrm>
+          <a:prstGeom prst="rect">
+            <a:avLst/>
+          </a:prstGeom>
+          <a:noFill/>
+          <a:ln/>
+        </p:spPr>
+        <p:txBody>
+          <a:bodyPr wrap="square" lIns="0" tIns="0" rIns="0" bIns="0" rtlCol="0" anchor="ctr"/>
+          <a:lstStyle/>
+          <a:p>
+            <a:pPr indent="0" marL="0">
+              <a:buNone/>
+            </a:pPr>
+            <a:r>
+              <a:rPr lang="en-US" sz="3400" b="1" dirty="0">
+                <a:solidFill>
+                  <a:srgbClr val="211F1B"/>
+                </a:solidFill>
+                <a:latin typeface="Cambria" pitchFamily="34" charset="0"/>
+                <a:ea typeface="Cambria" pitchFamily="34" charset="-122"/>
+                <a:cs typeface="Cambria" pitchFamily="34" charset="-120"/>
+              </a:rPr>
+              <a:t>People already pay for this — slowly</a:t>
+            </a:r>
+            <a:endParaRPr lang="en-US" sz="3400" dirty="0"/>
+          </a:p>
+        </p:txBody>
+      </p:sp>
+      <p:sp>
+        <p:nvSpPr>
+          <p:cNvPr id="4" name="Shape 2"/>
+          <p:cNvSpPr/>
+          <p:nvPr/>
+        </p:nvSpPr>
+        <p:spPr>
+          <a:xfrm>
+            <a:off x="548640" y="1965960"/>
+            <a:ext cx="3291840" cy="1371600"/>
+          </a:xfrm>
+          <a:prstGeom prst="roundRect">
+            <a:avLst>
+              <a:gd name="adj" fmla="val 8000"/>
+            </a:avLst>
+          </a:prstGeom>
+          <a:solidFill>
+            <a:srgbClr val="FFFFFF"/>
+          </a:solidFill>
+          <a:ln w="12700">
+            <a:solidFill>
+              <a:srgbClr val="E7E3D9"/>
+            </a:solidFill>
+            <a:prstDash val="solid"/>
+          </a:ln>
+          <a:effectLst>
+            <a:outerShdw sx="100000" sy="100000" kx="0" ky="0" algn="bl" rotWithShape="0" blurRad="101600" dist="38100" dir="5400000">
+              <a:srgbClr val="211F1B">
+                <a:alpha val="12000"/>
+              </a:srgbClr>
+            </a:outerShdw>
+          </a:effectLst>
+        </p:spPr>
+      </p:sp>
+      <p:sp>
+        <p:nvSpPr>
+          <p:cNvPr id="5" name="Text 3"/>
+          <p:cNvSpPr/>
+          <p:nvPr/>
+        </p:nvSpPr>
+        <p:spPr>
+          <a:xfrm>
+            <a:off x="548640" y="2130552"/>
+            <a:ext cx="3291840" cy="754380"/>
+          </a:xfrm>
+          <a:prstGeom prst="rect">
+            <a:avLst/>
+          </a:prstGeom>
+          <a:noFill/>
+          <a:ln/>
+        </p:spPr>
+        <p:txBody>
+          <a:bodyPr wrap="square" lIns="0" tIns="0" rIns="0" bIns="0" rtlCol="0" anchor="ctr"/>
+          <a:lstStyle/>
+          <a:p>
+            <a:pPr algn="ctr" indent="0" marL="0">
+              <a:buNone/>
+            </a:pPr>
+            <a:r>
+              <a:rPr lang="en-US" sz="4000" b="1" dirty="0">
+                <a:solidFill>
+                  <a:srgbClr val="2E7D5B"/>
+                </a:solidFill>
+                <a:latin typeface="Cambria" pitchFamily="34" charset="0"/>
+                <a:ea typeface="Cambria" pitchFamily="34" charset="-122"/>
+                <a:cs typeface="Cambria" pitchFamily="34" charset="-120"/>
+              </a:rPr>
+              <a:t>100M+</a:t>
+            </a:r>
+            <a:endParaRPr lang="en-US" sz="4000" dirty="0"/>
+          </a:p>
+        </p:txBody>
+      </p:sp>
+      <p:sp>
+        <p:nvSpPr>
+          <p:cNvPr id="6" name="Text 4"/>
+          <p:cNvSpPr/>
+          <p:nvPr/>
+        </p:nvSpPr>
+        <p:spPr>
+          <a:xfrm>
+            <a:off x="731520" y="2770632"/>
+            <a:ext cx="2926080" cy="457200"/>
+          </a:xfrm>
+          <a:prstGeom prst="rect">
+            <a:avLst/>
+          </a:prstGeom>
+          <a:noFill/>
+          <a:ln/>
+        </p:spPr>
+        <p:txBody>
+          <a:bodyPr wrap="square" lIns="0" tIns="0" rIns="0" bIns="0" rtlCol="0" anchor="ctr"/>
+          <a:lstStyle/>
+          <a:p>
+            <a:pPr algn="ctr" indent="0" marL="0">
+              <a:buNone/>
+            </a:pPr>
+            <a:r>
+              <a:rPr lang="en-US" sz="1250" dirty="0">
+                <a:solidFill>
+                  <a:srgbClr val="68655A"/>
+                </a:solidFill>
+                <a:latin typeface="Calibri" pitchFamily="34" charset="0"/>
+                <a:ea typeface="Calibri" pitchFamily="34" charset="-122"/>
+                <a:cs typeface="Calibri" pitchFamily="34" charset="-120"/>
+              </a:rPr>
+              <a:t>Americans hold medical debt</a:t>
+            </a:r>
+            <a:endParaRPr lang="en-US" sz="1250" dirty="0"/>
+          </a:p>
+        </p:txBody>
+      </p:sp>
+      <p:sp>
+        <p:nvSpPr>
+          <p:cNvPr id="7" name="Shape 5"/>
+          <p:cNvSpPr/>
+          <p:nvPr/>
+        </p:nvSpPr>
+        <p:spPr>
+          <a:xfrm>
+            <a:off x="3977640" y="1965960"/>
+            <a:ext cx="3291840" cy="1371600"/>
+          </a:xfrm>
+          <a:prstGeom prst="roundRect">
+            <a:avLst>
+              <a:gd name="adj" fmla="val 8000"/>
+            </a:avLst>
+          </a:prstGeom>
+          <a:solidFill>
+            <a:srgbClr val="FFFFFF"/>
+          </a:solidFill>
+          <a:ln w="12700">
+            <a:solidFill>
+              <a:srgbClr val="E7E3D9"/>
+            </a:solidFill>
+            <a:prstDash val="solid"/>
+          </a:ln>
+          <a:effectLst>
+            <a:outerShdw sx="100000" sy="100000" kx="0" ky="0" algn="bl" rotWithShape="0" blurRad="101600" dist="38100" dir="5400000">
+              <a:srgbClr val="211F1B">
+                <a:alpha val="12000"/>
+              </a:srgbClr>
+            </a:outerShdw>
+          </a:effectLst>
+        </p:spPr>
+      </p:sp>
+      <p:sp>
+        <p:nvSpPr>
+          <p:cNvPr id="8" name="Text 6"/>
+          <p:cNvSpPr/>
+          <p:nvPr/>
+        </p:nvSpPr>
+        <p:spPr>
+          <a:xfrm>
+            <a:off x="3977640" y="2130552"/>
+            <a:ext cx="3291840" cy="754380"/>
+          </a:xfrm>
+          <a:prstGeom prst="rect">
+            <a:avLst/>
+          </a:prstGeom>
+          <a:noFill/>
+          <a:ln/>
+        </p:spPr>
+        <p:txBody>
+          <a:bodyPr wrap="square" lIns="0" tIns="0" rIns="0" bIns="0" rtlCol="0" anchor="ctr"/>
+          <a:lstStyle/>
+          <a:p>
+            <a:pPr algn="ctr" indent="0" marL="0">
+              <a:buNone/>
+            </a:pPr>
+            <a:r>
+              <a:rPr lang="en-US" sz="4000" b="1" dirty="0">
+                <a:solidFill>
+                  <a:srgbClr val="B07A2C"/>
+                </a:solidFill>
+                <a:latin typeface="Cambria" pitchFamily="34" charset="0"/>
+                <a:ea typeface="Cambria" pitchFamily="34" charset="-122"/>
+                <a:cs typeface="Cambria" pitchFamily="34" charset="-120"/>
+              </a:rPr>
+              <a:t>1.5B</a:t>
+            </a:r>
+            <a:endParaRPr lang="en-US" sz="4000" dirty="0"/>
+          </a:p>
+        </p:txBody>
+      </p:sp>
+      <p:sp>
+        <p:nvSpPr>
+          <p:cNvPr id="9" name="Text 7"/>
+          <p:cNvSpPr/>
+          <p:nvPr/>
+        </p:nvSpPr>
+        <p:spPr>
+          <a:xfrm>
+            <a:off x="4160520" y="2770632"/>
+            <a:ext cx="2926080" cy="457200"/>
+          </a:xfrm>
+          <a:prstGeom prst="rect">
+            <a:avLst/>
+          </a:prstGeom>
+          <a:noFill/>
+          <a:ln/>
+        </p:spPr>
+        <p:txBody>
+          <a:bodyPr wrap="square" lIns="0" tIns="0" rIns="0" bIns="0" rtlCol="0" anchor="ctr"/>
+          <a:lstStyle/>
+          <a:p>
+            <a:pPr algn="ctr" indent="0" marL="0">
+              <a:buNone/>
+            </a:pPr>
+            <a:r>
+              <a:rPr lang="en-US" sz="1250" dirty="0">
+                <a:solidFill>
+                  <a:srgbClr val="68655A"/>
+                </a:solidFill>
+                <a:latin typeface="Calibri" pitchFamily="34" charset="0"/>
+                <a:ea typeface="Calibri" pitchFamily="34" charset="-122"/>
+                <a:cs typeface="Calibri" pitchFamily="34" charset="-120"/>
+              </a:rPr>
+              <a:t>medical bills issued/year in the US</a:t>
+            </a:r>
+            <a:endParaRPr lang="en-US" sz="1250" dirty="0"/>
+          </a:p>
+        </p:txBody>
+      </p:sp>
+      <p:sp>
+        <p:nvSpPr>
+          <p:cNvPr id="10" name="Shape 8"/>
+          <p:cNvSpPr/>
+          <p:nvPr/>
+        </p:nvSpPr>
+        <p:spPr>
+          <a:xfrm>
+            <a:off x="7406640" y="1965960"/>
+            <a:ext cx="3840480" cy="1371600"/>
+          </a:xfrm>
+          <a:prstGeom prst="roundRect">
+            <a:avLst>
+              <a:gd name="adj" fmla="val 8000"/>
+            </a:avLst>
+          </a:prstGeom>
+          <a:solidFill>
+            <a:srgbClr val="FFFFFF"/>
+          </a:solidFill>
+          <a:ln w="12700">
+            <a:solidFill>
+              <a:srgbClr val="E7E3D9"/>
+            </a:solidFill>
+            <a:prstDash val="solid"/>
+          </a:ln>
+          <a:effectLst>
+            <a:outerShdw sx="100000" sy="100000" kx="0" ky="0" algn="bl" rotWithShape="0" blurRad="101600" dist="38100" dir="5400000">
+              <a:srgbClr val="211F1B">
+                <a:alpha val="12000"/>
+              </a:srgbClr>
+            </a:outerShdw>
+          </a:effectLst>
+        </p:spPr>
+      </p:sp>
+      <p:sp>
+        <p:nvSpPr>
+          <p:cNvPr id="11" name="Text 9"/>
+          <p:cNvSpPr/>
+          <p:nvPr/>
+        </p:nvSpPr>
+        <p:spPr>
+          <a:xfrm>
+            <a:off x="7406640" y="2130552"/>
+            <a:ext cx="3840480" cy="754380"/>
+          </a:xfrm>
+          <a:prstGeom prst="rect">
+            <a:avLst/>
+          </a:prstGeom>
+          <a:noFill/>
+          <a:ln/>
+        </p:spPr>
+        <p:txBody>
+          <a:bodyPr wrap="square" lIns="0" tIns="0" rIns="0" bIns="0" rtlCol="0" anchor="ctr"/>
+          <a:lstStyle/>
+          <a:p>
+            <a:pPr algn="ctr" indent="0" marL="0">
+              <a:buNone/>
+            </a:pPr>
+            <a:r>
+              <a:rPr lang="en-US" sz="4000" b="1" dirty="0">
+                <a:solidFill>
+                  <a:srgbClr val="AB4A37"/>
+                </a:solidFill>
+                <a:latin typeface="Cambria" pitchFamily="34" charset="0"/>
+                <a:ea typeface="Cambria" pitchFamily="34" charset="-122"/>
+                <a:cs typeface="Cambria" pitchFamily="34" charset="-120"/>
+              </a:rPr>
+              <a:t>25–35%</a:t>
+            </a:r>
+            <a:endParaRPr lang="en-US" sz="4000" dirty="0"/>
+          </a:p>
+        </p:txBody>
+      </p:sp>
+      <p:sp>
+        <p:nvSpPr>
+          <p:cNvPr id="12" name="Text 10"/>
+          <p:cNvSpPr/>
+          <p:nvPr/>
+        </p:nvSpPr>
+        <p:spPr>
+          <a:xfrm>
+            <a:off x="7589520" y="2770632"/>
+            <a:ext cx="3474720" cy="457200"/>
+          </a:xfrm>
+          <a:prstGeom prst="rect">
+            <a:avLst/>
+          </a:prstGeom>
+          <a:noFill/>
+          <a:ln/>
+        </p:spPr>
+        <p:txBody>
+          <a:bodyPr wrap="square" lIns="0" tIns="0" rIns="0" bIns="0" rtlCol="0" anchor="ctr"/>
+          <a:lstStyle/>
+          <a:p>
+            <a:pPr algn="ctr" indent="0" marL="0">
+              <a:buNone/>
+            </a:pPr>
+            <a:r>
+              <a:rPr lang="en-US" sz="1250" dirty="0">
+                <a:solidFill>
+                  <a:srgbClr val="68655A"/>
+                </a:solidFill>
+                <a:latin typeface="Calibri" pitchFamily="34" charset="0"/>
+                <a:ea typeface="Calibri" pitchFamily="34" charset="-122"/>
+                <a:cs typeface="Calibri" pitchFamily="34" charset="-120"/>
+              </a:rPr>
+              <a:t>contingency fees existing services already charge</a:t>
+            </a:r>
+            <a:endParaRPr lang="en-US" sz="1250" dirty="0"/>
+          </a:p>
+        </p:txBody>
+      </p:sp>
+      <p:sp>
+        <p:nvSpPr>
+          <p:cNvPr id="13" name="Shape 11"/>
+          <p:cNvSpPr/>
+          <p:nvPr/>
+        </p:nvSpPr>
+        <p:spPr>
+          <a:xfrm>
+            <a:off x="548640" y="3566160"/>
+            <a:ext cx="5120640" cy="2468880"/>
+          </a:xfrm>
+          <a:prstGeom prst="roundRect">
+            <a:avLst>
+              <a:gd name="adj" fmla="val 5185"/>
+            </a:avLst>
+          </a:prstGeom>
+          <a:solidFill>
+            <a:srgbClr val="1B4D38"/>
+          </a:solidFill>
+          <a:ln/>
+        </p:spPr>
+      </p:sp>
+      <p:sp>
+        <p:nvSpPr>
+          <p:cNvPr id="14" name="Text 12"/>
+          <p:cNvSpPr/>
+          <p:nvPr/>
+        </p:nvSpPr>
+        <p:spPr>
+          <a:xfrm>
+            <a:off x="822960" y="3749040"/>
+            <a:ext cx="4572000" cy="914400"/>
+          </a:xfrm>
+          <a:prstGeom prst="rect">
+            <a:avLst/>
+          </a:prstGeom>
+          <a:noFill/>
+          <a:ln/>
+        </p:spPr>
+        <p:txBody>
+          <a:bodyPr wrap="square" lIns="0" tIns="0" rIns="0" bIns="0" rtlCol="0" anchor="ctr"/>
+          <a:lstStyle/>
+          <a:p>
+            <a:pPr indent="0" marL="0">
+              <a:lnSpc>
+                <a:spcPct val="115000"/>
+              </a:lnSpc>
+              <a:buNone/>
+            </a:pPr>
+            <a:r>
+              <a:rPr lang="en-US" sz="2000" b="1" dirty="0">
+                <a:solidFill>
+                  <a:srgbClr val="FFFFFF"/>
+                </a:solidFill>
+                <a:latin typeface="Cambria" pitchFamily="34" charset="0"/>
+                <a:ea typeface="Cambria" pitchFamily="34" charset="-122"/>
+                <a:cs typeface="Cambria" pitchFamily="34" charset="-120"/>
+              </a:rPr>
+              <a:t>“We found $112</a:t>
+            </a:r>
+            <a:endParaRPr lang="en-US" sz="2000" dirty="0"/>
+          </a:p>
+          <a:p>
+            <a:pPr indent="0" marL="0">
+              <a:lnSpc>
+                <a:spcPct val="115000"/>
+              </a:lnSpc>
+              <a:buNone/>
+            </a:pPr>
+            <a:r>
+              <a:rPr lang="en-US" sz="2000" b="1" dirty="0">
+                <a:solidFill>
+                  <a:srgbClr val="FFFFFF"/>
+                </a:solidFill>
+                <a:latin typeface="Cambria" pitchFamily="34" charset="0"/>
+                <a:ea typeface="Cambria" pitchFamily="34" charset="-122"/>
+                <a:cs typeface="Cambria" pitchFamily="34" charset="-120"/>
+              </a:rPr>
+              <a:t>you don't owe.”</a:t>
+            </a:r>
+            <a:endParaRPr lang="en-US" sz="2000" dirty="0"/>
+          </a:p>
+        </p:txBody>
+      </p:sp>
+      <p:sp>
+        <p:nvSpPr>
+          <p:cNvPr id="15" name="Text 13"/>
+          <p:cNvSpPr/>
+          <p:nvPr/>
+        </p:nvSpPr>
+        <p:spPr>
+          <a:xfrm>
+            <a:off x="822960" y="4709160"/>
+            <a:ext cx="4572000" cy="1188720"/>
+          </a:xfrm>
+          <a:prstGeom prst="rect">
+            <a:avLst/>
+          </a:prstGeom>
+          <a:noFill/>
+          <a:ln/>
+        </p:spPr>
+        <p:txBody>
+          <a:bodyPr wrap="square" lIns="0" tIns="0" rIns="0" bIns="0" rtlCol="0" anchor="ctr"/>
+          <a:lstStyle/>
+          <a:p>
+            <a:pPr indent="0" marL="0">
+              <a:lnSpc>
+                <a:spcPct val="130000"/>
+              </a:lnSpc>
+              <a:buNone/>
+            </a:pPr>
+            <a:r>
+              <a:rPr lang="en-US" sz="1300" dirty="0">
+                <a:solidFill>
+                  <a:srgbClr val="CFE3D8"/>
+                </a:solidFill>
+                <a:latin typeface="Calibri" pitchFamily="34" charset="0"/>
+                <a:ea typeface="Calibri" pitchFamily="34" charset="-122"/>
+                <a:cs typeface="Calibri" pitchFamily="34" charset="-120"/>
+              </a:rPr>
+              <a:t>Same content shape as viral tax-refund and settlement-check posts. We built a shareable result card for exactly this moment.</a:t>
+            </a:r>
+            <a:endParaRPr lang="en-US" sz="1300" dirty="0"/>
+          </a:p>
+        </p:txBody>
+      </p:sp>
+      <p:sp>
+        <p:nvSpPr>
+          <p:cNvPr id="16" name="Text 14"/>
+          <p:cNvSpPr/>
+          <p:nvPr/>
+        </p:nvSpPr>
+        <p:spPr>
+          <a:xfrm>
+            <a:off x="5989320" y="3566160"/>
+            <a:ext cx="5486400" cy="320040"/>
+          </a:xfrm>
+          <a:prstGeom prst="rect">
+            <a:avLst/>
+          </a:prstGeom>
+          <a:noFill/>
+          <a:ln/>
+        </p:spPr>
+        <p:txBody>
+          <a:bodyPr wrap="square" lIns="0" tIns="0" rIns="0" bIns="0" rtlCol="0" anchor="ctr"/>
+          <a:lstStyle/>
+          <a:p>
+            <a:pPr indent="0" marL="0">
+              <a:buNone/>
+            </a:pPr>
+            <a:r>
+              <a:rPr lang="en-US" sz="1350" b="1" dirty="0">
+                <a:solidFill>
+                  <a:srgbClr val="211F1B"/>
+                </a:solidFill>
+                <a:latin typeface="Calibri" pitchFamily="34" charset="0"/>
+                <a:ea typeface="Calibri" pitchFamily="34" charset="-122"/>
+                <a:cs typeface="Calibri" pitchFamily="34" charset="-120"/>
+              </a:rPr>
+              <a:t>Distribution already mapped</a:t>
+            </a:r>
+            <a:endParaRPr lang="en-US" sz="1350" dirty="0"/>
+          </a:p>
+        </p:txBody>
+      </p:sp>
+      <p:sp>
+        <p:nvSpPr>
+          <p:cNvPr id="17" name="Shape 15"/>
+          <p:cNvSpPr/>
+          <p:nvPr/>
+        </p:nvSpPr>
+        <p:spPr>
+          <a:xfrm>
+            <a:off x="5989320" y="3977640"/>
+            <a:ext cx="5120640" cy="548640"/>
+          </a:xfrm>
+          <a:prstGeom prst="roundRect">
+            <a:avLst>
+              <a:gd name="adj" fmla="val 16667"/>
+            </a:avLst>
+          </a:prstGeom>
+          <a:solidFill>
+            <a:srgbClr val="FFFFFF"/>
+          </a:solidFill>
+          <a:ln w="12700">
+            <a:solidFill>
+              <a:srgbClr val="E7E3D9"/>
+            </a:solidFill>
+            <a:prstDash val="solid"/>
+          </a:ln>
+        </p:spPr>
+      </p:sp>
+      <p:sp>
+        <p:nvSpPr>
+          <p:cNvPr id="18" name="Text 16"/>
+          <p:cNvSpPr/>
+          <p:nvPr/>
+        </p:nvSpPr>
+        <p:spPr>
+          <a:xfrm>
+            <a:off x="6217920" y="3977640"/>
+            <a:ext cx="4663440" cy="548640"/>
+          </a:xfrm>
+          <a:prstGeom prst="rect">
+            <a:avLst/>
+          </a:prstGeom>
+          <a:noFill/>
+          <a:ln/>
+        </p:spPr>
+        <p:txBody>
+          <a:bodyPr wrap="square" lIns="0" tIns="0" rIns="0" bIns="0" rtlCol="0" anchor="ctr"/>
+          <a:lstStyle/>
+          <a:p>
+            <a:pPr indent="0" marL="0">
+              <a:lnSpc>
+                <a:spcPct val="115000"/>
+              </a:lnSpc>
+              <a:buNone/>
+            </a:pPr>
+            <a:r>
+              <a:rPr lang="en-US" sz="1200" dirty="0">
+                <a:solidFill>
+                  <a:srgbClr val="211F1B"/>
+                </a:solidFill>
+                <a:latin typeface="Calibri" pitchFamily="34" charset="0"/>
+                <a:ea typeface="Calibri" pitchFamily="34" charset="-122"/>
+                <a:cs typeface="Calibri" pitchFamily="34" charset="-120"/>
+              </a:rPr>
+              <a:t>r/personalfinance, r/HealthInsurance</a:t>
+            </a:r>
+            <a:endParaRPr lang="en-US" sz="1200" dirty="0"/>
+          </a:p>
+        </p:txBody>
+      </p:sp>
+      <p:sp>
+        <p:nvSpPr>
+          <p:cNvPr id="19" name="Shape 17"/>
+          <p:cNvSpPr/>
+          <p:nvPr/>
+        </p:nvSpPr>
+        <p:spPr>
+          <a:xfrm>
+            <a:off x="5989320" y="4636008"/>
+            <a:ext cx="5120640" cy="548640"/>
+          </a:xfrm>
+          <a:prstGeom prst="roundRect">
+            <a:avLst>
+              <a:gd name="adj" fmla="val 16667"/>
+            </a:avLst>
+          </a:prstGeom>
+          <a:solidFill>
+            <a:srgbClr val="FFFFFF"/>
+          </a:solidFill>
+          <a:ln w="12700">
+            <a:solidFill>
+              <a:srgbClr val="E7E3D9"/>
+            </a:solidFill>
+            <a:prstDash val="solid"/>
+          </a:ln>
+        </p:spPr>
+      </p:sp>
+      <p:sp>
+        <p:nvSpPr>
+          <p:cNvPr id="20" name="Text 18"/>
+          <p:cNvSpPr/>
+          <p:nvPr/>
+        </p:nvSpPr>
+        <p:spPr>
+          <a:xfrm>
+            <a:off x="6217920" y="4636008"/>
+            <a:ext cx="4663440" cy="548640"/>
+          </a:xfrm>
+          <a:prstGeom prst="rect">
+            <a:avLst/>
+          </a:prstGeom>
+          <a:noFill/>
+          <a:ln/>
+        </p:spPr>
+        <p:txBody>
+          <a:bodyPr wrap="square" lIns="0" tIns="0" rIns="0" bIns="0" rtlCol="0" anchor="ctr"/>
+          <a:lstStyle/>
+          <a:p>
+            <a:pPr indent="0" marL="0">
+              <a:lnSpc>
+                <a:spcPct val="115000"/>
+              </a:lnSpc>
+              <a:buNone/>
+            </a:pPr>
+            <a:r>
+              <a:rPr lang="en-US" sz="1200" dirty="0">
+                <a:solidFill>
+                  <a:srgbClr val="211F1B"/>
+                </a:solidFill>
+                <a:latin typeface="Calibri" pitchFamily="34" charset="0"/>
+                <a:ea typeface="Calibri" pitchFamily="34" charset="-122"/>
+                <a:cs typeface="Calibri" pitchFamily="34" charset="-120"/>
+              </a:rPr>
+              <a:t>Patient-advocacy Facebook groups</a:t>
+            </a:r>
+            <a:endParaRPr lang="en-US" sz="1200" dirty="0"/>
+          </a:p>
+        </p:txBody>
+      </p:sp>
+      <p:sp>
+        <p:nvSpPr>
+          <p:cNvPr id="21" name="Shape 19"/>
+          <p:cNvSpPr/>
+          <p:nvPr/>
+        </p:nvSpPr>
+        <p:spPr>
+          <a:xfrm>
+            <a:off x="5989320" y="5294376"/>
+            <a:ext cx="5120640" cy="548640"/>
+          </a:xfrm>
+          <a:prstGeom prst="roundRect">
+            <a:avLst>
+              <a:gd name="adj" fmla="val 16667"/>
+            </a:avLst>
+          </a:prstGeom>
+          <a:solidFill>
+            <a:srgbClr val="FFFFFF"/>
+          </a:solidFill>
+          <a:ln w="12700">
+            <a:solidFill>
+              <a:srgbClr val="E7E3D9"/>
+            </a:solidFill>
+            <a:prstDash val="solid"/>
+          </a:ln>
+        </p:spPr>
+      </p:sp>
+      <p:sp>
+        <p:nvSpPr>
+          <p:cNvPr id="22" name="Text 20"/>
+          <p:cNvSpPr/>
+          <p:nvPr/>
+        </p:nvSpPr>
+        <p:spPr>
+          <a:xfrm>
+            <a:off x="6217920" y="5294376"/>
+            <a:ext cx="4663440" cy="548640"/>
+          </a:xfrm>
+          <a:prstGeom prst="rect">
+            <a:avLst/>
+          </a:prstGeom>
+          <a:noFill/>
+          <a:ln/>
+        </p:spPr>
+        <p:txBody>
+          <a:bodyPr wrap="square" lIns="0" tIns="0" rIns="0" bIns="0" rtlCol="0" anchor="ctr"/>
+          <a:lstStyle/>
+          <a:p>
+            <a:pPr indent="0" marL="0">
+              <a:lnSpc>
+                <a:spcPct val="115000"/>
+              </a:lnSpc>
+              <a:buNone/>
+            </a:pPr>
+            <a:r>
+              <a:rPr lang="en-US" sz="1200" dirty="0">
+                <a:solidFill>
+                  <a:srgbClr val="211F1B"/>
+                </a:solidFill>
+                <a:latin typeface="Calibri" pitchFamily="34" charset="0"/>
+                <a:ea typeface="Calibri" pitchFamily="34" charset="-122"/>
+                <a:cs typeface="Calibri" pitchFamily="34" charset="-120"/>
+              </a:rPr>
+              <a:t>Employer benefits partnerships — 1 deal reaches thousands of employees</a:t>
+            </a:r>
+            <a:endParaRPr lang="en-US" sz="1200" dirty="0"/>
+          </a:p>
+        </p:txBody>
+      </p:sp>
+      <p:sp>
+        <p:nvSpPr>
+          <p:cNvPr id="23" name="Text 21"/>
+          <p:cNvSpPr/>
+          <p:nvPr/>
+        </p:nvSpPr>
+        <p:spPr>
+          <a:xfrm>
+            <a:off x="11338560" y="6446520"/>
+            <a:ext cx="640080" cy="274320"/>
+          </a:xfrm>
+          <a:prstGeom prst="rect">
+            <a:avLst/>
+          </a:prstGeom>
+          <a:noFill/>
+          <a:ln/>
+        </p:spPr>
+        <p:txBody>
+          <a:bodyPr wrap="square" rtlCol="0" anchor="ctr"/>
+          <a:lstStyle/>
+          <a:p>
+            <a:pPr algn="r" indent="0" marL="0">
+              <a:buNone/>
+            </a:pPr>
+            <a:r>
+              <a:rPr lang="en-US" sz="1000" dirty="0">
+                <a:solidFill>
+                  <a:srgbClr val="68655A"/>
+                </a:solidFill>
+                <a:latin typeface="Calibri" pitchFamily="34" charset="0"/>
+                <a:ea typeface="Calibri" pitchFamily="34" charset="-122"/>
+                <a:cs typeface="Calibri" pitchFamily="34" charset="-120"/>
+              </a:rPr>
+              <a:t>8 / 9</a:t>
+            </a:r>
+            <a:endParaRPr lang="en-US" sz="1000" dirty="0"/>
+          </a:p>
+        </p:txBody>
+      </p:sp>
+    </p:spTree>
+  </p:cSld>
+  <p:clrMapOvr>
+    <a:masterClrMapping/>
+  </p:clrMapOvr>
+</p:sld>
+</file>
+
+<file path=ppt/slides/slide9.xml><?xml version="1.0" encoding="utf-8"?>
+<p:sld xmlns:a="http://schemas.openxmlformats.org/drawingml/2006/main" xmlns:r="http://schemas.openxmlformats.org/officeDocument/2006/relationships" xmlns:p="http://schemas.openxmlformats.org/presentationml/2006/main">
+  <p:cSld name="Slide 9">
     <p:bg>
       <p:bgPr>
         <a:solidFill>
@@ -6885,7 +8578,7 @@
         </p:nvSpPr>
         <p:spPr>
           <a:xfrm>
-            <a:off x="548640" y="1005840"/>
+            <a:off x="548640" y="1188720"/>
             <a:ext cx="10515600" cy="1005840"/>
           </a:xfrm>
           <a:prstGeom prst="rect">
@@ -6924,7 +8617,7 @@
         </p:nvSpPr>
         <p:spPr>
           <a:xfrm>
-            <a:off x="548640" y="1828800"/>
+            <a:off x="548640" y="2011680"/>
             <a:ext cx="10058400" cy="548640"/>
           </a:xfrm>
           <a:prstGeom prst="rect">
@@ -6963,7 +8656,7 @@
         </p:nvSpPr>
         <p:spPr>
           <a:xfrm>
-            <a:off x="548640" y="2743200"/>
+            <a:off x="548640" y="3108960"/>
             <a:ext cx="4572000" cy="365760"/>
           </a:xfrm>
           <a:prstGeom prst="rect">
@@ -6988,7 +8681,7 @@
                 <a:ea typeface="Calibri" pitchFamily="34" charset="-122"/>
                 <a:cs typeface="Calibri" pitchFamily="34" charset="-120"/>
               </a:rPr>
-              <a:t>Team</a:t>
+              <a:t>Seeking</a:t>
             </a:r>
             <a:endParaRPr lang="en-US" sz="1400" dirty="0"/>
           </a:p>
@@ -7002,109 +8695,8 @@
         </p:nvSpPr>
         <p:spPr>
           <a:xfrm>
-            <a:off x="548640" y="3108960"/>
-            <a:ext cx="5486400" cy="914400"/>
-          </a:xfrm>
-          <a:prstGeom prst="rect">
-            <a:avLst/>
-          </a:prstGeom>
-          <a:noFill/>
-          <a:ln/>
-        </p:spPr>
-        <p:txBody>
-          <a:bodyPr wrap="square" lIns="0" tIns="0" rIns="0" bIns="0" rtlCol="0" anchor="ctr"/>
-          <a:lstStyle/>
-          <a:p>
-            <a:pPr indent="0" marL="0">
-              <a:lnSpc>
-                <a:spcPct val="140000"/>
-              </a:lnSpc>
-              <a:buNone/>
-            </a:pPr>
-            <a:r>
-              <a:rPr lang="en-US" sz="1400" dirty="0">
-                <a:solidFill>
-                  <a:srgbClr val="FFFFFF"/>
-                </a:solidFill>
-                <a:latin typeface="Calibri" pitchFamily="34" charset="0"/>
-                <a:ea typeface="Calibri" pitchFamily="34" charset="-122"/>
-                <a:cs typeface="Calibri" pitchFamily="34" charset="-120"/>
-              </a:rPr>
-              <a:t>[Name] — [role / one line of relevant background]</a:t>
-            </a:r>
-            <a:endParaRPr lang="en-US" sz="1400" dirty="0"/>
-          </a:p>
-          <a:p>
-            <a:pPr indent="0" marL="0">
-              <a:lnSpc>
-                <a:spcPct val="140000"/>
-              </a:lnSpc>
-              <a:buNone/>
-            </a:pPr>
-            <a:r>
-              <a:rPr lang="en-US" sz="1400" dirty="0">
-                <a:solidFill>
-                  <a:srgbClr val="FFFFFF"/>
-                </a:solidFill>
-                <a:latin typeface="Calibri" pitchFamily="34" charset="0"/>
-                <a:ea typeface="Calibri" pitchFamily="34" charset="-122"/>
-                <a:cs typeface="Calibri" pitchFamily="34" charset="-120"/>
-              </a:rPr>
-              <a:t>[Name] — [role / one line of relevant background]</a:t>
-            </a:r>
-            <a:endParaRPr lang="en-US" sz="1400" dirty="0"/>
-          </a:p>
-        </p:txBody>
-      </p:sp>
-      <p:sp>
-        <p:nvSpPr>
-          <p:cNvPr id="7" name="Text 5"/>
-          <p:cNvSpPr/>
-          <p:nvPr/>
-        </p:nvSpPr>
-        <p:spPr>
-          <a:xfrm>
-            <a:off x="548640" y="4206240"/>
-            <a:ext cx="4572000" cy="365760"/>
-          </a:xfrm>
-          <a:prstGeom prst="rect">
-            <a:avLst/>
-          </a:prstGeom>
-          <a:noFill/>
-          <a:ln/>
-        </p:spPr>
-        <p:txBody>
-          <a:bodyPr wrap="square" lIns="0" tIns="0" rIns="0" bIns="0" rtlCol="0" anchor="ctr"/>
-          <a:lstStyle/>
-          <a:p>
-            <a:pPr indent="0" marL="0">
-              <a:buNone/>
-            </a:pPr>
-            <a:r>
-              <a:rPr lang="en-US" sz="1400" b="1" dirty="0">
-                <a:solidFill>
-                  <a:srgbClr val="8FB6A3"/>
-                </a:solidFill>
-                <a:latin typeface="Calibri" pitchFamily="34" charset="0"/>
-                <a:ea typeface="Calibri" pitchFamily="34" charset="-122"/>
-                <a:cs typeface="Calibri" pitchFamily="34" charset="-120"/>
-              </a:rPr>
-              <a:t>Seeking</a:t>
-            </a:r>
-            <a:endParaRPr lang="en-US" sz="1400" dirty="0"/>
-          </a:p>
-        </p:txBody>
-      </p:sp>
-      <p:sp>
-        <p:nvSpPr>
-          <p:cNvPr id="8" name="Text 6"/>
-          <p:cNvSpPr/>
-          <p:nvPr/>
-        </p:nvSpPr>
-        <p:spPr>
-          <a:xfrm>
-            <a:off x="548640" y="4572000"/>
-            <a:ext cx="7772400" cy="914400"/>
+            <a:off x="548640" y="3474720"/>
+            <a:ext cx="8686800" cy="1005840"/>
           </a:xfrm>
           <a:prstGeom prst="rect">
             <a:avLst/>
@@ -7123,7 +8715,7 @@
               <a:buNone/>
             </a:pPr>
             <a:r>
-              <a:rPr lang="en-US" sz="1350" dirty="0">
+              <a:rPr lang="en-US" sz="1500" dirty="0">
                 <a:solidFill>
                   <a:srgbClr val="CFE3D8"/>
                 </a:solidFill>
@@ -7131,9 +8723,87 @@
                 <a:ea typeface="Calibri" pitchFamily="34" charset="-122"/>
                 <a:cs typeface="Calibri" pitchFamily="34" charset="-120"/>
               </a:rPr>
-              <a:t>Pitch access to validate detection accuracy against real, anonymized billing datasets and explore integration partnerships with patient advocacy networks and self-insured employers.</a:t>
-            </a:r>
-            <a:endParaRPr lang="en-US" sz="1350" dirty="0"/>
+              <a:t>Not raising today. Thirty minutes with a fund that has real conviction in consumer healthcare fintech — to pressure-test the data-access strategy and the recovery-verification model the success fee depends on.</a:t>
+            </a:r>
+            <a:endParaRPr lang="en-US" sz="1500" dirty="0"/>
+          </a:p>
+        </p:txBody>
+      </p:sp>
+      <p:sp>
+        <p:nvSpPr>
+          <p:cNvPr id="7" name="Text 5"/>
+          <p:cNvSpPr/>
+          <p:nvPr/>
+        </p:nvSpPr>
+        <p:spPr>
+          <a:xfrm>
+            <a:off x="548640" y="4754880"/>
+            <a:ext cx="4572000" cy="365760"/>
+          </a:xfrm>
+          <a:prstGeom prst="rect">
+            <a:avLst/>
+          </a:prstGeom>
+          <a:noFill/>
+          <a:ln/>
+        </p:spPr>
+        <p:txBody>
+          <a:bodyPr wrap="square" lIns="0" tIns="0" rIns="0" bIns="0" rtlCol="0" anchor="ctr"/>
+          <a:lstStyle/>
+          <a:p>
+            <a:pPr indent="0" marL="0">
+              <a:buNone/>
+            </a:pPr>
+            <a:r>
+              <a:rPr lang="en-US" sz="1400" b="1" dirty="0">
+                <a:solidFill>
+                  <a:srgbClr val="8FB6A3"/>
+                </a:solidFill>
+                <a:latin typeface="Calibri" pitchFamily="34" charset="0"/>
+                <a:ea typeface="Calibri" pitchFamily="34" charset="-122"/>
+                <a:cs typeface="Calibri" pitchFamily="34" charset="-120"/>
+              </a:rPr>
+              <a:t>Team</a:t>
+            </a:r>
+            <a:endParaRPr lang="en-US" sz="1400" dirty="0"/>
+          </a:p>
+        </p:txBody>
+      </p:sp>
+      <p:sp>
+        <p:nvSpPr>
+          <p:cNvPr id="8" name="Text 6"/>
+          <p:cNvSpPr/>
+          <p:nvPr/>
+        </p:nvSpPr>
+        <p:spPr>
+          <a:xfrm>
+            <a:off x="548640" y="5120640"/>
+            <a:ext cx="5486400" cy="457200"/>
+          </a:xfrm>
+          <a:prstGeom prst="rect">
+            <a:avLst/>
+          </a:prstGeom>
+          <a:noFill/>
+          <a:ln/>
+        </p:spPr>
+        <p:txBody>
+          <a:bodyPr wrap="square" lIns="0" tIns="0" rIns="0" bIns="0" rtlCol="0" anchor="ctr"/>
+          <a:lstStyle/>
+          <a:p>
+            <a:pPr indent="0" marL="0">
+              <a:buNone/>
+            </a:pPr>
+            <a:r>
+              <a:rPr lang="en-US" sz="1500" dirty="0">
+                <a:solidFill>
+                  <a:srgbClr val="FFFFFF"/>
+                </a:solidFill>
+                <a:latin typeface="Calibri" pitchFamily="34" charset="0"/>
+                <a:ea typeface="Calibri" pitchFamily="34" charset="-122"/>
+                <a:cs typeface="Calibri" pitchFamily="34" charset="-120"/>
+              </a:rPr>
+              <a:t>[Name] · [Name]</a:t>
+            </a:r>
+            <a:endParaRPr lang="en-US" sz="1500" dirty="0"/>
           </a:p>
         </p:txBody>
       </p:sp>

--- a/pitch_deck/ClearBill_AI_Pitch_Deck.pptx
+++ b/pitch_deck/ClearBill_AI_Pitch_Deck.pptx
@@ -686,7 +686,7 @@
           <a:p>
             <a:r>
               <a:rPr lang="en-US" dirty="0"/>
-              <a:t>[0:10-0:22 TEAM] I'm [Name], [background]. This is [Name], [background]. We built ClearBill AI this weekend because we wanted something we'd actually trust our own families to use the next time a bill like this showed up.</a:t>
+              <a:t>[0:10-0:22 TEAM] I'm Lu Lu — Wharton MBA and a Master's in Computer Science from Penn, and I've been a product management intern at Adobe. This is Yiyan, who's leading our go-to-market strategy. We built ClearBill AI this weekend because we wanted something we'd actually trust our own families to use the next time a bill like this showed up.</a:t>
             </a:r>
             <a:endParaRPr lang="en-US" dirty="0"/>
           </a:p>
@@ -2533,7 +2533,7 @@
                 <a:ea typeface="Cambria" pitchFamily="34" charset="-122"/>
                 <a:cs typeface="Cambria" pitchFamily="34" charset="-120"/>
               </a:rPr>
-              <a:t>N</a:t>
+              <a:t>LL</a:t>
             </a:r>
             <a:endParaRPr lang="en-US" sz="2400" dirty="0"/>
           </a:p>
@@ -2572,7 +2572,7 @@
                 <a:ea typeface="Cambria" pitchFamily="34" charset="-122"/>
                 <a:cs typeface="Cambria" pitchFamily="34" charset="-120"/>
               </a:rPr>
-              <a:t>[Name]</a:t>
+              <a:t>Lu Lu</a:t>
             </a:r>
             <a:endParaRPr lang="en-US" sz="1900" dirty="0"/>
           </a:p>
@@ -2614,7 +2614,7 @@
                 <a:ea typeface="Calibri" pitchFamily="34" charset="-122"/>
                 <a:cs typeface="Calibri" pitchFamily="34" charset="-120"/>
               </a:rPr>
-              <a:t>[Role — one line of relevant background]</a:t>
+              <a:t>Wharton MBA · Penn M.S. Computer Science · PM intern, Adobe</a:t>
             </a:r>
             <a:endParaRPr lang="en-US" sz="1300" dirty="0"/>
           </a:p>
@@ -2673,7 +2673,7 @@
                 <a:ea typeface="Cambria" pitchFamily="34" charset="-122"/>
                 <a:cs typeface="Cambria" pitchFamily="34" charset="-120"/>
               </a:rPr>
-              <a:t>N</a:t>
+              <a:t>Y</a:t>
             </a:r>
             <a:endParaRPr lang="en-US" sz="2400" dirty="0"/>
           </a:p>
@@ -2712,7 +2712,7 @@
                 <a:ea typeface="Cambria" pitchFamily="34" charset="-122"/>
                 <a:cs typeface="Cambria" pitchFamily="34" charset="-120"/>
               </a:rPr>
-              <a:t>[Name]</a:t>
+              <a:t>Yiyan</a:t>
             </a:r>
             <a:endParaRPr lang="en-US" sz="1900" dirty="0"/>
           </a:p>
@@ -2754,7 +2754,7 @@
                 <a:ea typeface="Calibri" pitchFamily="34" charset="-122"/>
                 <a:cs typeface="Calibri" pitchFamily="34" charset="-120"/>
               </a:rPr>
-              <a:t>[Role — one line of relevant background]</a:t>
+              <a:t>Go-to-market &amp; growth</a:t>
             </a:r>
             <a:endParaRPr lang="en-US" sz="1300" dirty="0"/>
           </a:p>
@@ -8801,7 +8801,7 @@
                 <a:ea typeface="Calibri" pitchFamily="34" charset="-122"/>
                 <a:cs typeface="Calibri" pitchFamily="34" charset="-120"/>
               </a:rPr>
-              <a:t>[Name] · [Name]</a:t>
+              <a:t>Lu Lu · Yiyan</a:t>
             </a:r>
             <a:endParaRPr lang="en-US" sz="1500" dirty="0"/>
           </a:p>
